--- a/output/presentations/07-memory-context.pptx
+++ b/output/presentations/07-memory-context.pptx
@@ -2,22 +2,24 @@
 <file path=ppt/presentation.xml><?xml version="1.0" encoding="utf-8"?>
 <p:presentation xmlns:p="http://schemas.openxmlformats.org/presentationml/2006/main">
   <p:sldMasterIdLst>
-    <p:sldMasterId xmlns:r="http://schemas.openxmlformats.org/officeDocument/2006/relationships" id="2147483648" r:id="R9d91d902c22b4bec"/>
+    <p:sldMasterId xmlns:r="http://schemas.openxmlformats.org/officeDocument/2006/relationships" id="2147483648" r:id="R2291f388785d4933"/>
   </p:sldMasterIdLst>
   <p:notesMasterIdLst>
-    <p:notesMasterId xmlns:r="http://schemas.openxmlformats.org/officeDocument/2006/relationships" r:id="Rec68febf494b491a"/>
+    <p:notesMasterId xmlns:r="http://schemas.openxmlformats.org/officeDocument/2006/relationships" r:id="R7c65fee319fd4910"/>
   </p:notesMasterIdLst>
   <p:sldIdLst>
-    <p:sldId xmlns:r="http://schemas.openxmlformats.org/officeDocument/2006/relationships" id="256" r:id="Rf1e4bdc7e43a45fd"/>
-    <p:sldId xmlns:r="http://schemas.openxmlformats.org/officeDocument/2006/relationships" id="257" r:id="R17604313d4f84b7c"/>
-    <p:sldId xmlns:r="http://schemas.openxmlformats.org/officeDocument/2006/relationships" id="258" r:id="R8a1158028e554077"/>
-    <p:sldId xmlns:r="http://schemas.openxmlformats.org/officeDocument/2006/relationships" id="259" r:id="Rcdf08c0de33445ae"/>
-    <p:sldId xmlns:r="http://schemas.openxmlformats.org/officeDocument/2006/relationships" id="260" r:id="Rdd0b267c0251441a"/>
-    <p:sldId xmlns:r="http://schemas.openxmlformats.org/officeDocument/2006/relationships" id="261" r:id="R7759af1a610c4227"/>
-    <p:sldId xmlns:r="http://schemas.openxmlformats.org/officeDocument/2006/relationships" id="262" r:id="Rec9aa2c60b134298"/>
-    <p:sldId xmlns:r="http://schemas.openxmlformats.org/officeDocument/2006/relationships" id="263" r:id="R9ecfc624f2634c26"/>
-    <p:sldId xmlns:r="http://schemas.openxmlformats.org/officeDocument/2006/relationships" id="264" r:id="Rb967db408d2b4745"/>
-    <p:sldId xmlns:r="http://schemas.openxmlformats.org/officeDocument/2006/relationships" id="265" r:id="Ref2aacbc00184cd3"/>
+    <p:sldId xmlns:r="http://schemas.openxmlformats.org/officeDocument/2006/relationships" id="256" r:id="R37e675ec1d3d4468"/>
+    <p:sldId xmlns:r="http://schemas.openxmlformats.org/officeDocument/2006/relationships" id="257" r:id="Rebb71b8c563644ab"/>
+    <p:sldId xmlns:r="http://schemas.openxmlformats.org/officeDocument/2006/relationships" id="258" r:id="R9ba6ae4c0cee4c00"/>
+    <p:sldId xmlns:r="http://schemas.openxmlformats.org/officeDocument/2006/relationships" id="259" r:id="Rbfe30a6ecbea4f04"/>
+    <p:sldId xmlns:r="http://schemas.openxmlformats.org/officeDocument/2006/relationships" id="260" r:id="R577fe4e02efe490e"/>
+    <p:sldId xmlns:r="http://schemas.openxmlformats.org/officeDocument/2006/relationships" id="261" r:id="R84fec129b60043cc"/>
+    <p:sldId xmlns:r="http://schemas.openxmlformats.org/officeDocument/2006/relationships" id="262" r:id="Rb05f3dbcd5f94caf"/>
+    <p:sldId xmlns:r="http://schemas.openxmlformats.org/officeDocument/2006/relationships" id="263" r:id="R913ed2dc31094a7a"/>
+    <p:sldId xmlns:r="http://schemas.openxmlformats.org/officeDocument/2006/relationships" id="264" r:id="R1cc91d12119b4491"/>
+    <p:sldId xmlns:r="http://schemas.openxmlformats.org/officeDocument/2006/relationships" id="265" r:id="R49b9961d5ea44790"/>
+    <p:sldId xmlns:r="http://schemas.openxmlformats.org/officeDocument/2006/relationships" id="266" r:id="Rc0331ed59fa44c8d"/>
+    <p:sldId xmlns:r="http://schemas.openxmlformats.org/officeDocument/2006/relationships" id="267" r:id="Re17cc34965b7465d"/>
   </p:sldIdLst>
   <p:sldSz cx="12192000" cy="6858000"/>
   <p:notesSz cx="6858000" cy="9144000"/>
@@ -461,12 +463,57 @@
           </a:p>
           <a:p xmlns:a="http://schemas.openxmlformats.org/drawingml/2006/main">
             <a:r>
+              <a:t>Edition: 2026-09-09</a:t>
+            </a:r>
+          </a:p>
+          <a:p xmlns:a="http://schemas.openxmlformats.org/drawingml/2006/main">
+            <a:r>
+              <a:t/>
+            </a:r>
+          </a:p>
+          <a:p xmlns:a="http://schemas.openxmlformats.org/drawingml/2006/main">
+            <a:r>
               <a:t>[Sources]</a:t>
             </a:r>
           </a:p>
           <a:p xmlns:a="http://schemas.openxmlformats.org/drawingml/2006/main">
             <a:r>
-              <a:t>- Supplied source presentation: 07-memory-context.pdf</a:t>
+              <a:t>- Original source presentation: 07-memory-context.pdf</a:t>
+            </a:r>
+          </a:p>
+          <a:p xmlns:a="http://schemas.openxmlformats.org/drawingml/2006/main">
+            <a:r>
+              <a:t>- S3: LangGraph interrupts. LangChain documentation, accessed, 2026-09-09. https://docs.langchain.com/oss/python/langgraph/interrupts Resume restarts the interrupted node. Put effects after approval and make replay safe.</a:t>
+            </a:r>
+          </a:p>
+          <a:p xmlns:a="http://schemas.openxmlformats.org/drawingml/2006/main">
+            <a:r>
+              <a:t>- R2: How enabling two settings tripled our scores on the ARC-AGI-3 benchmark. OpenAI research post, 2026-07-29. https://openai.com/index/how-two-settings-tripled-our-arc-agi-3-scores/ A specific harness experiment. Its result does not estimate the effect of context changes in Gemini.</a:t>
+            </a:r>
+          </a:p>
+          <a:p xmlns:a="http://schemas.openxmlformats.org/drawingml/2006/main">
+            <a:r>
+              <a:t/>
+            </a:r>
+          </a:p>
+          <a:p xmlns:a="http://schemas.openxmlformats.org/drawingml/2006/main">
+            <a:r>
+              <a:t>[Assessed practice]</a:t>
+            </a:r>
+          </a:p>
+          <a:p xmlns:a="http://schemas.openxmlformats.org/drawingml/2006/main">
+            <a:r>
+              <a:t>Complete Lab 8's checkpoint test. As an extension, compare a fixed recent-history window with a structured task summary on the same lookup tasks.</a:t>
+            </a:r>
+          </a:p>
+          <a:p xmlns:a="http://schemas.openxmlformats.org/drawingml/2006/main">
+            <a:r>
+              <a:t>Acceptance: Show the pending state before resume and one committed effect after a retry. Do not generalize a context-policy result across providers.</a:t>
+            </a:r>
+          </a:p>
+          <a:p xmlns:a="http://schemas.openxmlformats.org/drawingml/2006/main">
+            <a:r>
+              <a:t>Lab: labs/08_langgraph_approval_security.ipynb</a:t>
             </a:r>
           </a:p>
         </p:txBody>
@@ -536,6 +583,136 @@
           <a:lstStyle xmlns:a="http://schemas.openxmlformats.org/drawingml/2006/main"/>
           <a:p xmlns:a="http://schemas.openxmlformats.org/drawingml/2006/main">
             <a:r>
+              <a:t>Use as retrieval practice. Ask for an answer that defines, compares, traces, and evaluates.</a:t>
+            </a:r>
+          </a:p>
+          <a:p xmlns:a="http://schemas.openxmlformats.org/drawingml/2006/main">
+            <a:r>
+              <a:t/>
+            </a:r>
+          </a:p>
+          <a:p xmlns:a="http://schemas.openxmlformats.org/drawingml/2006/main">
+            <a:r>
+              <a:t>Edition: 2026-09-09</a:t>
+            </a:r>
+          </a:p>
+          <a:p xmlns:a="http://schemas.openxmlformats.org/drawingml/2006/main">
+            <a:r>
+              <a:t/>
+            </a:r>
+          </a:p>
+          <a:p xmlns:a="http://schemas.openxmlformats.org/drawingml/2006/main">
+            <a:r>
+              <a:t>[Sources]</a:t>
+            </a:r>
+          </a:p>
+          <a:p xmlns:a="http://schemas.openxmlformats.org/drawingml/2006/main">
+            <a:r>
+              <a:t>- Original source presentation: 07-memory-context.pdf</a:t>
+            </a:r>
+          </a:p>
+          <a:p xmlns:a="http://schemas.openxmlformats.org/drawingml/2006/main">
+            <a:r>
+              <a:t>- S3: LangGraph interrupts. LangChain documentation, accessed, 2026-09-09. https://docs.langchain.com/oss/python/langgraph/interrupts Resume restarts the interrupted node. Put effects after approval and make replay safe.</a:t>
+            </a:r>
+          </a:p>
+          <a:p xmlns:a="http://schemas.openxmlformats.org/drawingml/2006/main">
+            <a:r>
+              <a:t>- R2: How enabling two settings tripled our scores on the ARC-AGI-3 benchmark. OpenAI research post, 2026-07-29. https://openai.com/index/how-two-settings-tripled-our-arc-agi-3-scores/ A specific harness experiment. Its result does not estimate the effect of context changes in Gemini.</a:t>
+            </a:r>
+          </a:p>
+          <a:p xmlns:a="http://schemas.openxmlformats.org/drawingml/2006/main">
+            <a:r>
+              <a:t/>
+            </a:r>
+          </a:p>
+          <a:p xmlns:a="http://schemas.openxmlformats.org/drawingml/2006/main">
+            <a:r>
+              <a:t>[Assessed practice]</a:t>
+            </a:r>
+          </a:p>
+          <a:p xmlns:a="http://schemas.openxmlformats.org/drawingml/2006/main">
+            <a:r>
+              <a:t>Complete Lab 8's checkpoint test. As an extension, compare a fixed recent-history window with a structured task summary on the same lookup tasks.</a:t>
+            </a:r>
+          </a:p>
+          <a:p xmlns:a="http://schemas.openxmlformats.org/drawingml/2006/main">
+            <a:r>
+              <a:t>Acceptance: Show the pending state before resume and one committed effect after a retry. Do not generalize a context-policy result across providers.</a:t>
+            </a:r>
+          </a:p>
+          <a:p xmlns:a="http://schemas.openxmlformats.org/drawingml/2006/main">
+            <a:r>
+              <a:t>Lab: labs/08_langgraph_approval_security.ipynb</a:t>
+            </a:r>
+          </a:p>
+        </p:txBody>
+      </p:sp>
+      <p:sp>
+        <p:nvSpPr>
+          <p:cNvPr id="4" name="Slide Number Placeholder 3"/>
+          <p:cNvSpPr>
+            <a:spLocks xmlns:a="http://schemas.openxmlformats.org/drawingml/2006/main" noGrp="1"/>
+          </p:cNvSpPr>
+          <p:nvPr>
+            <p:ph type="sldNum" idx="5"/>
+          </p:nvPr>
+        </p:nvSpPr>
+        <p:spPr/>
+        <p:txBody>
+          <a:bodyPr xmlns:a="http://schemas.openxmlformats.org/drawingml/2006/main"/>
+          <a:lstStyle xmlns:a="http://schemas.openxmlformats.org/drawingml/2006/main"/>
+          <a:p xmlns:a="http://schemas.openxmlformats.org/drawingml/2006/main"/>
+        </p:txBody>
+      </p:sp>
+    </p:spTree>
+  </p:cSld>
+  <p:clrMapOvr>
+    <a:masterClrMapping xmlns:a="http://schemas.openxmlformats.org/drawingml/2006/main"/>
+  </p:clrMapOvr>
+</p:notes>
+</file>
+
+<file path=ppt/notesSlides/notesSlide11.xml><?xml version="1.0" encoding="utf-8"?>
+<p:notes xmlns:p="http://schemas.openxmlformats.org/presentationml/2006/main">
+  <p:cSld>
+    <p:spTree>
+      <p:nvGrpSpPr>
+        <p:cNvPr id="1" name=""/>
+        <p:cNvGrpSpPr/>
+        <p:nvPr/>
+      </p:nvGrpSpPr>
+      <p:grpSpPr>
+        <a:xfrm xmlns:a="http://schemas.openxmlformats.org/drawingml/2006/main"/>
+      </p:grpSpPr>
+      <p:sp>
+        <p:nvSpPr>
+          <p:cNvPr id="2" name="Slide Image Placeholder 1"/>
+          <p:cNvSpPr>
+            <a:spLocks xmlns:a="http://schemas.openxmlformats.org/drawingml/2006/main" noGrp="1"/>
+          </p:cNvSpPr>
+          <p:nvPr>
+            <p:ph type="sldImg" idx="0"/>
+          </p:nvPr>
+        </p:nvSpPr>
+        <p:spPr/>
+      </p:sp>
+      <p:sp>
+        <p:nvSpPr>
+          <p:cNvPr id="3" name="Notes Placeholder 2"/>
+          <p:cNvSpPr>
+            <a:spLocks xmlns:a="http://schemas.openxmlformats.org/drawingml/2006/main" noGrp="1"/>
+          </p:cNvSpPr>
+          <p:nvPr>
+            <p:ph type="body" idx="1"/>
+          </p:nvPr>
+        </p:nvSpPr>
+        <p:spPr/>
+        <p:txBody>
+          <a:bodyPr xmlns:a="http://schemas.openxmlformats.org/drawingml/2006/main"/>
+          <a:lstStyle xmlns:a="http://schemas.openxmlformats.org/drawingml/2006/main"/>
+          <a:p xmlns:a="http://schemas.openxmlformats.org/drawingml/2006/main">
+            <a:r>
               <a:t>Close by restating the four durable ideas and linking forward to the next chapter.</a:t>
             </a:r>
           </a:p>
@@ -546,12 +723,187 @@
           </a:p>
           <a:p xmlns:a="http://schemas.openxmlformats.org/drawingml/2006/main">
             <a:r>
+              <a:t>Edition: 2026-09-09</a:t>
+            </a:r>
+          </a:p>
+          <a:p xmlns:a="http://schemas.openxmlformats.org/drawingml/2006/main">
+            <a:r>
+              <a:t/>
+            </a:r>
+          </a:p>
+          <a:p xmlns:a="http://schemas.openxmlformats.org/drawingml/2006/main">
+            <a:r>
               <a:t>[Sources]</a:t>
             </a:r>
           </a:p>
           <a:p xmlns:a="http://schemas.openxmlformats.org/drawingml/2006/main">
             <a:r>
-              <a:t>- Supplied source presentation: 07-memory-context.pdf</a:t>
+              <a:t>- Original source presentation: 07-memory-context.pdf</a:t>
+            </a:r>
+          </a:p>
+          <a:p xmlns:a="http://schemas.openxmlformats.org/drawingml/2006/main">
+            <a:r>
+              <a:t>- S3: LangGraph interrupts. LangChain documentation, accessed, 2026-09-09. https://docs.langchain.com/oss/python/langgraph/interrupts Resume restarts the interrupted node. Put effects after approval and make replay safe.</a:t>
+            </a:r>
+          </a:p>
+          <a:p xmlns:a="http://schemas.openxmlformats.org/drawingml/2006/main">
+            <a:r>
+              <a:t>- R2: How enabling two settings tripled our scores on the ARC-AGI-3 benchmark. OpenAI research post, 2026-07-29. https://openai.com/index/how-two-settings-tripled-our-arc-agi-3-scores/ A specific harness experiment. Its result does not estimate the effect of context changes in Gemini.</a:t>
+            </a:r>
+          </a:p>
+          <a:p xmlns:a="http://schemas.openxmlformats.org/drawingml/2006/main">
+            <a:r>
+              <a:t/>
+            </a:r>
+          </a:p>
+          <a:p xmlns:a="http://schemas.openxmlformats.org/drawingml/2006/main">
+            <a:r>
+              <a:t>[Assessed practice]</a:t>
+            </a:r>
+          </a:p>
+          <a:p xmlns:a="http://schemas.openxmlformats.org/drawingml/2006/main">
+            <a:r>
+              <a:t>Complete Lab 8's checkpoint test. As an extension, compare a fixed recent-history window with a structured task summary on the same lookup tasks.</a:t>
+            </a:r>
+          </a:p>
+          <a:p xmlns:a="http://schemas.openxmlformats.org/drawingml/2006/main">
+            <a:r>
+              <a:t>Acceptance: Show the pending state before resume and one committed effect after a retry. Do not generalize a context-policy result across providers.</a:t>
+            </a:r>
+          </a:p>
+          <a:p xmlns:a="http://schemas.openxmlformats.org/drawingml/2006/main">
+            <a:r>
+              <a:t>Lab: labs/08_langgraph_approval_security.ipynb</a:t>
+            </a:r>
+          </a:p>
+        </p:txBody>
+      </p:sp>
+      <p:sp>
+        <p:nvSpPr>
+          <p:cNvPr id="4" name="Slide Number Placeholder 3"/>
+          <p:cNvSpPr>
+            <a:spLocks xmlns:a="http://schemas.openxmlformats.org/drawingml/2006/main" noGrp="1"/>
+          </p:cNvSpPr>
+          <p:nvPr>
+            <p:ph type="sldNum" idx="5"/>
+          </p:nvPr>
+        </p:nvSpPr>
+        <p:spPr/>
+        <p:txBody>
+          <a:bodyPr xmlns:a="http://schemas.openxmlformats.org/drawingml/2006/main"/>
+          <a:lstStyle xmlns:a="http://schemas.openxmlformats.org/drawingml/2006/main"/>
+          <a:p xmlns:a="http://schemas.openxmlformats.org/drawingml/2006/main"/>
+        </p:txBody>
+      </p:sp>
+    </p:spTree>
+  </p:cSld>
+  <p:clrMapOvr>
+    <a:masterClrMapping xmlns:a="http://schemas.openxmlformats.org/drawingml/2006/main"/>
+  </p:clrMapOvr>
+</p:notes>
+</file>
+
+<file path=ppt/notesSlides/notesSlide12.xml><?xml version="1.0" encoding="utf-8"?>
+<p:notes xmlns:p="http://schemas.openxmlformats.org/presentationml/2006/main">
+  <p:cSld>
+    <p:spTree>
+      <p:nvGrpSpPr>
+        <p:cNvPr id="1" name=""/>
+        <p:cNvGrpSpPr/>
+        <p:nvPr/>
+      </p:nvGrpSpPr>
+      <p:grpSpPr>
+        <a:xfrm xmlns:a="http://schemas.openxmlformats.org/drawingml/2006/main"/>
+      </p:grpSpPr>
+      <p:sp>
+        <p:nvSpPr>
+          <p:cNvPr id="2" name="Slide Image Placeholder 1"/>
+          <p:cNvSpPr>
+            <a:spLocks xmlns:a="http://schemas.openxmlformats.org/drawingml/2006/main" noGrp="1"/>
+          </p:cNvSpPr>
+          <p:nvPr>
+            <p:ph type="sldImg" idx="0"/>
+          </p:nvPr>
+        </p:nvSpPr>
+        <p:spPr/>
+      </p:sp>
+      <p:sp>
+        <p:nvSpPr>
+          <p:cNvPr id="3" name="Notes Placeholder 2"/>
+          <p:cNvSpPr>
+            <a:spLocks xmlns:a="http://schemas.openxmlformats.org/drawingml/2006/main" noGrp="1"/>
+          </p:cNvSpPr>
+          <p:nvPr>
+            <p:ph type="body" idx="1"/>
+          </p:nvPr>
+        </p:nvSpPr>
+        <p:spPr/>
+        <p:txBody>
+          <a:bodyPr xmlns:a="http://schemas.openxmlformats.org/drawingml/2006/main"/>
+          <a:lstStyle xmlns:a="http://schemas.openxmlformats.org/drawingml/2006/main"/>
+          <a:p xmlns:a="http://schemas.openxmlformats.org/drawingml/2006/main">
+            <a:r>
+              <a:t>Assess the submitted evidence with the stated acceptance check. Reading links and limitations follow.</a:t>
+            </a:r>
+          </a:p>
+          <a:p xmlns:a="http://schemas.openxmlformats.org/drawingml/2006/main">
+            <a:r>
+              <a:t/>
+            </a:r>
+          </a:p>
+          <a:p xmlns:a="http://schemas.openxmlformats.org/drawingml/2006/main">
+            <a:r>
+              <a:t>Edition: 2026-09-09</a:t>
+            </a:r>
+          </a:p>
+          <a:p xmlns:a="http://schemas.openxmlformats.org/drawingml/2006/main">
+            <a:r>
+              <a:t/>
+            </a:r>
+          </a:p>
+          <a:p xmlns:a="http://schemas.openxmlformats.org/drawingml/2006/main">
+            <a:r>
+              <a:t>[Sources]</a:t>
+            </a:r>
+          </a:p>
+          <a:p xmlns:a="http://schemas.openxmlformats.org/drawingml/2006/main">
+            <a:r>
+              <a:t>- Original source presentation: 07-memory-context.pdf</a:t>
+            </a:r>
+          </a:p>
+          <a:p xmlns:a="http://schemas.openxmlformats.org/drawingml/2006/main">
+            <a:r>
+              <a:t>- S3: LangGraph interrupts. LangChain documentation, accessed, 2026-09-09. https://docs.langchain.com/oss/python/langgraph/interrupts Resume restarts the interrupted node. Put effects after approval and make replay safe.</a:t>
+            </a:r>
+          </a:p>
+          <a:p xmlns:a="http://schemas.openxmlformats.org/drawingml/2006/main">
+            <a:r>
+              <a:t>- R2: How enabling two settings tripled our scores on the ARC-AGI-3 benchmark. OpenAI research post, 2026-07-29. https://openai.com/index/how-two-settings-tripled-our-arc-agi-3-scores/ A specific harness experiment. Its result does not estimate the effect of context changes in Gemini.</a:t>
+            </a:r>
+          </a:p>
+          <a:p xmlns:a="http://schemas.openxmlformats.org/drawingml/2006/main">
+            <a:r>
+              <a:t/>
+            </a:r>
+          </a:p>
+          <a:p xmlns:a="http://schemas.openxmlformats.org/drawingml/2006/main">
+            <a:r>
+              <a:t>[Assessed practice]</a:t>
+            </a:r>
+          </a:p>
+          <a:p xmlns:a="http://schemas.openxmlformats.org/drawingml/2006/main">
+            <a:r>
+              <a:t>Complete Lab 8's checkpoint test. As an extension, compare a fixed recent-history window with a structured task summary on the same lookup tasks.</a:t>
+            </a:r>
+          </a:p>
+          <a:p xmlns:a="http://schemas.openxmlformats.org/drawingml/2006/main">
+            <a:r>
+              <a:t>Acceptance: Show the pending state before resume and one committed effect after a retry. Do not generalize a context-policy result across providers.</a:t>
+            </a:r>
+          </a:p>
+          <a:p xmlns:a="http://schemas.openxmlformats.org/drawingml/2006/main">
+            <a:r>
+              <a:t>Lab: labs/08_langgraph_approval_security.ipynb</a:t>
             </a:r>
           </a:p>
         </p:txBody>
@@ -631,12 +983,57 @@
           </a:p>
           <a:p xmlns:a="http://schemas.openxmlformats.org/drawingml/2006/main">
             <a:r>
+              <a:t>Edition: 2026-09-09</a:t>
+            </a:r>
+          </a:p>
+          <a:p xmlns:a="http://schemas.openxmlformats.org/drawingml/2006/main">
+            <a:r>
+              <a:t/>
+            </a:r>
+          </a:p>
+          <a:p xmlns:a="http://schemas.openxmlformats.org/drawingml/2006/main">
+            <a:r>
               <a:t>[Sources]</a:t>
             </a:r>
           </a:p>
           <a:p xmlns:a="http://schemas.openxmlformats.org/drawingml/2006/main">
             <a:r>
-              <a:t>- Supplied source presentation: 07-memory-context.pdf</a:t>
+              <a:t>- Original source presentation: 07-memory-context.pdf</a:t>
+            </a:r>
+          </a:p>
+          <a:p xmlns:a="http://schemas.openxmlformats.org/drawingml/2006/main">
+            <a:r>
+              <a:t>- S3: LangGraph interrupts. LangChain documentation, accessed, 2026-09-09. https://docs.langchain.com/oss/python/langgraph/interrupts Resume restarts the interrupted node. Put effects after approval and make replay safe.</a:t>
+            </a:r>
+          </a:p>
+          <a:p xmlns:a="http://schemas.openxmlformats.org/drawingml/2006/main">
+            <a:r>
+              <a:t>- R2: How enabling two settings tripled our scores on the ARC-AGI-3 benchmark. OpenAI research post, 2026-07-29. https://openai.com/index/how-two-settings-tripled-our-arc-agi-3-scores/ A specific harness experiment. Its result does not estimate the effect of context changes in Gemini.</a:t>
+            </a:r>
+          </a:p>
+          <a:p xmlns:a="http://schemas.openxmlformats.org/drawingml/2006/main">
+            <a:r>
+              <a:t/>
+            </a:r>
+          </a:p>
+          <a:p xmlns:a="http://schemas.openxmlformats.org/drawingml/2006/main">
+            <a:r>
+              <a:t>[Assessed practice]</a:t>
+            </a:r>
+          </a:p>
+          <a:p xmlns:a="http://schemas.openxmlformats.org/drawingml/2006/main">
+            <a:r>
+              <a:t>Complete Lab 8's checkpoint test. As an extension, compare a fixed recent-history window with a structured task summary on the same lookup tasks.</a:t>
+            </a:r>
+          </a:p>
+          <a:p xmlns:a="http://schemas.openxmlformats.org/drawingml/2006/main">
+            <a:r>
+              <a:t>Acceptance: Show the pending state before resume and one committed effect after a retry. Do not generalize a context-policy result across providers.</a:t>
+            </a:r>
+          </a:p>
+          <a:p xmlns:a="http://schemas.openxmlformats.org/drawingml/2006/main">
+            <a:r>
+              <a:t>Lab: labs/08_langgraph_approval_security.ipynb</a:t>
             </a:r>
           </a:p>
         </p:txBody>
@@ -716,12 +1113,57 @@
           </a:p>
           <a:p xmlns:a="http://schemas.openxmlformats.org/drawingml/2006/main">
             <a:r>
+              <a:t>Edition: 2026-09-09</a:t>
+            </a:r>
+          </a:p>
+          <a:p xmlns:a="http://schemas.openxmlformats.org/drawingml/2006/main">
+            <a:r>
+              <a:t/>
+            </a:r>
+          </a:p>
+          <a:p xmlns:a="http://schemas.openxmlformats.org/drawingml/2006/main">
+            <a:r>
               <a:t>[Sources]</a:t>
             </a:r>
           </a:p>
           <a:p xmlns:a="http://schemas.openxmlformats.org/drawingml/2006/main">
             <a:r>
-              <a:t>- Supplied source presentation: 07-memory-context.pdf</a:t>
+              <a:t>- Original source presentation: 07-memory-context.pdf</a:t>
+            </a:r>
+          </a:p>
+          <a:p xmlns:a="http://schemas.openxmlformats.org/drawingml/2006/main">
+            <a:r>
+              <a:t>- S3: LangGraph interrupts. LangChain documentation, accessed, 2026-09-09. https://docs.langchain.com/oss/python/langgraph/interrupts Resume restarts the interrupted node. Put effects after approval and make replay safe.</a:t>
+            </a:r>
+          </a:p>
+          <a:p xmlns:a="http://schemas.openxmlformats.org/drawingml/2006/main">
+            <a:r>
+              <a:t>- R2: How enabling two settings tripled our scores on the ARC-AGI-3 benchmark. OpenAI research post, 2026-07-29. https://openai.com/index/how-two-settings-tripled-our-arc-agi-3-scores/ A specific harness experiment. Its result does not estimate the effect of context changes in Gemini.</a:t>
+            </a:r>
+          </a:p>
+          <a:p xmlns:a="http://schemas.openxmlformats.org/drawingml/2006/main">
+            <a:r>
+              <a:t/>
+            </a:r>
+          </a:p>
+          <a:p xmlns:a="http://schemas.openxmlformats.org/drawingml/2006/main">
+            <a:r>
+              <a:t>[Assessed practice]</a:t>
+            </a:r>
+          </a:p>
+          <a:p xmlns:a="http://schemas.openxmlformats.org/drawingml/2006/main">
+            <a:r>
+              <a:t>Complete Lab 8's checkpoint test. As an extension, compare a fixed recent-history window with a structured task summary on the same lookup tasks.</a:t>
+            </a:r>
+          </a:p>
+          <a:p xmlns:a="http://schemas.openxmlformats.org/drawingml/2006/main">
+            <a:r>
+              <a:t>Acceptance: Show the pending state before resume and one committed effect after a retry. Do not generalize a context-policy result across providers.</a:t>
+            </a:r>
+          </a:p>
+          <a:p xmlns:a="http://schemas.openxmlformats.org/drawingml/2006/main">
+            <a:r>
+              <a:t>Lab: labs/08_langgraph_approval_security.ipynb</a:t>
             </a:r>
           </a:p>
         </p:txBody>
@@ -801,12 +1243,57 @@
           </a:p>
           <a:p xmlns:a="http://schemas.openxmlformats.org/drawingml/2006/main">
             <a:r>
+              <a:t>Edition: 2026-09-09</a:t>
+            </a:r>
+          </a:p>
+          <a:p xmlns:a="http://schemas.openxmlformats.org/drawingml/2006/main">
+            <a:r>
+              <a:t/>
+            </a:r>
+          </a:p>
+          <a:p xmlns:a="http://schemas.openxmlformats.org/drawingml/2006/main">
+            <a:r>
               <a:t>[Sources]</a:t>
             </a:r>
           </a:p>
           <a:p xmlns:a="http://schemas.openxmlformats.org/drawingml/2006/main">
             <a:r>
-              <a:t>- Supplied source presentation: 07-memory-context.pdf</a:t>
+              <a:t>- Original source presentation: 07-memory-context.pdf</a:t>
+            </a:r>
+          </a:p>
+          <a:p xmlns:a="http://schemas.openxmlformats.org/drawingml/2006/main">
+            <a:r>
+              <a:t>- S3: LangGraph interrupts. LangChain documentation, accessed, 2026-09-09. https://docs.langchain.com/oss/python/langgraph/interrupts Resume restarts the interrupted node. Put effects after approval and make replay safe.</a:t>
+            </a:r>
+          </a:p>
+          <a:p xmlns:a="http://schemas.openxmlformats.org/drawingml/2006/main">
+            <a:r>
+              <a:t>- R2: How enabling two settings tripled our scores on the ARC-AGI-3 benchmark. OpenAI research post, 2026-07-29. https://openai.com/index/how-two-settings-tripled-our-arc-agi-3-scores/ A specific harness experiment. Its result does not estimate the effect of context changes in Gemini.</a:t>
+            </a:r>
+          </a:p>
+          <a:p xmlns:a="http://schemas.openxmlformats.org/drawingml/2006/main">
+            <a:r>
+              <a:t/>
+            </a:r>
+          </a:p>
+          <a:p xmlns:a="http://schemas.openxmlformats.org/drawingml/2006/main">
+            <a:r>
+              <a:t>[Assessed practice]</a:t>
+            </a:r>
+          </a:p>
+          <a:p xmlns:a="http://schemas.openxmlformats.org/drawingml/2006/main">
+            <a:r>
+              <a:t>Complete Lab 8's checkpoint test. As an extension, compare a fixed recent-history window with a structured task summary on the same lookup tasks.</a:t>
+            </a:r>
+          </a:p>
+          <a:p xmlns:a="http://schemas.openxmlformats.org/drawingml/2006/main">
+            <a:r>
+              <a:t>Acceptance: Show the pending state before resume and one committed effect after a retry. Do not generalize a context-policy result across providers.</a:t>
+            </a:r>
+          </a:p>
+          <a:p xmlns:a="http://schemas.openxmlformats.org/drawingml/2006/main">
+            <a:r>
+              <a:t>Lab: labs/08_langgraph_approval_security.ipynb</a:t>
             </a:r>
           </a:p>
         </p:txBody>
@@ -886,12 +1373,57 @@
           </a:p>
           <a:p xmlns:a="http://schemas.openxmlformats.org/drawingml/2006/main">
             <a:r>
+              <a:t>Edition: 2026-09-09</a:t>
+            </a:r>
+          </a:p>
+          <a:p xmlns:a="http://schemas.openxmlformats.org/drawingml/2006/main">
+            <a:r>
+              <a:t/>
+            </a:r>
+          </a:p>
+          <a:p xmlns:a="http://schemas.openxmlformats.org/drawingml/2006/main">
+            <a:r>
               <a:t>[Sources]</a:t>
             </a:r>
           </a:p>
           <a:p xmlns:a="http://schemas.openxmlformats.org/drawingml/2006/main">
             <a:r>
-              <a:t>- Supplied source presentation: 07-memory-context.pdf</a:t>
+              <a:t>- Original source presentation: 07-memory-context.pdf</a:t>
+            </a:r>
+          </a:p>
+          <a:p xmlns:a="http://schemas.openxmlformats.org/drawingml/2006/main">
+            <a:r>
+              <a:t>- S3: LangGraph interrupts. LangChain documentation, accessed, 2026-09-09. https://docs.langchain.com/oss/python/langgraph/interrupts Resume restarts the interrupted node. Put effects after approval and make replay safe.</a:t>
+            </a:r>
+          </a:p>
+          <a:p xmlns:a="http://schemas.openxmlformats.org/drawingml/2006/main">
+            <a:r>
+              <a:t>- R2: How enabling two settings tripled our scores on the ARC-AGI-3 benchmark. OpenAI research post, 2026-07-29. https://openai.com/index/how-two-settings-tripled-our-arc-agi-3-scores/ A specific harness experiment. Its result does not estimate the effect of context changes in Gemini.</a:t>
+            </a:r>
+          </a:p>
+          <a:p xmlns:a="http://schemas.openxmlformats.org/drawingml/2006/main">
+            <a:r>
+              <a:t/>
+            </a:r>
+          </a:p>
+          <a:p xmlns:a="http://schemas.openxmlformats.org/drawingml/2006/main">
+            <a:r>
+              <a:t>[Assessed practice]</a:t>
+            </a:r>
+          </a:p>
+          <a:p xmlns:a="http://schemas.openxmlformats.org/drawingml/2006/main">
+            <a:r>
+              <a:t>Complete Lab 8's checkpoint test. As an extension, compare a fixed recent-history window with a structured task summary on the same lookup tasks.</a:t>
+            </a:r>
+          </a:p>
+          <a:p xmlns:a="http://schemas.openxmlformats.org/drawingml/2006/main">
+            <a:r>
+              <a:t>Acceptance: Show the pending state before resume and one committed effect after a retry. Do not generalize a context-policy result across providers.</a:t>
+            </a:r>
+          </a:p>
+          <a:p xmlns:a="http://schemas.openxmlformats.org/drawingml/2006/main">
+            <a:r>
+              <a:t>Lab: labs/08_langgraph_approval_security.ipynb</a:t>
             </a:r>
           </a:p>
         </p:txBody>
@@ -971,12 +1503,57 @@
           </a:p>
           <a:p xmlns:a="http://schemas.openxmlformats.org/drawingml/2006/main">
             <a:r>
+              <a:t>Edition: 2026-09-09</a:t>
+            </a:r>
+          </a:p>
+          <a:p xmlns:a="http://schemas.openxmlformats.org/drawingml/2006/main">
+            <a:r>
+              <a:t/>
+            </a:r>
+          </a:p>
+          <a:p xmlns:a="http://schemas.openxmlformats.org/drawingml/2006/main">
+            <a:r>
               <a:t>[Sources]</a:t>
             </a:r>
           </a:p>
           <a:p xmlns:a="http://schemas.openxmlformats.org/drawingml/2006/main">
             <a:r>
-              <a:t>- Supplied source presentation: 07-memory-context.pdf</a:t>
+              <a:t>- Original source presentation: 07-memory-context.pdf</a:t>
+            </a:r>
+          </a:p>
+          <a:p xmlns:a="http://schemas.openxmlformats.org/drawingml/2006/main">
+            <a:r>
+              <a:t>- S3: LangGraph interrupts. LangChain documentation, accessed, 2026-09-09. https://docs.langchain.com/oss/python/langgraph/interrupts Resume restarts the interrupted node. Put effects after approval and make replay safe.</a:t>
+            </a:r>
+          </a:p>
+          <a:p xmlns:a="http://schemas.openxmlformats.org/drawingml/2006/main">
+            <a:r>
+              <a:t>- R2: How enabling two settings tripled our scores on the ARC-AGI-3 benchmark. OpenAI research post, 2026-07-29. https://openai.com/index/how-two-settings-tripled-our-arc-agi-3-scores/ A specific harness experiment. Its result does not estimate the effect of context changes in Gemini.</a:t>
+            </a:r>
+          </a:p>
+          <a:p xmlns:a="http://schemas.openxmlformats.org/drawingml/2006/main">
+            <a:r>
+              <a:t/>
+            </a:r>
+          </a:p>
+          <a:p xmlns:a="http://schemas.openxmlformats.org/drawingml/2006/main">
+            <a:r>
+              <a:t>[Assessed practice]</a:t>
+            </a:r>
+          </a:p>
+          <a:p xmlns:a="http://schemas.openxmlformats.org/drawingml/2006/main">
+            <a:r>
+              <a:t>Complete Lab 8's checkpoint test. As an extension, compare a fixed recent-history window with a structured task summary on the same lookup tasks.</a:t>
+            </a:r>
+          </a:p>
+          <a:p xmlns:a="http://schemas.openxmlformats.org/drawingml/2006/main">
+            <a:r>
+              <a:t>Acceptance: Show the pending state before resume and one committed effect after a retry. Do not generalize a context-policy result across providers.</a:t>
+            </a:r>
+          </a:p>
+          <a:p xmlns:a="http://schemas.openxmlformats.org/drawingml/2006/main">
+            <a:r>
+              <a:t>Lab: labs/08_langgraph_approval_security.ipynb</a:t>
             </a:r>
           </a:p>
         </p:txBody>
@@ -1056,12 +1633,57 @@
           </a:p>
           <a:p xmlns:a="http://schemas.openxmlformats.org/drawingml/2006/main">
             <a:r>
+              <a:t>Edition: 2026-09-09</a:t>
+            </a:r>
+          </a:p>
+          <a:p xmlns:a="http://schemas.openxmlformats.org/drawingml/2006/main">
+            <a:r>
+              <a:t/>
+            </a:r>
+          </a:p>
+          <a:p xmlns:a="http://schemas.openxmlformats.org/drawingml/2006/main">
+            <a:r>
               <a:t>[Sources]</a:t>
             </a:r>
           </a:p>
           <a:p xmlns:a="http://schemas.openxmlformats.org/drawingml/2006/main">
             <a:r>
-              <a:t>- Supplied source presentation: 07-memory-context.pdf</a:t>
+              <a:t>- Original source presentation: 07-memory-context.pdf</a:t>
+            </a:r>
+          </a:p>
+          <a:p xmlns:a="http://schemas.openxmlformats.org/drawingml/2006/main">
+            <a:r>
+              <a:t>- S3: LangGraph interrupts. LangChain documentation, accessed, 2026-09-09. https://docs.langchain.com/oss/python/langgraph/interrupts Resume restarts the interrupted node. Put effects after approval and make replay safe.</a:t>
+            </a:r>
+          </a:p>
+          <a:p xmlns:a="http://schemas.openxmlformats.org/drawingml/2006/main">
+            <a:r>
+              <a:t>- R2: How enabling two settings tripled our scores on the ARC-AGI-3 benchmark. OpenAI research post, 2026-07-29. https://openai.com/index/how-two-settings-tripled-our-arc-agi-3-scores/ A specific harness experiment. Its result does not estimate the effect of context changes in Gemini.</a:t>
+            </a:r>
+          </a:p>
+          <a:p xmlns:a="http://schemas.openxmlformats.org/drawingml/2006/main">
+            <a:r>
+              <a:t/>
+            </a:r>
+          </a:p>
+          <a:p xmlns:a="http://schemas.openxmlformats.org/drawingml/2006/main">
+            <a:r>
+              <a:t>[Assessed practice]</a:t>
+            </a:r>
+          </a:p>
+          <a:p xmlns:a="http://schemas.openxmlformats.org/drawingml/2006/main">
+            <a:r>
+              <a:t>Complete Lab 8's checkpoint test. As an extension, compare a fixed recent-history window with a structured task summary on the same lookup tasks.</a:t>
+            </a:r>
+          </a:p>
+          <a:p xmlns:a="http://schemas.openxmlformats.org/drawingml/2006/main">
+            <a:r>
+              <a:t>Acceptance: Show the pending state before resume and one committed effect after a retry. Do not generalize a context-policy result across providers.</a:t>
+            </a:r>
+          </a:p>
+          <a:p xmlns:a="http://schemas.openxmlformats.org/drawingml/2006/main">
+            <a:r>
+              <a:t>Lab: labs/08_langgraph_approval_security.ipynb</a:t>
             </a:r>
           </a:p>
         </p:txBody>
@@ -1141,12 +1763,57 @@
           </a:p>
           <a:p xmlns:a="http://schemas.openxmlformats.org/drawingml/2006/main">
             <a:r>
+              <a:t>Edition: 2026-09-09</a:t>
+            </a:r>
+          </a:p>
+          <a:p xmlns:a="http://schemas.openxmlformats.org/drawingml/2006/main">
+            <a:r>
+              <a:t/>
+            </a:r>
+          </a:p>
+          <a:p xmlns:a="http://schemas.openxmlformats.org/drawingml/2006/main">
+            <a:r>
               <a:t>[Sources]</a:t>
             </a:r>
           </a:p>
           <a:p xmlns:a="http://schemas.openxmlformats.org/drawingml/2006/main">
             <a:r>
-              <a:t>- Supplied source presentation: 07-memory-context.pdf</a:t>
+              <a:t>- Original source presentation: 07-memory-context.pdf</a:t>
+            </a:r>
+          </a:p>
+          <a:p xmlns:a="http://schemas.openxmlformats.org/drawingml/2006/main">
+            <a:r>
+              <a:t>- S3: LangGraph interrupts. LangChain documentation, accessed, 2026-09-09. https://docs.langchain.com/oss/python/langgraph/interrupts Resume restarts the interrupted node. Put effects after approval and make replay safe.</a:t>
+            </a:r>
+          </a:p>
+          <a:p xmlns:a="http://schemas.openxmlformats.org/drawingml/2006/main">
+            <a:r>
+              <a:t>- R2: How enabling two settings tripled our scores on the ARC-AGI-3 benchmark. OpenAI research post, 2026-07-29. https://openai.com/index/how-two-settings-tripled-our-arc-agi-3-scores/ A specific harness experiment. Its result does not estimate the effect of context changes in Gemini.</a:t>
+            </a:r>
+          </a:p>
+          <a:p xmlns:a="http://schemas.openxmlformats.org/drawingml/2006/main">
+            <a:r>
+              <a:t/>
+            </a:r>
+          </a:p>
+          <a:p xmlns:a="http://schemas.openxmlformats.org/drawingml/2006/main">
+            <a:r>
+              <a:t>[Assessed practice]</a:t>
+            </a:r>
+          </a:p>
+          <a:p xmlns:a="http://schemas.openxmlformats.org/drawingml/2006/main">
+            <a:r>
+              <a:t>Complete Lab 8's checkpoint test. As an extension, compare a fixed recent-history window with a structured task summary on the same lookup tasks.</a:t>
+            </a:r>
+          </a:p>
+          <a:p xmlns:a="http://schemas.openxmlformats.org/drawingml/2006/main">
+            <a:r>
+              <a:t>Acceptance: Show the pending state before resume and one committed effect after a retry. Do not generalize a context-policy result across providers.</a:t>
+            </a:r>
+          </a:p>
+          <a:p xmlns:a="http://schemas.openxmlformats.org/drawingml/2006/main">
+            <a:r>
+              <a:t>Lab: labs/08_langgraph_approval_security.ipynb</a:t>
             </a:r>
           </a:p>
         </p:txBody>
@@ -1216,7 +1883,7 @@
           <a:lstStyle xmlns:a="http://schemas.openxmlformats.org/drawingml/2006/main"/>
           <a:p xmlns:a="http://schemas.openxmlformats.org/drawingml/2006/main">
             <a:r>
-              <a:t>Use as retrieval practice. Ask for an answer that defines, compares, traces, and evaluates.</a:t>
+              <a:t>Explain the claim first, then use the numbered points as evidence and design consequences.</a:t>
             </a:r>
           </a:p>
           <a:p xmlns:a="http://schemas.openxmlformats.org/drawingml/2006/main">
@@ -1226,12 +1893,57 @@
           </a:p>
           <a:p xmlns:a="http://schemas.openxmlformats.org/drawingml/2006/main">
             <a:r>
+              <a:t>Edition: 2026-09-09</a:t>
+            </a:r>
+          </a:p>
+          <a:p xmlns:a="http://schemas.openxmlformats.org/drawingml/2006/main">
+            <a:r>
+              <a:t/>
+            </a:r>
+          </a:p>
+          <a:p xmlns:a="http://schemas.openxmlformats.org/drawingml/2006/main">
+            <a:r>
               <a:t>[Sources]</a:t>
             </a:r>
           </a:p>
           <a:p xmlns:a="http://schemas.openxmlformats.org/drawingml/2006/main">
             <a:r>
-              <a:t>- Supplied source presentation: 07-memory-context.pdf</a:t>
+              <a:t>- Original source presentation: 07-memory-context.pdf</a:t>
+            </a:r>
+          </a:p>
+          <a:p xmlns:a="http://schemas.openxmlformats.org/drawingml/2006/main">
+            <a:r>
+              <a:t>- S3: LangGraph interrupts. LangChain documentation, accessed, 2026-09-09. https://docs.langchain.com/oss/python/langgraph/interrupts Resume restarts the interrupted node. Put effects after approval and make replay safe.</a:t>
+            </a:r>
+          </a:p>
+          <a:p xmlns:a="http://schemas.openxmlformats.org/drawingml/2006/main">
+            <a:r>
+              <a:t>- R2: How enabling two settings tripled our scores on the ARC-AGI-3 benchmark. OpenAI research post, 2026-07-29. https://openai.com/index/how-two-settings-tripled-our-arc-agi-3-scores/ A specific harness experiment. Its result does not estimate the effect of context changes in Gemini.</a:t>
+            </a:r>
+          </a:p>
+          <a:p xmlns:a="http://schemas.openxmlformats.org/drawingml/2006/main">
+            <a:r>
+              <a:t/>
+            </a:r>
+          </a:p>
+          <a:p xmlns:a="http://schemas.openxmlformats.org/drawingml/2006/main">
+            <a:r>
+              <a:t>[Assessed practice]</a:t>
+            </a:r>
+          </a:p>
+          <a:p xmlns:a="http://schemas.openxmlformats.org/drawingml/2006/main">
+            <a:r>
+              <a:t>Complete Lab 8's checkpoint test. As an extension, compare a fixed recent-history window with a structured task summary on the same lookup tasks.</a:t>
+            </a:r>
+          </a:p>
+          <a:p xmlns:a="http://schemas.openxmlformats.org/drawingml/2006/main">
+            <a:r>
+              <a:t>Acceptance: Show the pending state before resume and one committed effect after a retry. Do not generalize a context-policy result across providers.</a:t>
+            </a:r>
+          </a:p>
+          <a:p xmlns:a="http://schemas.openxmlformats.org/drawingml/2006/main">
+            <a:r>
+              <a:t>Lab: labs/08_langgraph_approval_security.ipynb</a:t>
             </a:r>
           </a:p>
         </p:txBody>
@@ -1299,7 +2011,7 @@
   </p:cSld>
   <p:clrMap bg1="lt1" tx1="dk1" bg2="lt2" tx2="dk2" accent1="accent1" accent2="accent2" accent3="accent3" accent4="accent4" accent5="accent5" accent6="accent6" hlink="hlink" folHlink="folHlink"/>
   <p:sldLayoutIdLst>
-    <p:sldLayoutId xmlns:r="http://schemas.openxmlformats.org/officeDocument/2006/relationships" id="2147483649" r:id="R32c4d2d76d264db9"/>
+    <p:sldLayoutId xmlns:r="http://schemas.openxmlformats.org/officeDocument/2006/relationships" id="2147483649" r:id="R2a31cdce6e80487b"/>
   </p:sldLayoutIdLst>
   <p:txStyles>
     <p:titleStyle>
@@ -1850,7 +2562,7 @@
           <p:cNvPr id="8" name="title-accent">
             <a:extLst xmlns:a="http://schemas.openxmlformats.org/drawingml/2006/main">
               <a:ext uri="{FF2B5EF4-FFF2-40B4-BE49-F238E27FC236}">
-                <a16:creationId xmlns:a16="http://schemas.microsoft.com/office/drawing/2014/main" id="{A36E72D7-0883-4FCB-9275-A5EC8CFE0C16}"/>
+                <a16:creationId xmlns:a16="http://schemas.microsoft.com/office/drawing/2014/main" id="{8FE0F276-0971-4AAA-9F5E-6F3305CABC4D}"/>
               </a:ext>
             </a:extLst>
           </p:cNvPr>
@@ -1883,7 +2595,7 @@
           <p:cNvPr id="2" name="course-title">
             <a:extLst xmlns:a="http://schemas.openxmlformats.org/drawingml/2006/main">
               <a:ext uri="{FF2B5EF4-FFF2-40B4-BE49-F238E27FC236}">
-                <a16:creationId xmlns:a16="http://schemas.microsoft.com/office/drawing/2014/main" id="{26B597AF-79F9-45DC-A94C-8D2BB2C21565}"/>
+                <a16:creationId xmlns:a16="http://schemas.microsoft.com/office/drawing/2014/main" id="{6CEF25B6-034E-4936-9565-4FB30DE7FF30}"/>
               </a:ext>
             </a:extLst>
           </p:cNvPr>
@@ -1941,7 +2653,7 @@
           <p:cNvPr id="3" name="chapter-number">
             <a:extLst xmlns:a="http://schemas.openxmlformats.org/drawingml/2006/main">
               <a:ext uri="{FF2B5EF4-FFF2-40B4-BE49-F238E27FC236}">
-                <a16:creationId xmlns:a16="http://schemas.microsoft.com/office/drawing/2014/main" id="{B2661A65-3512-425C-849D-E208B8E34158}"/>
+                <a16:creationId xmlns:a16="http://schemas.microsoft.com/office/drawing/2014/main" id="{3E105235-FAA2-416C-B335-799E30CB57AE}"/>
               </a:ext>
             </a:extLst>
           </p:cNvPr>
@@ -1999,7 +2711,7 @@
           <p:cNvPr id="4" name="deck-title">
             <a:extLst xmlns:a="http://schemas.openxmlformats.org/drawingml/2006/main">
               <a:ext uri="{FF2B5EF4-FFF2-40B4-BE49-F238E27FC236}">
-                <a16:creationId xmlns:a16="http://schemas.microsoft.com/office/drawing/2014/main" id="{E119B2D3-6658-4DCA-BB9C-A21798202A84}"/>
+                <a16:creationId xmlns:a16="http://schemas.microsoft.com/office/drawing/2014/main" id="{66183096-3838-486B-BC6D-BF83E3FCDECB}"/>
               </a:ext>
             </a:extLst>
           </p:cNvPr>
@@ -2057,7 +2769,7 @@
           <p:cNvPr id="5" name="deck-thesis">
             <a:extLst xmlns:a="http://schemas.openxmlformats.org/drawingml/2006/main">
               <a:ext uri="{FF2B5EF4-FFF2-40B4-BE49-F238E27FC236}">
-                <a16:creationId xmlns:a16="http://schemas.microsoft.com/office/drawing/2014/main" id="{7B30E058-873F-4805-8C13-12A1BA02F33E}"/>
+                <a16:creationId xmlns:a16="http://schemas.microsoft.com/office/drawing/2014/main" id="{EDF09D4E-0B1E-4003-81BA-1621C9E8A5C8}"/>
               </a:ext>
             </a:extLst>
           </p:cNvPr>
@@ -2115,7 +2827,7 @@
           <p:cNvPr id="6" name="title-marker">
             <a:extLst xmlns:a="http://schemas.openxmlformats.org/drawingml/2006/main">
               <a:ext uri="{FF2B5EF4-FFF2-40B4-BE49-F238E27FC236}">
-                <a16:creationId xmlns:a16="http://schemas.microsoft.com/office/drawing/2014/main" id="{84A711DE-3F9E-46D4-A8E6-74D502197F1D}"/>
+                <a16:creationId xmlns:a16="http://schemas.microsoft.com/office/drawing/2014/main" id="{B9322458-1011-4FDD-8A9F-4222DBE552DB}"/>
               </a:ext>
             </a:extLst>
           </p:cNvPr>
@@ -2148,7 +2860,7 @@
           <p:cNvPr id="7" name="title-marker-text">
             <a:extLst xmlns:a="http://schemas.openxmlformats.org/drawingml/2006/main">
               <a:ext uri="{FF2B5EF4-FFF2-40B4-BE49-F238E27FC236}">
-                <a16:creationId xmlns:a16="http://schemas.microsoft.com/office/drawing/2014/main" id="{907A33CE-33C8-4CDF-92E2-B34F70C8A9FF}"/>
+                <a16:creationId xmlns:a16="http://schemas.microsoft.com/office/drawing/2014/main" id="{A951D5E1-DA7A-4F07-BF11-618F508FFD94}"/>
               </a:ext>
             </a:extLst>
           </p:cNvPr>
@@ -2227,7 +2939,7 @@
     </p:spTree>
     <p:extLst>
       <p:ext uri="{BB962C8B-B14F-4D97-AF65-F5344CB8AC3E}">
-        <p14:creationId xmlns:p14="http://schemas.microsoft.com/office/powerpoint/2010/main" val="1822592394"/>
+        <p14:creationId xmlns:p14="http://schemas.microsoft.com/office/powerpoint/2010/main" val="1028565886"/>
       </p:ext>
     </p:extLst>
   </p:cSld>
@@ -2235,6 +2947,996 @@
 </file>
 
 <file path=ppt/slides/slide10.xml><?xml version="1.0" encoding="utf-8"?>
+<p:sld xmlns:p="http://schemas.openxmlformats.org/presentationml/2006/main">
+  <p:cSld>
+    <p:bg>
+      <p:bgPr>
+        <a:solidFill xmlns:a="http://schemas.openxmlformats.org/drawingml/2006/main">
+          <a:srgbClr val="FFFFFF"/>
+        </a:solidFill>
+      </p:bgPr>
+    </p:bg>
+    <p:spTree>
+      <p:nvGrpSpPr>
+        <p:cNvPr id="1" name=""/>
+        <p:cNvGrpSpPr/>
+        <p:nvPr/>
+      </p:nvGrpSpPr>
+      <p:grpSpPr>
+        <a:xfrm xmlns:a="http://schemas.openxmlformats.org/drawingml/2006/main"/>
+      </p:grpSpPr>
+      <p:sp>
+        <p:nvSpPr>
+          <p:cNvPr id="18" name="accent-line">
+            <a:extLst xmlns:a="http://schemas.openxmlformats.org/drawingml/2006/main">
+              <a:ext uri="{FF2B5EF4-FFF2-40B4-BE49-F238E27FC236}">
+                <a16:creationId xmlns:a16="http://schemas.microsoft.com/office/drawing/2014/main" id="{31982E1A-9EEE-4881-99B2-610CF15B763E}"/>
+              </a:ext>
+            </a:extLst>
+          </p:cNvPr>
+          <p:cNvSpPr>
+            <a:spLocks xmlns:a="http://schemas.openxmlformats.org/drawingml/2006/main" noGrp="1"/>
+          </p:cNvSpPr>
+          <p:nvPr/>
+        </p:nvSpPr>
+        <p:spPr>
+          <a:xfrm xmlns:a="http://schemas.openxmlformats.org/drawingml/2006/main">
+            <a:off x="390525" y="304800"/>
+            <a:ext cx="11410950" cy="66675"/>
+          </a:xfrm>
+          <a:prstGeom xmlns:a="http://schemas.openxmlformats.org/drawingml/2006/main" prst="rect">
+            <a:avLst/>
+          </a:prstGeom>
+          <a:solidFill xmlns:a="http://schemas.openxmlformats.org/drawingml/2006/main">
+            <a:srgbClr val="73C8FF"/>
+          </a:solidFill>
+          <a:ln xmlns:a="http://schemas.openxmlformats.org/drawingml/2006/main" w="0">
+            <a:solidFill>
+              <a:srgbClr val="73C8FF"/>
+            </a:solidFill>
+            <a:prstDash val="solid"/>
+          </a:ln>
+        </p:spPr>
+      </p:sp>
+      <p:sp>
+        <p:nvSpPr>
+          <p:cNvPr id="2" name="chapter-label">
+            <a:extLst xmlns:a="http://schemas.openxmlformats.org/drawingml/2006/main">
+              <a:ext uri="{FF2B5EF4-FFF2-40B4-BE49-F238E27FC236}">
+                <a16:creationId xmlns:a16="http://schemas.microsoft.com/office/drawing/2014/main" id="{D7D2A5BC-0B68-453B-B6DE-8F1B8A4DDB62}"/>
+              </a:ext>
+            </a:extLst>
+          </p:cNvPr>
+          <p:cNvSpPr>
+            <a:spLocks xmlns:a="http://schemas.openxmlformats.org/drawingml/2006/main" noGrp="1"/>
+          </p:cNvSpPr>
+          <p:nvPr/>
+        </p:nvSpPr>
+        <p:spPr>
+          <a:xfrm xmlns:a="http://schemas.openxmlformats.org/drawingml/2006/main">
+            <a:off x="390525" y="466725"/>
+            <a:ext cx="4953000" cy="323850"/>
+          </a:xfrm>
+          <a:prstGeom xmlns:a="http://schemas.openxmlformats.org/drawingml/2006/main" prst="rect">
+            <a:avLst/>
+          </a:prstGeom>
+          <a:noFill xmlns:a="http://schemas.openxmlformats.org/drawingml/2006/main"/>
+          <a:ln xmlns:a="http://schemas.openxmlformats.org/drawingml/2006/main" w="0">
+            <a:noFill/>
+            <a:prstDash val="solid"/>
+          </a:ln>
+        </p:spPr>
+        <p:txBody>
+          <a:bodyPr xmlns:a="http://schemas.openxmlformats.org/drawingml/2006/main" anchor="t">
+            <a:noAutofit/>
+          </a:bodyPr>
+          <a:lstStyle xmlns:a="http://schemas.openxmlformats.org/drawingml/2006/main"/>
+          <a:p xmlns:a="http://schemas.openxmlformats.org/drawingml/2006/main">
+            <a:pPr algn="l">
+              <a:defRPr sz="1275" b="1">
+                <a:solidFill>
+                  <a:srgbClr val="5B5B57"/>
+                </a:solidFill>
+                <a:latin typeface="Helvetica Neue"/>
+                <a:ea typeface="Helvetica Neue"/>
+                <a:cs typeface="Helvetica Neue"/>
+              </a:defRPr>
+            </a:pPr>
+            <a:r>
+              <a:rPr sz="1275" b="1">
+                <a:solidFill>
+                  <a:srgbClr val="5B5B57"/>
+                </a:solidFill>
+                <a:latin typeface="Helvetica Neue"/>
+                <a:ea typeface="Helvetica Neue"/>
+                <a:cs typeface="Helvetica Neue"/>
+              </a:rPr>
+              <a:t>EXAM CHECK  /  07</a:t>
+            </a:r>
+          </a:p>
+        </p:txBody>
+      </p:sp>
+      <p:sp>
+        <p:nvSpPr>
+          <p:cNvPr id="3" name="slide-number">
+            <a:extLst xmlns:a="http://schemas.openxmlformats.org/drawingml/2006/main">
+              <a:ext uri="{FF2B5EF4-FFF2-40B4-BE49-F238E27FC236}">
+                <a16:creationId xmlns:a16="http://schemas.microsoft.com/office/drawing/2014/main" id="{B4BFB60E-F37D-43BC-9AA4-8AACD8B884D3}"/>
+              </a:ext>
+            </a:extLst>
+          </p:cNvPr>
+          <p:cNvSpPr>
+            <a:spLocks xmlns:a="http://schemas.openxmlformats.org/drawingml/2006/main" noGrp="1"/>
+          </p:cNvSpPr>
+          <p:nvPr/>
+        </p:nvSpPr>
+        <p:spPr>
+          <a:xfrm xmlns:a="http://schemas.openxmlformats.org/drawingml/2006/main">
+            <a:off x="11049000" y="6286500"/>
+            <a:ext cx="742950" cy="266700"/>
+          </a:xfrm>
+          <a:prstGeom xmlns:a="http://schemas.openxmlformats.org/drawingml/2006/main" prst="rect">
+            <a:avLst/>
+          </a:prstGeom>
+          <a:noFill xmlns:a="http://schemas.openxmlformats.org/drawingml/2006/main"/>
+          <a:ln xmlns:a="http://schemas.openxmlformats.org/drawingml/2006/main" w="0">
+            <a:noFill/>
+            <a:prstDash val="solid"/>
+          </a:ln>
+        </p:spPr>
+        <p:txBody>
+          <a:bodyPr xmlns:a="http://schemas.openxmlformats.org/drawingml/2006/main" anchor="t">
+            <a:noAutofit/>
+          </a:bodyPr>
+          <a:lstStyle xmlns:a="http://schemas.openxmlformats.org/drawingml/2006/main"/>
+          <a:p xmlns:a="http://schemas.openxmlformats.org/drawingml/2006/main">
+            <a:pPr algn="r">
+              <a:defRPr sz="1200" b="0">
+                <a:solidFill>
+                  <a:srgbClr val="5B5B57"/>
+                </a:solidFill>
+                <a:latin typeface="Helvetica Neue"/>
+                <a:ea typeface="Helvetica Neue"/>
+                <a:cs typeface="Helvetica Neue"/>
+              </a:defRPr>
+            </a:pPr>
+            <a:r>
+              <a:rPr sz="1200" b="0">
+                <a:solidFill>
+                  <a:srgbClr val="5B5B57"/>
+                </a:solidFill>
+                <a:latin typeface="Helvetica Neue"/>
+                <a:ea typeface="Helvetica Neue"/>
+                <a:cs typeface="Helvetica Neue"/>
+              </a:rPr>
+              <a:t>10</a:t>
+            </a:r>
+          </a:p>
+        </p:txBody>
+      </p:sp>
+      <p:sp>
+        <p:nvSpPr>
+          <p:cNvPr id="4" name="chapter-footer">
+            <a:extLst xmlns:a="http://schemas.openxmlformats.org/drawingml/2006/main">
+              <a:ext uri="{FF2B5EF4-FFF2-40B4-BE49-F238E27FC236}">
+                <a16:creationId xmlns:a16="http://schemas.microsoft.com/office/drawing/2014/main" id="{65307F83-504A-466F-A220-C3598FA79D59}"/>
+              </a:ext>
+            </a:extLst>
+          </p:cNvPr>
+          <p:cNvSpPr>
+            <a:spLocks xmlns:a="http://schemas.openxmlformats.org/drawingml/2006/main" noGrp="1"/>
+          </p:cNvSpPr>
+          <p:nvPr/>
+        </p:nvSpPr>
+        <p:spPr>
+          <a:xfrm xmlns:a="http://schemas.openxmlformats.org/drawingml/2006/main">
+            <a:off x="390525" y="6286500"/>
+            <a:ext cx="8191500" cy="266700"/>
+          </a:xfrm>
+          <a:prstGeom xmlns:a="http://schemas.openxmlformats.org/drawingml/2006/main" prst="rect">
+            <a:avLst/>
+          </a:prstGeom>
+          <a:noFill xmlns:a="http://schemas.openxmlformats.org/drawingml/2006/main"/>
+          <a:ln xmlns:a="http://schemas.openxmlformats.org/drawingml/2006/main" w="0">
+            <a:noFill/>
+            <a:prstDash val="solid"/>
+          </a:ln>
+        </p:spPr>
+        <p:txBody>
+          <a:bodyPr xmlns:a="http://schemas.openxmlformats.org/drawingml/2006/main" anchor="t">
+            <a:noAutofit/>
+          </a:bodyPr>
+          <a:lstStyle xmlns:a="http://schemas.openxmlformats.org/drawingml/2006/main"/>
+          <a:p xmlns:a="http://schemas.openxmlformats.org/drawingml/2006/main">
+            <a:pPr algn="l">
+              <a:defRPr sz="1125" b="0">
+                <a:solidFill>
+                  <a:srgbClr val="5B5B57"/>
+                </a:solidFill>
+                <a:latin typeface="Helvetica Neue"/>
+                <a:ea typeface="Helvetica Neue"/>
+                <a:cs typeface="Helvetica Neue"/>
+              </a:defRPr>
+            </a:pPr>
+            <a:r>
+              <a:rPr sz="1125" b="0">
+                <a:solidFill>
+                  <a:srgbClr val="5B5B57"/>
+                </a:solidFill>
+                <a:latin typeface="Helvetica Neue"/>
+                <a:ea typeface="Helvetica Neue"/>
+                <a:cs typeface="Helvetica Neue"/>
+              </a:rPr>
+              <a:t>Memory, State, and Context Engineering</a:t>
+            </a:r>
+          </a:p>
+        </p:txBody>
+      </p:sp>
+      <p:sp>
+        <p:nvSpPr>
+          <p:cNvPr id="5" name="exam-title">
+            <a:extLst xmlns:a="http://schemas.openxmlformats.org/drawingml/2006/main">
+              <a:ext uri="{FF2B5EF4-FFF2-40B4-BE49-F238E27FC236}">
+                <a16:creationId xmlns:a16="http://schemas.microsoft.com/office/drawing/2014/main" id="{F82DF25A-A4D9-4718-8464-0E51A38AD7CB}"/>
+              </a:ext>
+            </a:extLst>
+          </p:cNvPr>
+          <p:cNvSpPr>
+            <a:spLocks xmlns:a="http://schemas.openxmlformats.org/drawingml/2006/main" noGrp="1"/>
+          </p:cNvSpPr>
+          <p:nvPr/>
+        </p:nvSpPr>
+        <p:spPr>
+          <a:xfrm xmlns:a="http://schemas.openxmlformats.org/drawingml/2006/main">
+            <a:off x="390525" y="981075"/>
+            <a:ext cx="10668000" cy="781050"/>
+          </a:xfrm>
+          <a:prstGeom xmlns:a="http://schemas.openxmlformats.org/drawingml/2006/main" prst="rect">
+            <a:avLst/>
+          </a:prstGeom>
+          <a:noFill xmlns:a="http://schemas.openxmlformats.org/drawingml/2006/main"/>
+          <a:ln xmlns:a="http://schemas.openxmlformats.org/drawingml/2006/main" w="0">
+            <a:noFill/>
+            <a:prstDash val="solid"/>
+          </a:ln>
+        </p:spPr>
+        <p:txBody>
+          <a:bodyPr xmlns:a="http://schemas.openxmlformats.org/drawingml/2006/main" anchor="t">
+            <a:noAutofit/>
+          </a:bodyPr>
+          <a:lstStyle xmlns:a="http://schemas.openxmlformats.org/drawingml/2006/main"/>
+          <a:p xmlns:a="http://schemas.openxmlformats.org/drawingml/2006/main">
+            <a:pPr algn="l">
+              <a:defRPr sz="3150" b="1">
+                <a:solidFill>
+                  <a:srgbClr val="111111"/>
+                </a:solidFill>
+                <a:latin typeface="Helvetica Neue"/>
+                <a:ea typeface="Helvetica Neue"/>
+                <a:cs typeface="Helvetica Neue"/>
+              </a:defRPr>
+            </a:pPr>
+            <a:r>
+              <a:rPr sz="3150" b="1">
+                <a:solidFill>
+                  <a:srgbClr val="111111"/>
+                </a:solidFill>
+                <a:latin typeface="Helvetica Neue"/>
+                <a:ea typeface="Helvetica Neue"/>
+                <a:cs typeface="Helvetica Neue"/>
+              </a:rPr>
+              <a:t>Can you answer these without notes?</a:t>
+            </a:r>
+          </a:p>
+        </p:txBody>
+      </p:sp>
+      <p:sp>
+        <p:nvSpPr>
+          <p:cNvPr id="6" name="exam-number-1">
+            <a:extLst xmlns:a="http://schemas.openxmlformats.org/drawingml/2006/main">
+              <a:ext uri="{FF2B5EF4-FFF2-40B4-BE49-F238E27FC236}">
+                <a16:creationId xmlns:a16="http://schemas.microsoft.com/office/drawing/2014/main" id="{DE4C1152-6055-4ED8-846B-FEDF2DC87EA7}"/>
+              </a:ext>
+            </a:extLst>
+          </p:cNvPr>
+          <p:cNvSpPr>
+            <a:spLocks xmlns:a="http://schemas.openxmlformats.org/drawingml/2006/main" noGrp="1"/>
+          </p:cNvSpPr>
+          <p:nvPr/>
+        </p:nvSpPr>
+        <p:spPr>
+          <a:xfrm xmlns:a="http://schemas.openxmlformats.org/drawingml/2006/main">
+            <a:off x="390525" y="2238375"/>
+            <a:ext cx="590550" cy="400050"/>
+          </a:xfrm>
+          <a:prstGeom xmlns:a="http://schemas.openxmlformats.org/drawingml/2006/main" prst="rect">
+            <a:avLst/>
+          </a:prstGeom>
+          <a:noFill xmlns:a="http://schemas.openxmlformats.org/drawingml/2006/main"/>
+          <a:ln xmlns:a="http://schemas.openxmlformats.org/drawingml/2006/main" w="0">
+            <a:noFill/>
+            <a:prstDash val="solid"/>
+          </a:ln>
+        </p:spPr>
+        <p:txBody>
+          <a:bodyPr xmlns:a="http://schemas.openxmlformats.org/drawingml/2006/main" anchor="t">
+            <a:noAutofit/>
+          </a:bodyPr>
+          <a:lstStyle xmlns:a="http://schemas.openxmlformats.org/drawingml/2006/main"/>
+          <a:p xmlns:a="http://schemas.openxmlformats.org/drawingml/2006/main">
+            <a:pPr algn="l">
+              <a:defRPr sz="1725" b="1">
+                <a:solidFill>
+                  <a:srgbClr val="73C8FF"/>
+                </a:solidFill>
+                <a:latin typeface="Helvetica Neue"/>
+                <a:ea typeface="Helvetica Neue"/>
+                <a:cs typeface="Helvetica Neue"/>
+              </a:defRPr>
+            </a:pPr>
+            <a:r>
+              <a:rPr sz="1725" b="1">
+                <a:solidFill>
+                  <a:srgbClr val="73C8FF"/>
+                </a:solidFill>
+                <a:latin typeface="Helvetica Neue"/>
+                <a:ea typeface="Helvetica Neue"/>
+                <a:cs typeface="Helvetica Neue"/>
+              </a:rPr>
+              <a:t>01</a:t>
+            </a:r>
+          </a:p>
+        </p:txBody>
+      </p:sp>
+      <p:sp>
+        <p:nvSpPr>
+          <p:cNvPr id="7" name="exam-question-1">
+            <a:extLst xmlns:a="http://schemas.openxmlformats.org/drawingml/2006/main">
+              <a:ext uri="{FF2B5EF4-FFF2-40B4-BE49-F238E27FC236}">
+                <a16:creationId xmlns:a16="http://schemas.microsoft.com/office/drawing/2014/main" id="{48ADCA9A-FAED-45EC-BF86-782AEE2EA8DA}"/>
+              </a:ext>
+            </a:extLst>
+          </p:cNvPr>
+          <p:cNvSpPr>
+            <a:spLocks xmlns:a="http://schemas.openxmlformats.org/drawingml/2006/main" noGrp="1"/>
+          </p:cNvSpPr>
+          <p:nvPr/>
+        </p:nvSpPr>
+        <p:spPr>
+          <a:xfrm xmlns:a="http://schemas.openxmlformats.org/drawingml/2006/main">
+            <a:off x="1076325" y="2238375"/>
+            <a:ext cx="4762500" cy="895350"/>
+          </a:xfrm>
+          <a:prstGeom xmlns:a="http://schemas.openxmlformats.org/drawingml/2006/main" prst="rect">
+            <a:avLst/>
+          </a:prstGeom>
+          <a:noFill xmlns:a="http://schemas.openxmlformats.org/drawingml/2006/main"/>
+          <a:ln xmlns:a="http://schemas.openxmlformats.org/drawingml/2006/main" w="0">
+            <a:noFill/>
+            <a:prstDash val="solid"/>
+          </a:ln>
+        </p:spPr>
+        <p:txBody>
+          <a:bodyPr xmlns:a="http://schemas.openxmlformats.org/drawingml/2006/main" anchor="t">
+            <a:normAutofit fontScale="100000"/>
+          </a:bodyPr>
+          <a:lstStyle xmlns:a="http://schemas.openxmlformats.org/drawingml/2006/main"/>
+          <a:p xmlns:a="http://schemas.openxmlformats.org/drawingml/2006/main">
+            <a:pPr algn="l">
+              <a:defRPr sz="1575" b="1">
+                <a:solidFill>
+                  <a:srgbClr val="111111"/>
+                </a:solidFill>
+                <a:latin typeface="Helvetica Neue"/>
+                <a:ea typeface="Helvetica Neue"/>
+                <a:cs typeface="Helvetica Neue"/>
+              </a:defRPr>
+            </a:pPr>
+            <a:r>
+              <a:rPr sz="1575" b="1">
+                <a:solidFill>
+                  <a:srgbClr val="111111"/>
+                </a:solidFill>
+                <a:latin typeface="Helvetica Neue"/>
+                <a:ea typeface="Helvetica Neue"/>
+                <a:cs typeface="Helvetica Neue"/>
+              </a:rPr>
+              <a:t>Why does an LLM need an application-level memory system?</a:t>
+            </a:r>
+          </a:p>
+        </p:txBody>
+      </p:sp>
+      <p:sp>
+        <p:nvSpPr>
+          <p:cNvPr id="8" name="exam-number-2">
+            <a:extLst xmlns:a="http://schemas.openxmlformats.org/drawingml/2006/main">
+              <a:ext uri="{FF2B5EF4-FFF2-40B4-BE49-F238E27FC236}">
+                <a16:creationId xmlns:a16="http://schemas.microsoft.com/office/drawing/2014/main" id="{6E349674-4E97-4CD0-B0C3-52E1ECED011B}"/>
+              </a:ext>
+            </a:extLst>
+          </p:cNvPr>
+          <p:cNvSpPr>
+            <a:spLocks xmlns:a="http://schemas.openxmlformats.org/drawingml/2006/main" noGrp="1"/>
+          </p:cNvSpPr>
+          <p:nvPr/>
+        </p:nvSpPr>
+        <p:spPr>
+          <a:xfrm xmlns:a="http://schemas.openxmlformats.org/drawingml/2006/main">
+            <a:off x="6191250" y="2238375"/>
+            <a:ext cx="590550" cy="400050"/>
+          </a:xfrm>
+          <a:prstGeom xmlns:a="http://schemas.openxmlformats.org/drawingml/2006/main" prst="rect">
+            <a:avLst/>
+          </a:prstGeom>
+          <a:noFill xmlns:a="http://schemas.openxmlformats.org/drawingml/2006/main"/>
+          <a:ln xmlns:a="http://schemas.openxmlformats.org/drawingml/2006/main" w="0">
+            <a:noFill/>
+            <a:prstDash val="solid"/>
+          </a:ln>
+        </p:spPr>
+        <p:txBody>
+          <a:bodyPr xmlns:a="http://schemas.openxmlformats.org/drawingml/2006/main" anchor="t">
+            <a:noAutofit/>
+          </a:bodyPr>
+          <a:lstStyle xmlns:a="http://schemas.openxmlformats.org/drawingml/2006/main"/>
+          <a:p xmlns:a="http://schemas.openxmlformats.org/drawingml/2006/main">
+            <a:pPr algn="l">
+              <a:defRPr sz="1725" b="1">
+                <a:solidFill>
+                  <a:srgbClr val="73C8FF"/>
+                </a:solidFill>
+                <a:latin typeface="Helvetica Neue"/>
+                <a:ea typeface="Helvetica Neue"/>
+                <a:cs typeface="Helvetica Neue"/>
+              </a:defRPr>
+            </a:pPr>
+            <a:r>
+              <a:rPr sz="1725" b="1">
+                <a:solidFill>
+                  <a:srgbClr val="73C8FF"/>
+                </a:solidFill>
+                <a:latin typeface="Helvetica Neue"/>
+                <a:ea typeface="Helvetica Neue"/>
+                <a:cs typeface="Helvetica Neue"/>
+              </a:rPr>
+              <a:t>02</a:t>
+            </a:r>
+          </a:p>
+        </p:txBody>
+      </p:sp>
+      <p:sp>
+        <p:nvSpPr>
+          <p:cNvPr id="9" name="exam-question-2">
+            <a:extLst xmlns:a="http://schemas.openxmlformats.org/drawingml/2006/main">
+              <a:ext uri="{FF2B5EF4-FFF2-40B4-BE49-F238E27FC236}">
+                <a16:creationId xmlns:a16="http://schemas.microsoft.com/office/drawing/2014/main" id="{D3301349-3475-4357-A243-B7EFDD408BB9}"/>
+              </a:ext>
+            </a:extLst>
+          </p:cNvPr>
+          <p:cNvSpPr>
+            <a:spLocks xmlns:a="http://schemas.openxmlformats.org/drawingml/2006/main" noGrp="1"/>
+          </p:cNvSpPr>
+          <p:nvPr/>
+        </p:nvSpPr>
+        <p:spPr>
+          <a:xfrm xmlns:a="http://schemas.openxmlformats.org/drawingml/2006/main">
+            <a:off x="6877050" y="2238375"/>
+            <a:ext cx="4762500" cy="895350"/>
+          </a:xfrm>
+          <a:prstGeom xmlns:a="http://schemas.openxmlformats.org/drawingml/2006/main" prst="rect">
+            <a:avLst/>
+          </a:prstGeom>
+          <a:noFill xmlns:a="http://schemas.openxmlformats.org/drawingml/2006/main"/>
+          <a:ln xmlns:a="http://schemas.openxmlformats.org/drawingml/2006/main" w="0">
+            <a:noFill/>
+            <a:prstDash val="solid"/>
+          </a:ln>
+        </p:spPr>
+        <p:txBody>
+          <a:bodyPr xmlns:a="http://schemas.openxmlformats.org/drawingml/2006/main" anchor="t">
+            <a:normAutofit fontScale="100000"/>
+          </a:bodyPr>
+          <a:lstStyle xmlns:a="http://schemas.openxmlformats.org/drawingml/2006/main"/>
+          <a:p xmlns:a="http://schemas.openxmlformats.org/drawingml/2006/main">
+            <a:pPr algn="l">
+              <a:defRPr sz="1575" b="1">
+                <a:solidFill>
+                  <a:srgbClr val="111111"/>
+                </a:solidFill>
+                <a:latin typeface="Helvetica Neue"/>
+                <a:ea typeface="Helvetica Neue"/>
+                <a:cs typeface="Helvetica Neue"/>
+              </a:defRPr>
+            </a:pPr>
+            <a:r>
+              <a:rPr sz="1575" b="1">
+                <a:solidFill>
+                  <a:srgbClr val="111111"/>
+                </a:solidFill>
+                <a:latin typeface="Helvetica Neue"/>
+                <a:ea typeface="Helvetica Neue"/>
+                <a:cs typeface="Helvetica Neue"/>
+              </a:rPr>
+              <a:t>Compare episodic, semantic, and procedural memory.</a:t>
+            </a:r>
+          </a:p>
+        </p:txBody>
+      </p:sp>
+      <p:sp>
+        <p:nvSpPr>
+          <p:cNvPr id="10" name="exam-number-3">
+            <a:extLst xmlns:a="http://schemas.openxmlformats.org/drawingml/2006/main">
+              <a:ext uri="{FF2B5EF4-FFF2-40B4-BE49-F238E27FC236}">
+                <a16:creationId xmlns:a16="http://schemas.microsoft.com/office/drawing/2014/main" id="{EF5B0F43-3DE1-4AE2-BA8B-F08E65FBB6C3}"/>
+              </a:ext>
+            </a:extLst>
+          </p:cNvPr>
+          <p:cNvSpPr>
+            <a:spLocks xmlns:a="http://schemas.openxmlformats.org/drawingml/2006/main" noGrp="1"/>
+          </p:cNvSpPr>
+          <p:nvPr/>
+        </p:nvSpPr>
+        <p:spPr>
+          <a:xfrm xmlns:a="http://schemas.openxmlformats.org/drawingml/2006/main">
+            <a:off x="390525" y="3495675"/>
+            <a:ext cx="590550" cy="400050"/>
+          </a:xfrm>
+          <a:prstGeom xmlns:a="http://schemas.openxmlformats.org/drawingml/2006/main" prst="rect">
+            <a:avLst/>
+          </a:prstGeom>
+          <a:noFill xmlns:a="http://schemas.openxmlformats.org/drawingml/2006/main"/>
+          <a:ln xmlns:a="http://schemas.openxmlformats.org/drawingml/2006/main" w="0">
+            <a:noFill/>
+            <a:prstDash val="solid"/>
+          </a:ln>
+        </p:spPr>
+        <p:txBody>
+          <a:bodyPr xmlns:a="http://schemas.openxmlformats.org/drawingml/2006/main" anchor="t">
+            <a:noAutofit/>
+          </a:bodyPr>
+          <a:lstStyle xmlns:a="http://schemas.openxmlformats.org/drawingml/2006/main"/>
+          <a:p xmlns:a="http://schemas.openxmlformats.org/drawingml/2006/main">
+            <a:pPr algn="l">
+              <a:defRPr sz="1725" b="1">
+                <a:solidFill>
+                  <a:srgbClr val="73C8FF"/>
+                </a:solidFill>
+                <a:latin typeface="Helvetica Neue"/>
+                <a:ea typeface="Helvetica Neue"/>
+                <a:cs typeface="Helvetica Neue"/>
+              </a:defRPr>
+            </a:pPr>
+            <a:r>
+              <a:rPr sz="1725" b="1">
+                <a:solidFill>
+                  <a:srgbClr val="73C8FF"/>
+                </a:solidFill>
+                <a:latin typeface="Helvetica Neue"/>
+                <a:ea typeface="Helvetica Neue"/>
+                <a:cs typeface="Helvetica Neue"/>
+              </a:rPr>
+              <a:t>03</a:t>
+            </a:r>
+          </a:p>
+        </p:txBody>
+      </p:sp>
+      <p:sp>
+        <p:nvSpPr>
+          <p:cNvPr id="11" name="exam-question-3">
+            <a:extLst xmlns:a="http://schemas.openxmlformats.org/drawingml/2006/main">
+              <a:ext uri="{FF2B5EF4-FFF2-40B4-BE49-F238E27FC236}">
+                <a16:creationId xmlns:a16="http://schemas.microsoft.com/office/drawing/2014/main" id="{0CAB168A-9D85-4C54-8128-8581A78C27F5}"/>
+              </a:ext>
+            </a:extLst>
+          </p:cNvPr>
+          <p:cNvSpPr>
+            <a:spLocks xmlns:a="http://schemas.openxmlformats.org/drawingml/2006/main" noGrp="1"/>
+          </p:cNvSpPr>
+          <p:nvPr/>
+        </p:nvSpPr>
+        <p:spPr>
+          <a:xfrm xmlns:a="http://schemas.openxmlformats.org/drawingml/2006/main">
+            <a:off x="1076325" y="3495675"/>
+            <a:ext cx="4762500" cy="895350"/>
+          </a:xfrm>
+          <a:prstGeom xmlns:a="http://schemas.openxmlformats.org/drawingml/2006/main" prst="rect">
+            <a:avLst/>
+          </a:prstGeom>
+          <a:noFill xmlns:a="http://schemas.openxmlformats.org/drawingml/2006/main"/>
+          <a:ln xmlns:a="http://schemas.openxmlformats.org/drawingml/2006/main" w="0">
+            <a:noFill/>
+            <a:prstDash val="solid"/>
+          </a:ln>
+        </p:spPr>
+        <p:txBody>
+          <a:bodyPr xmlns:a="http://schemas.openxmlformats.org/drawingml/2006/main" anchor="t">
+            <a:normAutofit fontScale="100000"/>
+          </a:bodyPr>
+          <a:lstStyle xmlns:a="http://schemas.openxmlformats.org/drawingml/2006/main"/>
+          <a:p xmlns:a="http://schemas.openxmlformats.org/drawingml/2006/main">
+            <a:pPr algn="l">
+              <a:defRPr sz="1575" b="1">
+                <a:solidFill>
+                  <a:srgbClr val="111111"/>
+                </a:solidFill>
+                <a:latin typeface="Helvetica Neue"/>
+                <a:ea typeface="Helvetica Neue"/>
+                <a:cs typeface="Helvetica Neue"/>
+              </a:defRPr>
+            </a:pPr>
+            <a:r>
+              <a:rPr sz="1575" b="1">
+                <a:solidFill>
+                  <a:srgbClr val="111111"/>
+                </a:solidFill>
+                <a:latin typeface="Helvetica Neue"/>
+                <a:ea typeface="Helvetica Neue"/>
+                <a:cs typeface="Helvetica Neue"/>
+              </a:rPr>
+              <a:t>What are four ways to manage a full context window?</a:t>
+            </a:r>
+          </a:p>
+        </p:txBody>
+      </p:sp>
+      <p:sp>
+        <p:nvSpPr>
+          <p:cNvPr id="12" name="exam-number-4">
+            <a:extLst xmlns:a="http://schemas.openxmlformats.org/drawingml/2006/main">
+              <a:ext uri="{FF2B5EF4-FFF2-40B4-BE49-F238E27FC236}">
+                <a16:creationId xmlns:a16="http://schemas.microsoft.com/office/drawing/2014/main" id="{AEC02975-67D5-4336-BD90-CEB323B49D42}"/>
+              </a:ext>
+            </a:extLst>
+          </p:cNvPr>
+          <p:cNvSpPr>
+            <a:spLocks xmlns:a="http://schemas.openxmlformats.org/drawingml/2006/main" noGrp="1"/>
+          </p:cNvSpPr>
+          <p:nvPr/>
+        </p:nvSpPr>
+        <p:spPr>
+          <a:xfrm xmlns:a="http://schemas.openxmlformats.org/drawingml/2006/main">
+            <a:off x="6191250" y="3495675"/>
+            <a:ext cx="590550" cy="400050"/>
+          </a:xfrm>
+          <a:prstGeom xmlns:a="http://schemas.openxmlformats.org/drawingml/2006/main" prst="rect">
+            <a:avLst/>
+          </a:prstGeom>
+          <a:noFill xmlns:a="http://schemas.openxmlformats.org/drawingml/2006/main"/>
+          <a:ln xmlns:a="http://schemas.openxmlformats.org/drawingml/2006/main" w="0">
+            <a:noFill/>
+            <a:prstDash val="solid"/>
+          </a:ln>
+        </p:spPr>
+        <p:txBody>
+          <a:bodyPr xmlns:a="http://schemas.openxmlformats.org/drawingml/2006/main" anchor="t">
+            <a:noAutofit/>
+          </a:bodyPr>
+          <a:lstStyle xmlns:a="http://schemas.openxmlformats.org/drawingml/2006/main"/>
+          <a:p xmlns:a="http://schemas.openxmlformats.org/drawingml/2006/main">
+            <a:pPr algn="l">
+              <a:defRPr sz="1725" b="1">
+                <a:solidFill>
+                  <a:srgbClr val="73C8FF"/>
+                </a:solidFill>
+                <a:latin typeface="Helvetica Neue"/>
+                <a:ea typeface="Helvetica Neue"/>
+                <a:cs typeface="Helvetica Neue"/>
+              </a:defRPr>
+            </a:pPr>
+            <a:r>
+              <a:rPr sz="1725" b="1">
+                <a:solidFill>
+                  <a:srgbClr val="73C8FF"/>
+                </a:solidFill>
+                <a:latin typeface="Helvetica Neue"/>
+                <a:ea typeface="Helvetica Neue"/>
+                <a:cs typeface="Helvetica Neue"/>
+              </a:rPr>
+              <a:t>04</a:t>
+            </a:r>
+          </a:p>
+        </p:txBody>
+      </p:sp>
+      <p:sp>
+        <p:nvSpPr>
+          <p:cNvPr id="13" name="exam-question-4">
+            <a:extLst xmlns:a="http://schemas.openxmlformats.org/drawingml/2006/main">
+              <a:ext uri="{FF2B5EF4-FFF2-40B4-BE49-F238E27FC236}">
+                <a16:creationId xmlns:a16="http://schemas.microsoft.com/office/drawing/2014/main" id="{943A5E8C-AEF2-40D7-BD3C-4EDB2338208F}"/>
+              </a:ext>
+            </a:extLst>
+          </p:cNvPr>
+          <p:cNvSpPr>
+            <a:spLocks xmlns:a="http://schemas.openxmlformats.org/drawingml/2006/main" noGrp="1"/>
+          </p:cNvSpPr>
+          <p:nvPr/>
+        </p:nvSpPr>
+        <p:spPr>
+          <a:xfrm xmlns:a="http://schemas.openxmlformats.org/drawingml/2006/main">
+            <a:off x="6877050" y="3495675"/>
+            <a:ext cx="4762500" cy="895350"/>
+          </a:xfrm>
+          <a:prstGeom xmlns:a="http://schemas.openxmlformats.org/drawingml/2006/main" prst="rect">
+            <a:avLst/>
+          </a:prstGeom>
+          <a:noFill xmlns:a="http://schemas.openxmlformats.org/drawingml/2006/main"/>
+          <a:ln xmlns:a="http://schemas.openxmlformats.org/drawingml/2006/main" w="0">
+            <a:noFill/>
+            <a:prstDash val="solid"/>
+          </a:ln>
+        </p:spPr>
+        <p:txBody>
+          <a:bodyPr xmlns:a="http://schemas.openxmlformats.org/drawingml/2006/main" anchor="t">
+            <a:normAutofit fontScale="100000"/>
+          </a:bodyPr>
+          <a:lstStyle xmlns:a="http://schemas.openxmlformats.org/drawingml/2006/main"/>
+          <a:p xmlns:a="http://schemas.openxmlformats.org/drawingml/2006/main">
+            <a:pPr algn="l">
+              <a:defRPr sz="1575" b="1">
+                <a:solidFill>
+                  <a:srgbClr val="111111"/>
+                </a:solidFill>
+                <a:latin typeface="Helvetica Neue"/>
+                <a:ea typeface="Helvetica Neue"/>
+                <a:cs typeface="Helvetica Neue"/>
+              </a:defRPr>
+            </a:pPr>
+            <a:r>
+              <a:rPr sz="1575" b="1">
+                <a:solidFill>
+                  <a:srgbClr val="111111"/>
+                </a:solidFill>
+                <a:latin typeface="Helvetica Neue"/>
+                <a:ea typeface="Helvetica Neue"/>
+                <a:cs typeface="Helvetica Neue"/>
+              </a:rPr>
+              <a:t>When should an agent write a long-term memory?</a:t>
+            </a:r>
+          </a:p>
+        </p:txBody>
+      </p:sp>
+      <p:sp>
+        <p:nvSpPr>
+          <p:cNvPr id="14" name="exam-number-5">
+            <a:extLst xmlns:a="http://schemas.openxmlformats.org/drawingml/2006/main">
+              <a:ext uri="{FF2B5EF4-FFF2-40B4-BE49-F238E27FC236}">
+                <a16:creationId xmlns:a16="http://schemas.microsoft.com/office/drawing/2014/main" id="{63C8CCB3-5F36-43EE-A21F-26E55EE150D0}"/>
+              </a:ext>
+            </a:extLst>
+          </p:cNvPr>
+          <p:cNvSpPr>
+            <a:spLocks xmlns:a="http://schemas.openxmlformats.org/drawingml/2006/main" noGrp="1"/>
+          </p:cNvSpPr>
+          <p:nvPr/>
+        </p:nvSpPr>
+        <p:spPr>
+          <a:xfrm xmlns:a="http://schemas.openxmlformats.org/drawingml/2006/main">
+            <a:off x="390525" y="4752975"/>
+            <a:ext cx="590550" cy="400050"/>
+          </a:xfrm>
+          <a:prstGeom xmlns:a="http://schemas.openxmlformats.org/drawingml/2006/main" prst="rect">
+            <a:avLst/>
+          </a:prstGeom>
+          <a:noFill xmlns:a="http://schemas.openxmlformats.org/drawingml/2006/main"/>
+          <a:ln xmlns:a="http://schemas.openxmlformats.org/drawingml/2006/main" w="0">
+            <a:noFill/>
+            <a:prstDash val="solid"/>
+          </a:ln>
+        </p:spPr>
+        <p:txBody>
+          <a:bodyPr xmlns:a="http://schemas.openxmlformats.org/drawingml/2006/main" anchor="t">
+            <a:noAutofit/>
+          </a:bodyPr>
+          <a:lstStyle xmlns:a="http://schemas.openxmlformats.org/drawingml/2006/main"/>
+          <a:p xmlns:a="http://schemas.openxmlformats.org/drawingml/2006/main">
+            <a:pPr algn="l">
+              <a:defRPr sz="1725" b="1">
+                <a:solidFill>
+                  <a:srgbClr val="73C8FF"/>
+                </a:solidFill>
+                <a:latin typeface="Helvetica Neue"/>
+                <a:ea typeface="Helvetica Neue"/>
+                <a:cs typeface="Helvetica Neue"/>
+              </a:defRPr>
+            </a:pPr>
+            <a:r>
+              <a:rPr sz="1725" b="1">
+                <a:solidFill>
+                  <a:srgbClr val="73C8FF"/>
+                </a:solidFill>
+                <a:latin typeface="Helvetica Neue"/>
+                <a:ea typeface="Helvetica Neue"/>
+                <a:cs typeface="Helvetica Neue"/>
+              </a:rPr>
+              <a:t>05</a:t>
+            </a:r>
+          </a:p>
+        </p:txBody>
+      </p:sp>
+      <p:sp>
+        <p:nvSpPr>
+          <p:cNvPr id="15" name="exam-question-5">
+            <a:extLst xmlns:a="http://schemas.openxmlformats.org/drawingml/2006/main">
+              <a:ext uri="{FF2B5EF4-FFF2-40B4-BE49-F238E27FC236}">
+                <a16:creationId xmlns:a16="http://schemas.microsoft.com/office/drawing/2014/main" id="{CD4905C3-6887-4BB1-97CC-1EABB9F86572}"/>
+              </a:ext>
+            </a:extLst>
+          </p:cNvPr>
+          <p:cNvSpPr>
+            <a:spLocks xmlns:a="http://schemas.openxmlformats.org/drawingml/2006/main" noGrp="1"/>
+          </p:cNvSpPr>
+          <p:nvPr/>
+        </p:nvSpPr>
+        <p:spPr>
+          <a:xfrm xmlns:a="http://schemas.openxmlformats.org/drawingml/2006/main">
+            <a:off x="1076325" y="4752975"/>
+            <a:ext cx="4762500" cy="895350"/>
+          </a:xfrm>
+          <a:prstGeom xmlns:a="http://schemas.openxmlformats.org/drawingml/2006/main" prst="rect">
+            <a:avLst/>
+          </a:prstGeom>
+          <a:noFill xmlns:a="http://schemas.openxmlformats.org/drawingml/2006/main"/>
+          <a:ln xmlns:a="http://schemas.openxmlformats.org/drawingml/2006/main" w="0">
+            <a:noFill/>
+            <a:prstDash val="solid"/>
+          </a:ln>
+        </p:spPr>
+        <p:txBody>
+          <a:bodyPr xmlns:a="http://schemas.openxmlformats.org/drawingml/2006/main" anchor="t">
+            <a:normAutofit fontScale="100000"/>
+          </a:bodyPr>
+          <a:lstStyle xmlns:a="http://schemas.openxmlformats.org/drawingml/2006/main"/>
+          <a:p xmlns:a="http://schemas.openxmlformats.org/drawingml/2006/main">
+            <a:pPr algn="l">
+              <a:defRPr sz="1575" b="1">
+                <a:solidFill>
+                  <a:srgbClr val="111111"/>
+                </a:solidFill>
+                <a:latin typeface="Helvetica Neue"/>
+                <a:ea typeface="Helvetica Neue"/>
+                <a:cs typeface="Helvetica Neue"/>
+              </a:defRPr>
+            </a:pPr>
+            <a:r>
+              <a:rPr sz="1575" b="1">
+                <a:solidFill>
+                  <a:srgbClr val="111111"/>
+                </a:solidFill>
+                <a:latin typeface="Helvetica Neue"/>
+                <a:ea typeface="Helvetica Neue"/>
+                <a:cs typeface="Helvetica Neue"/>
+              </a:rPr>
+              <a:t>Why does a million-token context not eliminate memory architecture?</a:t>
+            </a:r>
+          </a:p>
+        </p:txBody>
+      </p:sp>
+      <p:sp>
+        <p:nvSpPr>
+          <p:cNvPr id="16" name="exam-number-6">
+            <a:extLst xmlns:a="http://schemas.openxmlformats.org/drawingml/2006/main">
+              <a:ext uri="{FF2B5EF4-FFF2-40B4-BE49-F238E27FC236}">
+                <a16:creationId xmlns:a16="http://schemas.microsoft.com/office/drawing/2014/main" id="{8EA421E5-50C3-47F2-81B3-13D70BE0AE1D}"/>
+              </a:ext>
+            </a:extLst>
+          </p:cNvPr>
+          <p:cNvSpPr>
+            <a:spLocks xmlns:a="http://schemas.openxmlformats.org/drawingml/2006/main" noGrp="1"/>
+          </p:cNvSpPr>
+          <p:nvPr/>
+        </p:nvSpPr>
+        <p:spPr>
+          <a:xfrm xmlns:a="http://schemas.openxmlformats.org/drawingml/2006/main">
+            <a:off x="6191250" y="4752975"/>
+            <a:ext cx="590550" cy="400050"/>
+          </a:xfrm>
+          <a:prstGeom xmlns:a="http://schemas.openxmlformats.org/drawingml/2006/main" prst="rect">
+            <a:avLst/>
+          </a:prstGeom>
+          <a:noFill xmlns:a="http://schemas.openxmlformats.org/drawingml/2006/main"/>
+          <a:ln xmlns:a="http://schemas.openxmlformats.org/drawingml/2006/main" w="0">
+            <a:noFill/>
+            <a:prstDash val="solid"/>
+          </a:ln>
+        </p:spPr>
+        <p:txBody>
+          <a:bodyPr xmlns:a="http://schemas.openxmlformats.org/drawingml/2006/main" anchor="t">
+            <a:noAutofit/>
+          </a:bodyPr>
+          <a:lstStyle xmlns:a="http://schemas.openxmlformats.org/drawingml/2006/main"/>
+          <a:p xmlns:a="http://schemas.openxmlformats.org/drawingml/2006/main">
+            <a:pPr algn="l">
+              <a:defRPr sz="1725" b="1">
+                <a:solidFill>
+                  <a:srgbClr val="73C8FF"/>
+                </a:solidFill>
+                <a:latin typeface="Helvetica Neue"/>
+                <a:ea typeface="Helvetica Neue"/>
+                <a:cs typeface="Helvetica Neue"/>
+              </a:defRPr>
+            </a:pPr>
+            <a:r>
+              <a:rPr sz="1725" b="1">
+                <a:solidFill>
+                  <a:srgbClr val="73C8FF"/>
+                </a:solidFill>
+                <a:latin typeface="Helvetica Neue"/>
+                <a:ea typeface="Helvetica Neue"/>
+                <a:cs typeface="Helvetica Neue"/>
+              </a:rPr>
+              <a:t>06</a:t>
+            </a:r>
+          </a:p>
+        </p:txBody>
+      </p:sp>
+      <p:sp>
+        <p:nvSpPr>
+          <p:cNvPr id="17" name="exam-question-6">
+            <a:extLst xmlns:a="http://schemas.openxmlformats.org/drawingml/2006/main">
+              <a:ext uri="{FF2B5EF4-FFF2-40B4-BE49-F238E27FC236}">
+                <a16:creationId xmlns:a16="http://schemas.microsoft.com/office/drawing/2014/main" id="{17CA7D53-BE15-48F4-B47C-2D0C1B2E27B4}"/>
+              </a:ext>
+            </a:extLst>
+          </p:cNvPr>
+          <p:cNvSpPr>
+            <a:spLocks xmlns:a="http://schemas.openxmlformats.org/drawingml/2006/main" noGrp="1"/>
+          </p:cNvSpPr>
+          <p:nvPr/>
+        </p:nvSpPr>
+        <p:spPr>
+          <a:xfrm xmlns:a="http://schemas.openxmlformats.org/drawingml/2006/main">
+            <a:off x="6877050" y="4752975"/>
+            <a:ext cx="4762500" cy="895350"/>
+          </a:xfrm>
+          <a:prstGeom xmlns:a="http://schemas.openxmlformats.org/drawingml/2006/main" prst="rect">
+            <a:avLst/>
+          </a:prstGeom>
+          <a:noFill xmlns:a="http://schemas.openxmlformats.org/drawingml/2006/main"/>
+          <a:ln xmlns:a="http://schemas.openxmlformats.org/drawingml/2006/main" w="0">
+            <a:noFill/>
+            <a:prstDash val="solid"/>
+          </a:ln>
+        </p:spPr>
+        <p:txBody>
+          <a:bodyPr xmlns:a="http://schemas.openxmlformats.org/drawingml/2006/main" anchor="t">
+            <a:normAutofit fontScale="100000"/>
+          </a:bodyPr>
+          <a:lstStyle xmlns:a="http://schemas.openxmlformats.org/drawingml/2006/main"/>
+          <a:p xmlns:a="http://schemas.openxmlformats.org/drawingml/2006/main">
+            <a:pPr algn="l">
+              <a:defRPr sz="1575" b="1">
+                <a:solidFill>
+                  <a:srgbClr val="111111"/>
+                </a:solidFill>
+                <a:latin typeface="Helvetica Neue"/>
+                <a:ea typeface="Helvetica Neue"/>
+                <a:cs typeface="Helvetica Neue"/>
+              </a:defRPr>
+            </a:pPr>
+            <a:r>
+              <a:rPr sz="1575" b="1">
+                <a:solidFill>
+                  <a:srgbClr val="111111"/>
+                </a:solidFill>
+                <a:latin typeface="Helvetica Neue"/>
+                <a:ea typeface="Helvetica Neue"/>
+                <a:cs typeface="Helvetica Neue"/>
+              </a:rPr>
+              <a:t>How can a workflow resume correctly while its next model call still lacks needed context?</a:t>
+            </a:r>
+          </a:p>
+        </p:txBody>
+      </p:sp>
+    </p:spTree>
+    <p:extLst>
+      <p:ext uri="{BB962C8B-B14F-4D97-AF65-F5344CB8AC3E}">
+        <p14:creationId xmlns:p14="http://schemas.microsoft.com/office/powerpoint/2010/main" val="660510243"/>
+      </p:ext>
+    </p:extLst>
+  </p:cSld>
+</p:sld>
+</file>
+
+<file path=ppt/slides/slide11.xml><?xml version="1.0" encoding="utf-8"?>
 <p:sld xmlns:p="http://schemas.openxmlformats.org/presentationml/2006/main">
   <p:cSld>
     <p:bg>
@@ -2258,7 +3960,7 @@
           <p:cNvPr id="14" name="accent-line">
             <a:extLst xmlns:a="http://schemas.openxmlformats.org/drawingml/2006/main">
               <a:ext uri="{FF2B5EF4-FFF2-40B4-BE49-F238E27FC236}">
-                <a16:creationId xmlns:a16="http://schemas.microsoft.com/office/drawing/2014/main" id="{D0AA4C31-9407-478B-9220-A2F56337ADFB}"/>
+                <a16:creationId xmlns:a16="http://schemas.microsoft.com/office/drawing/2014/main" id="{FE071C33-E8D6-4DEB-A936-7081601E1199}"/>
               </a:ext>
             </a:extLst>
           </p:cNvPr>
@@ -2291,7 +3993,7 @@
           <p:cNvPr id="2" name="chapter-label">
             <a:extLst xmlns:a="http://schemas.openxmlformats.org/drawingml/2006/main">
               <a:ext uri="{FF2B5EF4-FFF2-40B4-BE49-F238E27FC236}">
-                <a16:creationId xmlns:a16="http://schemas.microsoft.com/office/drawing/2014/main" id="{32DF7CA8-BAB4-4A84-AD2A-9E550B5A2C29}"/>
+                <a16:creationId xmlns:a16="http://schemas.microsoft.com/office/drawing/2014/main" id="{95E690A3-1D5D-4A9A-AFCC-E21FC6E80E22}"/>
               </a:ext>
             </a:extLst>
           </p:cNvPr>
@@ -2349,7 +4051,7 @@
           <p:cNvPr id="3" name="slide-number">
             <a:extLst xmlns:a="http://schemas.openxmlformats.org/drawingml/2006/main">
               <a:ext uri="{FF2B5EF4-FFF2-40B4-BE49-F238E27FC236}">
-                <a16:creationId xmlns:a16="http://schemas.microsoft.com/office/drawing/2014/main" id="{4BC5637A-B919-4190-9EEE-2ABA0F6BA882}"/>
+                <a16:creationId xmlns:a16="http://schemas.microsoft.com/office/drawing/2014/main" id="{6A234D43-4B7D-4BEB-87A9-6AD2695BA985}"/>
               </a:ext>
             </a:extLst>
           </p:cNvPr>
@@ -2397,7 +4099,7 @@
                 <a:ea typeface="Helvetica Neue"/>
                 <a:cs typeface="Helvetica Neue"/>
               </a:rPr>
-              <a:t>10</a:t>
+              <a:t>11</a:t>
             </a:r>
           </a:p>
         </p:txBody>
@@ -2407,7 +4109,7 @@
           <p:cNvPr id="4" name="chapter-footer">
             <a:extLst xmlns:a="http://schemas.openxmlformats.org/drawingml/2006/main">
               <a:ext uri="{FF2B5EF4-FFF2-40B4-BE49-F238E27FC236}">
-                <a16:creationId xmlns:a16="http://schemas.microsoft.com/office/drawing/2014/main" id="{55D7A05A-1A55-45C6-864A-BA0396444DA1}"/>
+                <a16:creationId xmlns:a16="http://schemas.microsoft.com/office/drawing/2014/main" id="{DE8CC3E1-44CA-404D-9BDA-75C59A93D882}"/>
               </a:ext>
             </a:extLst>
           </p:cNvPr>
@@ -2465,7 +4167,7 @@
           <p:cNvPr id="5" name="closing-title">
             <a:extLst xmlns:a="http://schemas.openxmlformats.org/drawingml/2006/main">
               <a:ext uri="{FF2B5EF4-FFF2-40B4-BE49-F238E27FC236}">
-                <a16:creationId xmlns:a16="http://schemas.microsoft.com/office/drawing/2014/main" id="{78A85521-ADA5-4285-B3A8-8EC7A72F95BC}"/>
+                <a16:creationId xmlns:a16="http://schemas.microsoft.com/office/drawing/2014/main" id="{58F1DE1F-29E8-41A0-9C3B-FA7DE4D7DE6B}"/>
               </a:ext>
             </a:extLst>
           </p:cNvPr>
@@ -2523,7 +4225,7 @@
           <p:cNvPr id="6" name="takeaway-number-1">
             <a:extLst xmlns:a="http://schemas.openxmlformats.org/drawingml/2006/main">
               <a:ext uri="{FF2B5EF4-FFF2-40B4-BE49-F238E27FC236}">
-                <a16:creationId xmlns:a16="http://schemas.microsoft.com/office/drawing/2014/main" id="{4B38A090-87B4-42A6-A47D-F539E2A3C338}"/>
+                <a16:creationId xmlns:a16="http://schemas.microsoft.com/office/drawing/2014/main" id="{F0BA68B9-1E44-4189-8F78-F175D56AE2A3}"/>
               </a:ext>
             </a:extLst>
           </p:cNvPr>
@@ -2581,7 +4283,7 @@
           <p:cNvPr id="7" name="takeaway-1">
             <a:extLst xmlns:a="http://schemas.openxmlformats.org/drawingml/2006/main">
               <a:ext uri="{FF2B5EF4-FFF2-40B4-BE49-F238E27FC236}">
-                <a16:creationId xmlns:a16="http://schemas.microsoft.com/office/drawing/2014/main" id="{CF0D50E0-3E14-48D9-9E2A-D13C1D64D030}"/>
+                <a16:creationId xmlns:a16="http://schemas.microsoft.com/office/drawing/2014/main" id="{8112C4BA-8610-49DE-87BF-3333F0646C9E}"/>
               </a:ext>
             </a:extLst>
           </p:cNvPr>
@@ -2639,7 +4341,7 @@
           <p:cNvPr id="8" name="takeaway-number-2">
             <a:extLst xmlns:a="http://schemas.openxmlformats.org/drawingml/2006/main">
               <a:ext uri="{FF2B5EF4-FFF2-40B4-BE49-F238E27FC236}">
-                <a16:creationId xmlns:a16="http://schemas.microsoft.com/office/drawing/2014/main" id="{2D09659F-F415-467A-8AE8-4F18AF038DB9}"/>
+                <a16:creationId xmlns:a16="http://schemas.microsoft.com/office/drawing/2014/main" id="{53C2DB9D-70B9-40B3-B063-BF09B02E6F0B}"/>
               </a:ext>
             </a:extLst>
           </p:cNvPr>
@@ -2697,7 +4399,7 @@
           <p:cNvPr id="9" name="takeaway-2">
             <a:extLst xmlns:a="http://schemas.openxmlformats.org/drawingml/2006/main">
               <a:ext uri="{FF2B5EF4-FFF2-40B4-BE49-F238E27FC236}">
-                <a16:creationId xmlns:a16="http://schemas.microsoft.com/office/drawing/2014/main" id="{4225F5FE-B561-45B7-9DFE-F74E818125D8}"/>
+                <a16:creationId xmlns:a16="http://schemas.microsoft.com/office/drawing/2014/main" id="{9D7A899B-9D73-491F-B156-6FDF4D834AFC}"/>
               </a:ext>
             </a:extLst>
           </p:cNvPr>
@@ -2755,7 +4457,7 @@
           <p:cNvPr id="10" name="takeaway-number-3">
             <a:extLst xmlns:a="http://schemas.openxmlformats.org/drawingml/2006/main">
               <a:ext uri="{FF2B5EF4-FFF2-40B4-BE49-F238E27FC236}">
-                <a16:creationId xmlns:a16="http://schemas.microsoft.com/office/drawing/2014/main" id="{3C1C92C0-8895-48C7-99F5-95EBF8975823}"/>
+                <a16:creationId xmlns:a16="http://schemas.microsoft.com/office/drawing/2014/main" id="{1995D6C3-7BC1-4800-8D0A-37EDBF268C21}"/>
               </a:ext>
             </a:extLst>
           </p:cNvPr>
@@ -2813,7 +4515,7 @@
           <p:cNvPr id="11" name="takeaway-3">
             <a:extLst xmlns:a="http://schemas.openxmlformats.org/drawingml/2006/main">
               <a:ext uri="{FF2B5EF4-FFF2-40B4-BE49-F238E27FC236}">
-                <a16:creationId xmlns:a16="http://schemas.microsoft.com/office/drawing/2014/main" id="{9C517B0E-F8FE-46BA-A60A-90C96A8C15CF}"/>
+                <a16:creationId xmlns:a16="http://schemas.microsoft.com/office/drawing/2014/main" id="{4F106137-A6B2-4F53-9B10-842736D0FDDB}"/>
               </a:ext>
             </a:extLst>
           </p:cNvPr>
@@ -2871,7 +4573,7 @@
           <p:cNvPr id="12" name="takeaway-number-4">
             <a:extLst xmlns:a="http://schemas.openxmlformats.org/drawingml/2006/main">
               <a:ext uri="{FF2B5EF4-FFF2-40B4-BE49-F238E27FC236}">
-                <a16:creationId xmlns:a16="http://schemas.microsoft.com/office/drawing/2014/main" id="{AD315EBF-5A5E-4487-9C46-C210EBC8392F}"/>
+                <a16:creationId xmlns:a16="http://schemas.microsoft.com/office/drawing/2014/main" id="{FA0C4EB8-159F-4743-A8B3-D24F36294AC9}"/>
               </a:ext>
             </a:extLst>
           </p:cNvPr>
@@ -2929,7 +4631,7 @@
           <p:cNvPr id="13" name="takeaway-4">
             <a:extLst xmlns:a="http://schemas.openxmlformats.org/drawingml/2006/main">
               <a:ext uri="{FF2B5EF4-FFF2-40B4-BE49-F238E27FC236}">
-                <a16:creationId xmlns:a16="http://schemas.microsoft.com/office/drawing/2014/main" id="{70C36E20-405A-46E3-8B8C-A4F3D8AB3A43}"/>
+                <a16:creationId xmlns:a16="http://schemas.microsoft.com/office/drawing/2014/main" id="{6110CCD5-D5E0-4EF8-BFA0-CA5995E5A45E}"/>
               </a:ext>
             </a:extLst>
           </p:cNvPr>
@@ -2985,7 +4687,556 @@
     </p:spTree>
     <p:extLst>
       <p:ext uri="{BB962C8B-B14F-4D97-AF65-F5344CB8AC3E}">
-        <p14:creationId xmlns:p14="http://schemas.microsoft.com/office/powerpoint/2010/main" val="1587966422"/>
+        <p14:creationId xmlns:p14="http://schemas.microsoft.com/office/powerpoint/2010/main" val="1371878931"/>
+      </p:ext>
+    </p:extLst>
+  </p:cSld>
+</p:sld>
+</file>
+
+<file path=ppt/slides/slide12.xml><?xml version="1.0" encoding="utf-8"?>
+<p:sld xmlns:p="http://schemas.openxmlformats.org/presentationml/2006/main">
+  <p:cSld>
+    <p:bg>
+      <p:bgPr>
+        <a:solidFill xmlns:a="http://schemas.openxmlformats.org/drawingml/2006/main">
+          <a:srgbClr val="FFFFFF"/>
+        </a:solidFill>
+      </p:bgPr>
+    </p:bg>
+    <p:spTree>
+      <p:nvGrpSpPr>
+        <p:cNvPr id="1" name=""/>
+        <p:cNvGrpSpPr/>
+        <p:nvPr/>
+      </p:nvGrpSpPr>
+      <p:grpSpPr>
+        <a:xfrm xmlns:a="http://schemas.openxmlformats.org/drawingml/2006/main"/>
+      </p:grpSpPr>
+      <p:sp>
+        <p:nvSpPr>
+          <p:cNvPr id="10" name="accent-line">
+            <a:extLst xmlns:a="http://schemas.openxmlformats.org/drawingml/2006/main">
+              <a:ext uri="{FF2B5EF4-FFF2-40B4-BE49-F238E27FC236}">
+                <a16:creationId xmlns:a16="http://schemas.microsoft.com/office/drawing/2014/main" id="{E80C254D-66DD-4C55-BA2B-06B37BA4BE1F}"/>
+              </a:ext>
+            </a:extLst>
+          </p:cNvPr>
+          <p:cNvSpPr>
+            <a:spLocks xmlns:a="http://schemas.openxmlformats.org/drawingml/2006/main" noGrp="1"/>
+          </p:cNvSpPr>
+          <p:nvPr/>
+        </p:nvSpPr>
+        <p:spPr>
+          <a:xfrm xmlns:a="http://schemas.openxmlformats.org/drawingml/2006/main">
+            <a:off x="390525" y="304800"/>
+            <a:ext cx="11410950" cy="66675"/>
+          </a:xfrm>
+          <a:prstGeom xmlns:a="http://schemas.openxmlformats.org/drawingml/2006/main" prst="rect">
+            <a:avLst/>
+          </a:prstGeom>
+          <a:solidFill xmlns:a="http://schemas.openxmlformats.org/drawingml/2006/main">
+            <a:srgbClr val="73C8FF"/>
+          </a:solidFill>
+          <a:ln xmlns:a="http://schemas.openxmlformats.org/drawingml/2006/main" w="0">
+            <a:solidFill>
+              <a:srgbClr val="73C8FF"/>
+            </a:solidFill>
+            <a:prstDash val="solid"/>
+          </a:ln>
+        </p:spPr>
+      </p:sp>
+      <p:sp>
+        <p:nvSpPr>
+          <p:cNvPr id="2" name="chapter-label">
+            <a:extLst xmlns:a="http://schemas.openxmlformats.org/drawingml/2006/main">
+              <a:ext uri="{FF2B5EF4-FFF2-40B4-BE49-F238E27FC236}">
+                <a16:creationId xmlns:a16="http://schemas.microsoft.com/office/drawing/2014/main" id="{83FF40FC-3DBE-4AEA-8003-6133DE952EBF}"/>
+              </a:ext>
+            </a:extLst>
+          </p:cNvPr>
+          <p:cNvSpPr>
+            <a:spLocks xmlns:a="http://schemas.openxmlformats.org/drawingml/2006/main" noGrp="1"/>
+          </p:cNvSpPr>
+          <p:nvPr/>
+        </p:nvSpPr>
+        <p:spPr>
+          <a:xfrm xmlns:a="http://schemas.openxmlformats.org/drawingml/2006/main">
+            <a:off x="390525" y="466725"/>
+            <a:ext cx="4953000" cy="323850"/>
+          </a:xfrm>
+          <a:prstGeom xmlns:a="http://schemas.openxmlformats.org/drawingml/2006/main" prst="rect">
+            <a:avLst/>
+          </a:prstGeom>
+          <a:noFill xmlns:a="http://schemas.openxmlformats.org/drawingml/2006/main"/>
+          <a:ln xmlns:a="http://schemas.openxmlformats.org/drawingml/2006/main" w="0">
+            <a:noFill/>
+            <a:prstDash val="solid"/>
+          </a:ln>
+        </p:spPr>
+        <p:txBody>
+          <a:bodyPr xmlns:a="http://schemas.openxmlformats.org/drawingml/2006/main" anchor="t">
+            <a:noAutofit/>
+          </a:bodyPr>
+          <a:lstStyle xmlns:a="http://schemas.openxmlformats.org/drawingml/2006/main"/>
+          <a:p xmlns:a="http://schemas.openxmlformats.org/drawingml/2006/main">
+            <a:pPr algn="l">
+              <a:defRPr sz="1275" b="1">
+                <a:solidFill>
+                  <a:srgbClr val="5B5B57"/>
+                </a:solidFill>
+                <a:latin typeface="Helvetica Neue"/>
+                <a:ea typeface="Helvetica Neue"/>
+                <a:cs typeface="Helvetica Neue"/>
+              </a:defRPr>
+            </a:pPr>
+            <a:r>
+              <a:rPr sz="1275" b="1">
+                <a:solidFill>
+                  <a:srgbClr val="5B5B57"/>
+                </a:solidFill>
+                <a:latin typeface="Helvetica Neue"/>
+                <a:ea typeface="Helvetica Neue"/>
+                <a:cs typeface="Helvetica Neue"/>
+              </a:rPr>
+              <a:t>PRACTICE AND READING  /  07</a:t>
+            </a:r>
+          </a:p>
+        </p:txBody>
+      </p:sp>
+      <p:sp>
+        <p:nvSpPr>
+          <p:cNvPr id="3" name="slide-number">
+            <a:extLst xmlns:a="http://schemas.openxmlformats.org/drawingml/2006/main">
+              <a:ext uri="{FF2B5EF4-FFF2-40B4-BE49-F238E27FC236}">
+                <a16:creationId xmlns:a16="http://schemas.microsoft.com/office/drawing/2014/main" id="{C47D6B5E-627E-47F7-B9B1-6BB52300EA52}"/>
+              </a:ext>
+            </a:extLst>
+          </p:cNvPr>
+          <p:cNvSpPr>
+            <a:spLocks xmlns:a="http://schemas.openxmlformats.org/drawingml/2006/main" noGrp="1"/>
+          </p:cNvSpPr>
+          <p:nvPr/>
+        </p:nvSpPr>
+        <p:spPr>
+          <a:xfrm xmlns:a="http://schemas.openxmlformats.org/drawingml/2006/main">
+            <a:off x="11049000" y="6286500"/>
+            <a:ext cx="742950" cy="266700"/>
+          </a:xfrm>
+          <a:prstGeom xmlns:a="http://schemas.openxmlformats.org/drawingml/2006/main" prst="rect">
+            <a:avLst/>
+          </a:prstGeom>
+          <a:noFill xmlns:a="http://schemas.openxmlformats.org/drawingml/2006/main"/>
+          <a:ln xmlns:a="http://schemas.openxmlformats.org/drawingml/2006/main" w="0">
+            <a:noFill/>
+            <a:prstDash val="solid"/>
+          </a:ln>
+        </p:spPr>
+        <p:txBody>
+          <a:bodyPr xmlns:a="http://schemas.openxmlformats.org/drawingml/2006/main" anchor="t">
+            <a:noAutofit/>
+          </a:bodyPr>
+          <a:lstStyle xmlns:a="http://schemas.openxmlformats.org/drawingml/2006/main"/>
+          <a:p xmlns:a="http://schemas.openxmlformats.org/drawingml/2006/main">
+            <a:pPr algn="r">
+              <a:defRPr sz="1200" b="0">
+                <a:solidFill>
+                  <a:srgbClr val="5B5B57"/>
+                </a:solidFill>
+                <a:latin typeface="Helvetica Neue"/>
+                <a:ea typeface="Helvetica Neue"/>
+                <a:cs typeface="Helvetica Neue"/>
+              </a:defRPr>
+            </a:pPr>
+            <a:r>
+              <a:rPr sz="1200" b="0">
+                <a:solidFill>
+                  <a:srgbClr val="5B5B57"/>
+                </a:solidFill>
+                <a:latin typeface="Helvetica Neue"/>
+                <a:ea typeface="Helvetica Neue"/>
+                <a:cs typeface="Helvetica Neue"/>
+              </a:rPr>
+              <a:t>12</a:t>
+            </a:r>
+          </a:p>
+        </p:txBody>
+      </p:sp>
+      <p:sp>
+        <p:nvSpPr>
+          <p:cNvPr id="4" name="chapter-footer">
+            <a:extLst xmlns:a="http://schemas.openxmlformats.org/drawingml/2006/main">
+              <a:ext uri="{FF2B5EF4-FFF2-40B4-BE49-F238E27FC236}">
+                <a16:creationId xmlns:a16="http://schemas.microsoft.com/office/drawing/2014/main" id="{B1FAEBE2-01B7-4F18-9CCA-CFACAFCD1231}"/>
+              </a:ext>
+            </a:extLst>
+          </p:cNvPr>
+          <p:cNvSpPr>
+            <a:spLocks xmlns:a="http://schemas.openxmlformats.org/drawingml/2006/main" noGrp="1"/>
+          </p:cNvSpPr>
+          <p:nvPr/>
+        </p:nvSpPr>
+        <p:spPr>
+          <a:xfrm xmlns:a="http://schemas.openxmlformats.org/drawingml/2006/main">
+            <a:off x="390525" y="6286500"/>
+            <a:ext cx="8191500" cy="266700"/>
+          </a:xfrm>
+          <a:prstGeom xmlns:a="http://schemas.openxmlformats.org/drawingml/2006/main" prst="rect">
+            <a:avLst/>
+          </a:prstGeom>
+          <a:noFill xmlns:a="http://schemas.openxmlformats.org/drawingml/2006/main"/>
+          <a:ln xmlns:a="http://schemas.openxmlformats.org/drawingml/2006/main" w="0">
+            <a:noFill/>
+            <a:prstDash val="solid"/>
+          </a:ln>
+        </p:spPr>
+        <p:txBody>
+          <a:bodyPr xmlns:a="http://schemas.openxmlformats.org/drawingml/2006/main" anchor="t">
+            <a:noAutofit/>
+          </a:bodyPr>
+          <a:lstStyle xmlns:a="http://schemas.openxmlformats.org/drawingml/2006/main"/>
+          <a:p xmlns:a="http://schemas.openxmlformats.org/drawingml/2006/main">
+            <a:pPr algn="l">
+              <a:defRPr sz="1125" b="0">
+                <a:solidFill>
+                  <a:srgbClr val="5B5B57"/>
+                </a:solidFill>
+                <a:latin typeface="Helvetica Neue"/>
+                <a:ea typeface="Helvetica Neue"/>
+                <a:cs typeface="Helvetica Neue"/>
+              </a:defRPr>
+            </a:pPr>
+            <a:r>
+              <a:rPr sz="1125" b="0">
+                <a:solidFill>
+                  <a:srgbClr val="5B5B57"/>
+                </a:solidFill>
+                <a:latin typeface="Helvetica Neue"/>
+                <a:ea typeface="Helvetica Neue"/>
+                <a:cs typeface="Helvetica Neue"/>
+              </a:rPr>
+              <a:t>Memory, State, and Context Engineering</a:t>
+            </a:r>
+          </a:p>
+        </p:txBody>
+      </p:sp>
+      <p:sp>
+        <p:nvSpPr>
+          <p:cNvPr id="5" name="practice-title">
+            <a:extLst xmlns:a="http://schemas.openxmlformats.org/drawingml/2006/main">
+              <a:ext uri="{FF2B5EF4-FFF2-40B4-BE49-F238E27FC236}">
+                <a16:creationId xmlns:a16="http://schemas.microsoft.com/office/drawing/2014/main" id="{4D714AE1-A6EA-4292-A1AA-9CF8CE64324B}"/>
+              </a:ext>
+            </a:extLst>
+          </p:cNvPr>
+          <p:cNvSpPr>
+            <a:spLocks xmlns:a="http://schemas.openxmlformats.org/drawingml/2006/main" noGrp="1"/>
+          </p:cNvSpPr>
+          <p:nvPr/>
+        </p:nvSpPr>
+        <p:spPr>
+          <a:xfrm xmlns:a="http://schemas.openxmlformats.org/drawingml/2006/main">
+            <a:off x="390525" y="1000125"/>
+            <a:ext cx="11144250" cy="666750"/>
+          </a:xfrm>
+          <a:prstGeom xmlns:a="http://schemas.openxmlformats.org/drawingml/2006/main" prst="rect">
+            <a:avLst/>
+          </a:prstGeom>
+          <a:noFill xmlns:a="http://schemas.openxmlformats.org/drawingml/2006/main"/>
+          <a:ln xmlns:a="http://schemas.openxmlformats.org/drawingml/2006/main" w="0">
+            <a:noFill/>
+            <a:prstDash val="solid"/>
+          </a:ln>
+        </p:spPr>
+        <p:txBody>
+          <a:bodyPr xmlns:a="http://schemas.openxmlformats.org/drawingml/2006/main" anchor="t">
+            <a:normAutofit fontScale="100000"/>
+          </a:bodyPr>
+          <a:lstStyle xmlns:a="http://schemas.openxmlformats.org/drawingml/2006/main"/>
+          <a:p xmlns:a="http://schemas.openxmlformats.org/drawingml/2006/main">
+            <a:pPr algn="l">
+              <a:defRPr sz="3000" b="1">
+                <a:solidFill>
+                  <a:srgbClr val="111111"/>
+                </a:solidFill>
+                <a:latin typeface="Helvetica Neue"/>
+                <a:ea typeface="Helvetica Neue"/>
+                <a:cs typeface="Helvetica Neue"/>
+              </a:defRPr>
+            </a:pPr>
+            <a:r>
+              <a:rPr sz="3000" b="1">
+                <a:solidFill>
+                  <a:srgbClr val="111111"/>
+                </a:solidFill>
+                <a:latin typeface="Helvetica Neue"/>
+                <a:ea typeface="Helvetica Neue"/>
+                <a:cs typeface="Helvetica Neue"/>
+              </a:rPr>
+              <a:t>Evidence to submit</a:t>
+            </a:r>
+          </a:p>
+        </p:txBody>
+      </p:sp>
+      <p:sp>
+        <p:nvSpPr>
+          <p:cNvPr id="6" name="practice-task">
+            <a:extLst xmlns:a="http://schemas.openxmlformats.org/drawingml/2006/main">
+              <a:ext uri="{FF2B5EF4-FFF2-40B4-BE49-F238E27FC236}">
+                <a16:creationId xmlns:a16="http://schemas.microsoft.com/office/drawing/2014/main" id="{9DCC2A95-C9F0-4AA7-A445-41F13FD2273E}"/>
+              </a:ext>
+            </a:extLst>
+          </p:cNvPr>
+          <p:cNvSpPr>
+            <a:spLocks xmlns:a="http://schemas.openxmlformats.org/drawingml/2006/main" noGrp="1"/>
+          </p:cNvSpPr>
+          <p:nvPr/>
+        </p:nvSpPr>
+        <p:spPr>
+          <a:xfrm xmlns:a="http://schemas.openxmlformats.org/drawingml/2006/main">
+            <a:off x="390525" y="2000250"/>
+            <a:ext cx="10953750" cy="1238250"/>
+          </a:xfrm>
+          <a:prstGeom xmlns:a="http://schemas.openxmlformats.org/drawingml/2006/main" prst="rect">
+            <a:avLst/>
+          </a:prstGeom>
+          <a:noFill xmlns:a="http://schemas.openxmlformats.org/drawingml/2006/main"/>
+          <a:ln xmlns:a="http://schemas.openxmlformats.org/drawingml/2006/main" w="0">
+            <a:noFill/>
+            <a:prstDash val="solid"/>
+          </a:ln>
+        </p:spPr>
+        <p:txBody>
+          <a:bodyPr xmlns:a="http://schemas.openxmlformats.org/drawingml/2006/main" anchor="t">
+            <a:normAutofit fontScale="100000"/>
+          </a:bodyPr>
+          <a:lstStyle xmlns:a="http://schemas.openxmlformats.org/drawingml/2006/main"/>
+          <a:p xmlns:a="http://schemas.openxmlformats.org/drawingml/2006/main">
+            <a:pPr algn="l">
+              <a:defRPr sz="1950" b="0">
+                <a:solidFill>
+                  <a:srgbClr val="111111"/>
+                </a:solidFill>
+                <a:latin typeface="Helvetica Neue"/>
+                <a:ea typeface="Helvetica Neue"/>
+                <a:cs typeface="Helvetica Neue"/>
+              </a:defRPr>
+            </a:pPr>
+            <a:r>
+              <a:rPr sz="1950" b="0">
+                <a:solidFill>
+                  <a:srgbClr val="111111"/>
+                </a:solidFill>
+                <a:latin typeface="Helvetica Neue"/>
+                <a:ea typeface="Helvetica Neue"/>
+                <a:cs typeface="Helvetica Neue"/>
+              </a:rPr>
+              <a:t>Complete Lab 8's checkpoint test. As an extension, compare a fixed recent-history window with a structured task summary on the same lookup tasks.</a:t>
+            </a:r>
+          </a:p>
+        </p:txBody>
+      </p:sp>
+      <p:sp>
+        <p:nvSpPr>
+          <p:cNvPr id="7" name="practice-check">
+            <a:extLst xmlns:a="http://schemas.openxmlformats.org/drawingml/2006/main">
+              <a:ext uri="{FF2B5EF4-FFF2-40B4-BE49-F238E27FC236}">
+                <a16:creationId xmlns:a16="http://schemas.microsoft.com/office/drawing/2014/main" id="{0592157A-A16D-4D65-95E3-97BD498DC668}"/>
+              </a:ext>
+            </a:extLst>
+          </p:cNvPr>
+          <p:cNvSpPr>
+            <a:spLocks xmlns:a="http://schemas.openxmlformats.org/drawingml/2006/main" noGrp="1"/>
+          </p:cNvSpPr>
+          <p:nvPr/>
+        </p:nvSpPr>
+        <p:spPr>
+          <a:xfrm xmlns:a="http://schemas.openxmlformats.org/drawingml/2006/main">
+            <a:off x="390525" y="3381375"/>
+            <a:ext cx="10953750" cy="1095375"/>
+          </a:xfrm>
+          <a:prstGeom xmlns:a="http://schemas.openxmlformats.org/drawingml/2006/main" prst="rect">
+            <a:avLst/>
+          </a:prstGeom>
+          <a:noFill xmlns:a="http://schemas.openxmlformats.org/drawingml/2006/main"/>
+          <a:ln xmlns:a="http://schemas.openxmlformats.org/drawingml/2006/main" w="0">
+            <a:noFill/>
+            <a:prstDash val="solid"/>
+          </a:ln>
+        </p:spPr>
+        <p:txBody>
+          <a:bodyPr xmlns:a="http://schemas.openxmlformats.org/drawingml/2006/main" anchor="t">
+            <a:normAutofit fontScale="100000"/>
+          </a:bodyPr>
+          <a:lstStyle xmlns:a="http://schemas.openxmlformats.org/drawingml/2006/main"/>
+          <a:p xmlns:a="http://schemas.openxmlformats.org/drawingml/2006/main">
+            <a:pPr algn="l">
+              <a:defRPr sz="1800" b="0">
+                <a:solidFill>
+                  <a:srgbClr val="5B5B57"/>
+                </a:solidFill>
+                <a:latin typeface="Helvetica Neue"/>
+                <a:ea typeface="Helvetica Neue"/>
+                <a:cs typeface="Helvetica Neue"/>
+              </a:defRPr>
+            </a:pPr>
+            <a:r>
+              <a:rPr sz="1800" b="0">
+                <a:solidFill>
+                  <a:srgbClr val="5B5B57"/>
+                </a:solidFill>
+                <a:latin typeface="Helvetica Neue"/>
+                <a:ea typeface="Helvetica Neue"/>
+                <a:cs typeface="Helvetica Neue"/>
+              </a:rPr>
+              <a:t>Show the pending state before resume and one committed effect after a retry. Do not generalize a context-policy result across providers.</a:t>
+            </a:r>
+          </a:p>
+        </p:txBody>
+      </p:sp>
+      <p:sp>
+        <p:nvSpPr>
+          <p:cNvPr id="8" name="practice-readings">
+            <a:extLst xmlns:a="http://schemas.openxmlformats.org/drawingml/2006/main">
+              <a:ext uri="{FF2B5EF4-FFF2-40B4-BE49-F238E27FC236}">
+                <a16:creationId xmlns:a16="http://schemas.microsoft.com/office/drawing/2014/main" id="{94E908C5-ED28-4DC3-AA2F-91D430529D24}"/>
+              </a:ext>
+            </a:extLst>
+          </p:cNvPr>
+          <p:cNvSpPr>
+            <a:spLocks xmlns:a="http://schemas.openxmlformats.org/drawingml/2006/main" noGrp="1"/>
+          </p:cNvSpPr>
+          <p:nvPr/>
+        </p:nvSpPr>
+        <p:spPr>
+          <a:xfrm xmlns:a="http://schemas.openxmlformats.org/drawingml/2006/main">
+            <a:off x="390525" y="4667250"/>
+            <a:ext cx="10953750" cy="1000125"/>
+          </a:xfrm>
+          <a:prstGeom xmlns:a="http://schemas.openxmlformats.org/drawingml/2006/main" prst="rect">
+            <a:avLst/>
+          </a:prstGeom>
+          <a:noFill xmlns:a="http://schemas.openxmlformats.org/drawingml/2006/main"/>
+          <a:ln xmlns:a="http://schemas.openxmlformats.org/drawingml/2006/main" w="0">
+            <a:noFill/>
+            <a:prstDash val="solid"/>
+          </a:ln>
+        </p:spPr>
+        <p:txBody>
+          <a:bodyPr xmlns:a="http://schemas.openxmlformats.org/drawingml/2006/main" anchor="t">
+            <a:normAutofit fontScale="100000"/>
+          </a:bodyPr>
+          <a:lstStyle xmlns:a="http://schemas.openxmlformats.org/drawingml/2006/main"/>
+          <a:p xmlns:a="http://schemas.openxmlformats.org/drawingml/2006/main">
+            <a:pPr algn="l">
+              <a:defRPr sz="1425" b="0">
+                <a:solidFill>
+                  <a:srgbClr val="111111"/>
+                </a:solidFill>
+                <a:latin typeface="Helvetica Neue"/>
+                <a:ea typeface="Helvetica Neue"/>
+                <a:cs typeface="Helvetica Neue"/>
+              </a:defRPr>
+            </a:pPr>
+            <a:r>
+              <a:rPr sz="1425" b="0">
+                <a:solidFill>
+                  <a:srgbClr val="111111"/>
+                </a:solidFill>
+                <a:latin typeface="Helvetica Neue"/>
+                <a:ea typeface="Helvetica Neue"/>
+                <a:cs typeface="Helvetica Neue"/>
+              </a:rPr>
+              <a:t>S3  LangGraph interrupts</a:t>
+            </a:r>
+          </a:p>
+          <a:p xmlns:a="http://schemas.openxmlformats.org/drawingml/2006/main">
+            <a:pPr algn="l">
+              <a:defRPr sz="1425" b="0">
+                <a:solidFill>
+                  <a:srgbClr val="111111"/>
+                </a:solidFill>
+                <a:latin typeface="Helvetica Neue"/>
+                <a:ea typeface="Helvetica Neue"/>
+                <a:cs typeface="Helvetica Neue"/>
+              </a:defRPr>
+            </a:pPr>
+            <a:r>
+              <a:rPr sz="1425" b="0">
+                <a:solidFill>
+                  <a:srgbClr val="111111"/>
+                </a:solidFill>
+                <a:latin typeface="Helvetica Neue"/>
+                <a:ea typeface="Helvetica Neue"/>
+                <a:cs typeface="Helvetica Neue"/>
+              </a:rPr>
+              <a:t>R2  How enabling two settings tripled our scores on the ARC-AGI-3 benchmark</a:t>
+            </a:r>
+          </a:p>
+        </p:txBody>
+      </p:sp>
+      <p:sp>
+        <p:nvSpPr>
+          <p:cNvPr id="9" name="practice-lab">
+            <a:extLst xmlns:a="http://schemas.openxmlformats.org/drawingml/2006/main">
+              <a:ext uri="{FF2B5EF4-FFF2-40B4-BE49-F238E27FC236}">
+                <a16:creationId xmlns:a16="http://schemas.microsoft.com/office/drawing/2014/main" id="{F9C80970-D1C4-4412-93F8-F249F0502953}"/>
+              </a:ext>
+            </a:extLst>
+          </p:cNvPr>
+          <p:cNvSpPr>
+            <a:spLocks xmlns:a="http://schemas.openxmlformats.org/drawingml/2006/main" noGrp="1"/>
+          </p:cNvSpPr>
+          <p:nvPr/>
+        </p:nvSpPr>
+        <p:spPr>
+          <a:xfrm xmlns:a="http://schemas.openxmlformats.org/drawingml/2006/main">
+            <a:off x="390525" y="5857875"/>
+            <a:ext cx="10953750" cy="266700"/>
+          </a:xfrm>
+          <a:prstGeom xmlns:a="http://schemas.openxmlformats.org/drawingml/2006/main" prst="rect">
+            <a:avLst/>
+          </a:prstGeom>
+          <a:noFill xmlns:a="http://schemas.openxmlformats.org/drawingml/2006/main"/>
+          <a:ln xmlns:a="http://schemas.openxmlformats.org/drawingml/2006/main" w="0">
+            <a:noFill/>
+            <a:prstDash val="solid"/>
+          </a:ln>
+        </p:spPr>
+        <p:txBody>
+          <a:bodyPr xmlns:a="http://schemas.openxmlformats.org/drawingml/2006/main" anchor="t">
+            <a:normAutofit fontScale="90196"/>
+          </a:bodyPr>
+          <a:lstStyle xmlns:a="http://schemas.openxmlformats.org/drawingml/2006/main"/>
+          <a:p xmlns:a="http://schemas.openxmlformats.org/drawingml/2006/main">
+            <a:pPr algn="l">
+              <a:defRPr sz="1275" b="0">
+                <a:solidFill>
+                  <a:srgbClr val="5B5B57"/>
+                </a:solidFill>
+                <a:latin typeface="Helvetica Neue"/>
+                <a:ea typeface="Helvetica Neue"/>
+                <a:cs typeface="Helvetica Neue"/>
+              </a:defRPr>
+            </a:pPr>
+            <a:r>
+              <a:rPr sz="1275" b="0">
+                <a:solidFill>
+                  <a:srgbClr val="5B5B57"/>
+                </a:solidFill>
+                <a:latin typeface="Helvetica Neue"/>
+                <a:ea typeface="Helvetica Neue"/>
+                <a:cs typeface="Helvetica Neue"/>
+              </a:rPr>
+              <a:t>labs/08_langgraph_approval_security.ipynb</a:t>
+            </a:r>
+          </a:p>
+        </p:txBody>
+      </p:sp>
+    </p:spTree>
+    <p:extLst>
+      <p:ext uri="{BB962C8B-B14F-4D97-AF65-F5344CB8AC3E}">
+        <p14:creationId xmlns:p14="http://schemas.microsoft.com/office/powerpoint/2010/main" val="99264998"/>
       </p:ext>
     </p:extLst>
   </p:cSld>
@@ -3016,7 +5267,7 @@
           <p:cNvPr id="14" name="accent-line">
             <a:extLst xmlns:a="http://schemas.openxmlformats.org/drawingml/2006/main">
               <a:ext uri="{FF2B5EF4-FFF2-40B4-BE49-F238E27FC236}">
-                <a16:creationId xmlns:a16="http://schemas.microsoft.com/office/drawing/2014/main" id="{5C1E9E9B-96FC-4BBD-A2DC-477F05049923}"/>
+                <a16:creationId xmlns:a16="http://schemas.microsoft.com/office/drawing/2014/main" id="{9D335CA9-74F5-4F80-B05D-87B83285A85C}"/>
               </a:ext>
             </a:extLst>
           </p:cNvPr>
@@ -3049,7 +5300,7 @@
           <p:cNvPr id="2" name="chapter-label">
             <a:extLst xmlns:a="http://schemas.openxmlformats.org/drawingml/2006/main">
               <a:ext uri="{FF2B5EF4-FFF2-40B4-BE49-F238E27FC236}">
-                <a16:creationId xmlns:a16="http://schemas.microsoft.com/office/drawing/2014/main" id="{0F383B73-0611-4C70-A2A4-D3B131434EBF}"/>
+                <a16:creationId xmlns:a16="http://schemas.microsoft.com/office/drawing/2014/main" id="{42B33199-6117-418E-A70F-A43D7855CEE0}"/>
               </a:ext>
             </a:extLst>
           </p:cNvPr>
@@ -3107,7 +5358,7 @@
           <p:cNvPr id="3" name="slide-number">
             <a:extLst xmlns:a="http://schemas.openxmlformats.org/drawingml/2006/main">
               <a:ext uri="{FF2B5EF4-FFF2-40B4-BE49-F238E27FC236}">
-                <a16:creationId xmlns:a16="http://schemas.microsoft.com/office/drawing/2014/main" id="{5CD17101-C34C-4F63-9E81-B44A63EF8EC1}"/>
+                <a16:creationId xmlns:a16="http://schemas.microsoft.com/office/drawing/2014/main" id="{6CB6F14B-D762-4173-A6F9-9A04C17F2CF3}"/>
               </a:ext>
             </a:extLst>
           </p:cNvPr>
@@ -3165,7 +5416,7 @@
           <p:cNvPr id="4" name="chapter-footer">
             <a:extLst xmlns:a="http://schemas.openxmlformats.org/drawingml/2006/main">
               <a:ext uri="{FF2B5EF4-FFF2-40B4-BE49-F238E27FC236}">
-                <a16:creationId xmlns:a16="http://schemas.microsoft.com/office/drawing/2014/main" id="{B0C47C65-DCDA-4902-A723-1DD0E63493B5}"/>
+                <a16:creationId xmlns:a16="http://schemas.microsoft.com/office/drawing/2014/main" id="{2D906268-49D6-4BA9-86D7-7E75CE28104D}"/>
               </a:ext>
             </a:extLst>
           </p:cNvPr>
@@ -3223,7 +5474,7 @@
           <p:cNvPr id="5" name="objectives-title">
             <a:extLst xmlns:a="http://schemas.openxmlformats.org/drawingml/2006/main">
               <a:ext uri="{FF2B5EF4-FFF2-40B4-BE49-F238E27FC236}">
-                <a16:creationId xmlns:a16="http://schemas.microsoft.com/office/drawing/2014/main" id="{0261C11C-0DA8-4644-95F6-1BD8B2EDF64C}"/>
+                <a16:creationId xmlns:a16="http://schemas.microsoft.com/office/drawing/2014/main" id="{5534BD19-4371-40A7-8C15-034AEAD13E2A}"/>
               </a:ext>
             </a:extLst>
           </p:cNvPr>
@@ -3281,7 +5532,7 @@
           <p:cNvPr id="6" name="objective-number-1">
             <a:extLst xmlns:a="http://schemas.openxmlformats.org/drawingml/2006/main">
               <a:ext uri="{FF2B5EF4-FFF2-40B4-BE49-F238E27FC236}">
-                <a16:creationId xmlns:a16="http://schemas.microsoft.com/office/drawing/2014/main" id="{16B36D7E-E056-4A22-BA12-EEB8385B988B}"/>
+                <a16:creationId xmlns:a16="http://schemas.microsoft.com/office/drawing/2014/main" id="{DF05C5A3-8EC0-4BC2-972E-22965AF3B45C}"/>
               </a:ext>
             </a:extLst>
           </p:cNvPr>
@@ -3339,7 +5590,7 @@
           <p:cNvPr id="7" name="objective-1">
             <a:extLst xmlns:a="http://schemas.openxmlformats.org/drawingml/2006/main">
               <a:ext uri="{FF2B5EF4-FFF2-40B4-BE49-F238E27FC236}">
-                <a16:creationId xmlns:a16="http://schemas.microsoft.com/office/drawing/2014/main" id="{EDB58DB2-F1EE-47ED-9E13-90EB1D5C0A55}"/>
+                <a16:creationId xmlns:a16="http://schemas.microsoft.com/office/drawing/2014/main" id="{B1577DA8-120A-43EB-B62E-CBBB8B068E82}"/>
               </a:ext>
             </a:extLst>
           </p:cNvPr>
@@ -3397,7 +5648,7 @@
           <p:cNvPr id="8" name="objective-number-2">
             <a:extLst xmlns:a="http://schemas.openxmlformats.org/drawingml/2006/main">
               <a:ext uri="{FF2B5EF4-FFF2-40B4-BE49-F238E27FC236}">
-                <a16:creationId xmlns:a16="http://schemas.microsoft.com/office/drawing/2014/main" id="{8B55802E-3322-44DD-9837-A45F6B2CD50D}"/>
+                <a16:creationId xmlns:a16="http://schemas.microsoft.com/office/drawing/2014/main" id="{BCBFE3FC-298B-4DD5-870E-B7F5BF1A0974}"/>
               </a:ext>
             </a:extLst>
           </p:cNvPr>
@@ -3455,7 +5706,7 @@
           <p:cNvPr id="9" name="objective-2">
             <a:extLst xmlns:a="http://schemas.openxmlformats.org/drawingml/2006/main">
               <a:ext uri="{FF2B5EF4-FFF2-40B4-BE49-F238E27FC236}">
-                <a16:creationId xmlns:a16="http://schemas.microsoft.com/office/drawing/2014/main" id="{B6E21630-87DB-4311-848A-A27B1BE135D6}"/>
+                <a16:creationId xmlns:a16="http://schemas.microsoft.com/office/drawing/2014/main" id="{F8E5DAFB-7266-4EC6-A7E6-D3096D326B89}"/>
               </a:ext>
             </a:extLst>
           </p:cNvPr>
@@ -3513,7 +5764,7 @@
           <p:cNvPr id="10" name="objective-number-3">
             <a:extLst xmlns:a="http://schemas.openxmlformats.org/drawingml/2006/main">
               <a:ext uri="{FF2B5EF4-FFF2-40B4-BE49-F238E27FC236}">
-                <a16:creationId xmlns:a16="http://schemas.microsoft.com/office/drawing/2014/main" id="{0FDEEEC8-0736-4085-8E99-4E757CE07748}"/>
+                <a16:creationId xmlns:a16="http://schemas.microsoft.com/office/drawing/2014/main" id="{CB4373BD-075D-4D52-92E0-87AE9FC7E369}"/>
               </a:ext>
             </a:extLst>
           </p:cNvPr>
@@ -3571,7 +5822,7 @@
           <p:cNvPr id="11" name="objective-3">
             <a:extLst xmlns:a="http://schemas.openxmlformats.org/drawingml/2006/main">
               <a:ext uri="{FF2B5EF4-FFF2-40B4-BE49-F238E27FC236}">
-                <a16:creationId xmlns:a16="http://schemas.microsoft.com/office/drawing/2014/main" id="{EF87A06F-481B-4D4A-8248-2E7B74EA848A}"/>
+                <a16:creationId xmlns:a16="http://schemas.microsoft.com/office/drawing/2014/main" id="{97E2A7F6-BF98-4068-BDD2-A2F8028E00A3}"/>
               </a:ext>
             </a:extLst>
           </p:cNvPr>
@@ -3629,7 +5880,7 @@
           <p:cNvPr id="12" name="objective-number-4">
             <a:extLst xmlns:a="http://schemas.openxmlformats.org/drawingml/2006/main">
               <a:ext uri="{FF2B5EF4-FFF2-40B4-BE49-F238E27FC236}">
-                <a16:creationId xmlns:a16="http://schemas.microsoft.com/office/drawing/2014/main" id="{A39A5129-5FA2-4ADF-AA48-9D2198DACCE7}"/>
+                <a16:creationId xmlns:a16="http://schemas.microsoft.com/office/drawing/2014/main" id="{9657AC3B-E67F-4B1D-A4AA-A7ABA9026E60}"/>
               </a:ext>
             </a:extLst>
           </p:cNvPr>
@@ -3687,7 +5938,7 @@
           <p:cNvPr id="13" name="objective-4">
             <a:extLst xmlns:a="http://schemas.openxmlformats.org/drawingml/2006/main">
               <a:ext uri="{FF2B5EF4-FFF2-40B4-BE49-F238E27FC236}">
-                <a16:creationId xmlns:a16="http://schemas.microsoft.com/office/drawing/2014/main" id="{9F689971-32FE-468D-A4E5-5DEBD092D0FD}"/>
+                <a16:creationId xmlns:a16="http://schemas.microsoft.com/office/drawing/2014/main" id="{0D054CAF-955D-49DA-9F65-A4E7AB42BF3B}"/>
               </a:ext>
             </a:extLst>
           </p:cNvPr>
@@ -3743,7 +5994,7 @@
     </p:spTree>
     <p:extLst>
       <p:ext uri="{BB962C8B-B14F-4D97-AF65-F5344CB8AC3E}">
-        <p14:creationId xmlns:p14="http://schemas.microsoft.com/office/powerpoint/2010/main" val="527171152"/>
+        <p14:creationId xmlns:p14="http://schemas.microsoft.com/office/powerpoint/2010/main" val="548637311"/>
       </p:ext>
     </p:extLst>
   </p:cSld>
@@ -3774,7 +6025,7 @@
           <p:cNvPr id="9" name="accent-line">
             <a:extLst xmlns:a="http://schemas.openxmlformats.org/drawingml/2006/main">
               <a:ext uri="{FF2B5EF4-FFF2-40B4-BE49-F238E27FC236}">
-                <a16:creationId xmlns:a16="http://schemas.microsoft.com/office/drawing/2014/main" id="{35E8DAB7-D6B4-4911-ABFF-85096149EBA1}"/>
+                <a16:creationId xmlns:a16="http://schemas.microsoft.com/office/drawing/2014/main" id="{74905800-9A98-4662-B402-85CCCAD495AB}"/>
               </a:ext>
             </a:extLst>
           </p:cNvPr>
@@ -3807,7 +6058,7 @@
           <p:cNvPr id="2" name="chapter-label">
             <a:extLst xmlns:a="http://schemas.openxmlformats.org/drawingml/2006/main">
               <a:ext uri="{FF2B5EF4-FFF2-40B4-BE49-F238E27FC236}">
-                <a16:creationId xmlns:a16="http://schemas.microsoft.com/office/drawing/2014/main" id="{F89EAF9B-E7D3-490A-93C5-72034927186A}"/>
+                <a16:creationId xmlns:a16="http://schemas.microsoft.com/office/drawing/2014/main" id="{B8695996-CA7D-4FB4-A669-D9E3EA52826F}"/>
               </a:ext>
             </a:extLst>
           </p:cNvPr>
@@ -3865,7 +6116,7 @@
           <p:cNvPr id="3" name="slide-number">
             <a:extLst xmlns:a="http://schemas.openxmlformats.org/drawingml/2006/main">
               <a:ext uri="{FF2B5EF4-FFF2-40B4-BE49-F238E27FC236}">
-                <a16:creationId xmlns:a16="http://schemas.microsoft.com/office/drawing/2014/main" id="{12341884-5371-4D28-B936-CAF016DFA5C9}"/>
+                <a16:creationId xmlns:a16="http://schemas.microsoft.com/office/drawing/2014/main" id="{07B93703-5528-4009-AFD9-773F487EBB5E}"/>
               </a:ext>
             </a:extLst>
           </p:cNvPr>
@@ -3923,7 +6174,7 @@
           <p:cNvPr id="4" name="chapter-footer">
             <a:extLst xmlns:a="http://schemas.openxmlformats.org/drawingml/2006/main">
               <a:ext uri="{FF2B5EF4-FFF2-40B4-BE49-F238E27FC236}">
-                <a16:creationId xmlns:a16="http://schemas.microsoft.com/office/drawing/2014/main" id="{9BE5D9F9-F8C8-4424-84BC-8A229670388B}"/>
+                <a16:creationId xmlns:a16="http://schemas.microsoft.com/office/drawing/2014/main" id="{16F865E2-9AF5-4542-997A-AB1589F0FC87}"/>
               </a:ext>
             </a:extLst>
           </p:cNvPr>
@@ -3981,7 +6232,7 @@
           <p:cNvPr id="5" name="section-title">
             <a:extLst xmlns:a="http://schemas.openxmlformats.org/drawingml/2006/main">
               <a:ext uri="{FF2B5EF4-FFF2-40B4-BE49-F238E27FC236}">
-                <a16:creationId xmlns:a16="http://schemas.microsoft.com/office/drawing/2014/main" id="{11E6263F-D0A3-4D21-A001-B0875282D3B9}"/>
+                <a16:creationId xmlns:a16="http://schemas.microsoft.com/office/drawing/2014/main" id="{580BB210-B659-493B-B542-D9CBE18151FC}"/>
               </a:ext>
             </a:extLst>
           </p:cNvPr>
@@ -4039,7 +6290,7 @@
           <p:cNvPr id="6" name="section-explanation">
             <a:extLst xmlns:a="http://schemas.openxmlformats.org/drawingml/2006/main">
               <a:ext uri="{FF2B5EF4-FFF2-40B4-BE49-F238E27FC236}">
-                <a16:creationId xmlns:a16="http://schemas.microsoft.com/office/drawing/2014/main" id="{AEA0829E-C347-4B83-BD4A-A4D71B961EBC}"/>
+                <a16:creationId xmlns:a16="http://schemas.microsoft.com/office/drawing/2014/main" id="{23C0A490-9566-4669-B318-48D901B9C33B}"/>
               </a:ext>
             </a:extLst>
           </p:cNvPr>
@@ -4097,7 +6348,7 @@
           <p:cNvPr id="7" name="column-rule">
             <a:extLst xmlns:a="http://schemas.openxmlformats.org/drawingml/2006/main">
               <a:ext uri="{FF2B5EF4-FFF2-40B4-BE49-F238E27FC236}">
-                <a16:creationId xmlns:a16="http://schemas.microsoft.com/office/drawing/2014/main" id="{CD608A00-212D-46E7-BE8F-6B32060A8E20}"/>
+                <a16:creationId xmlns:a16="http://schemas.microsoft.com/office/drawing/2014/main" id="{CE6A19AC-C00D-43DB-AB5C-B09ECCE2C0E1}"/>
               </a:ext>
             </a:extLst>
           </p:cNvPr>
@@ -4130,7 +6381,7 @@
           <p:cNvPr id="8" name="section-points">
             <a:extLst xmlns:a="http://schemas.openxmlformats.org/drawingml/2006/main">
               <a:ext uri="{FF2B5EF4-FFF2-40B4-BE49-F238E27FC236}">
-                <a16:creationId xmlns:a16="http://schemas.microsoft.com/office/drawing/2014/main" id="{FA2ECEF0-6990-447C-AB47-678962E078EB}"/>
+                <a16:creationId xmlns:a16="http://schemas.microsoft.com/office/drawing/2014/main" id="{9AA012C1-7266-42DC-A7EC-6FEE87742E1B}"/>
               </a:ext>
             </a:extLst>
           </p:cNvPr>
@@ -4242,7 +6493,7 @@
     </p:spTree>
     <p:extLst>
       <p:ext uri="{BB962C8B-B14F-4D97-AF65-F5344CB8AC3E}">
-        <p14:creationId xmlns:p14="http://schemas.microsoft.com/office/powerpoint/2010/main" val="839756163"/>
+        <p14:creationId xmlns:p14="http://schemas.microsoft.com/office/powerpoint/2010/main" val="1568620928"/>
       </p:ext>
     </p:extLst>
   </p:cSld>
@@ -4273,7 +6524,7 @@
           <p:cNvPr id="15" name="accent-line">
             <a:extLst xmlns:a="http://schemas.openxmlformats.org/drawingml/2006/main">
               <a:ext uri="{FF2B5EF4-FFF2-40B4-BE49-F238E27FC236}">
-                <a16:creationId xmlns:a16="http://schemas.microsoft.com/office/drawing/2014/main" id="{F4392C8F-21E9-44A9-9BA4-FE798454CE55}"/>
+                <a16:creationId xmlns:a16="http://schemas.microsoft.com/office/drawing/2014/main" id="{AA4CCCA8-DCCD-4EAF-BED5-A17349F7CA3C}"/>
               </a:ext>
             </a:extLst>
           </p:cNvPr>
@@ -4306,7 +6557,7 @@
           <p:cNvPr id="2" name="chapter-label">
             <a:extLst xmlns:a="http://schemas.openxmlformats.org/drawingml/2006/main">
               <a:ext uri="{FF2B5EF4-FFF2-40B4-BE49-F238E27FC236}">
-                <a16:creationId xmlns:a16="http://schemas.microsoft.com/office/drawing/2014/main" id="{2AD16616-2E08-4B80-A083-D26BD6F87763}"/>
+                <a16:creationId xmlns:a16="http://schemas.microsoft.com/office/drawing/2014/main" id="{E72C9587-E7A5-412D-967A-6B131C15009E}"/>
               </a:ext>
             </a:extLst>
           </p:cNvPr>
@@ -4364,7 +6615,7 @@
           <p:cNvPr id="3" name="slide-number">
             <a:extLst xmlns:a="http://schemas.openxmlformats.org/drawingml/2006/main">
               <a:ext uri="{FF2B5EF4-FFF2-40B4-BE49-F238E27FC236}">
-                <a16:creationId xmlns:a16="http://schemas.microsoft.com/office/drawing/2014/main" id="{C0120C14-105B-4FDD-89D9-3B6C95CA31EE}"/>
+                <a16:creationId xmlns:a16="http://schemas.microsoft.com/office/drawing/2014/main" id="{E0723C1D-413B-4A9A-8115-6AD6EE318DC6}"/>
               </a:ext>
             </a:extLst>
           </p:cNvPr>
@@ -4422,7 +6673,7 @@
           <p:cNvPr id="4" name="chapter-footer">
             <a:extLst xmlns:a="http://schemas.openxmlformats.org/drawingml/2006/main">
               <a:ext uri="{FF2B5EF4-FFF2-40B4-BE49-F238E27FC236}">
-                <a16:creationId xmlns:a16="http://schemas.microsoft.com/office/drawing/2014/main" id="{F328A75C-BF12-4F63-B117-0F24418D4AE8}"/>
+                <a16:creationId xmlns:a16="http://schemas.microsoft.com/office/drawing/2014/main" id="{01BDE66D-F15B-47FE-BD0F-0B1EF45F0FA2}"/>
               </a:ext>
             </a:extLst>
           </p:cNvPr>
@@ -4480,7 +6731,7 @@
           <p:cNvPr id="5" name="section-title">
             <a:extLst xmlns:a="http://schemas.openxmlformats.org/drawingml/2006/main">
               <a:ext uri="{FF2B5EF4-FFF2-40B4-BE49-F238E27FC236}">
-                <a16:creationId xmlns:a16="http://schemas.microsoft.com/office/drawing/2014/main" id="{8E9277BD-9F80-490A-B0BA-4751DE9CC665}"/>
+                <a16:creationId xmlns:a16="http://schemas.microsoft.com/office/drawing/2014/main" id="{7F843C66-C39C-4EA7-BB16-7AAEA38F6529}"/>
               </a:ext>
             </a:extLst>
           </p:cNvPr>
@@ -4538,7 +6789,7 @@
           <p:cNvPr id="6" name="section-explanation">
             <a:extLst xmlns:a="http://schemas.openxmlformats.org/drawingml/2006/main">
               <a:ext uri="{FF2B5EF4-FFF2-40B4-BE49-F238E27FC236}">
-                <a16:creationId xmlns:a16="http://schemas.microsoft.com/office/drawing/2014/main" id="{C264D681-C85E-4337-99EB-C25BBC8368D3}"/>
+                <a16:creationId xmlns:a16="http://schemas.microsoft.com/office/drawing/2014/main" id="{BF5142EF-8A44-464D-BDE8-C3FFF2C61A76}"/>
               </a:ext>
             </a:extLst>
           </p:cNvPr>
@@ -4596,7 +6847,7 @@
           <p:cNvPr id="7" name="point-band-1">
             <a:extLst xmlns:a="http://schemas.openxmlformats.org/drawingml/2006/main">
               <a:ext uri="{FF2B5EF4-FFF2-40B4-BE49-F238E27FC236}">
-                <a16:creationId xmlns:a16="http://schemas.microsoft.com/office/drawing/2014/main" id="{08A7E2EC-8808-4E93-813A-4AAD48C77571}"/>
+                <a16:creationId xmlns:a16="http://schemas.microsoft.com/office/drawing/2014/main" id="{0EDD06A1-E8C0-4B2D-AE22-CF757030EA68}"/>
               </a:ext>
             </a:extLst>
           </p:cNvPr>
@@ -4629,7 +6880,7 @@
           <p:cNvPr id="8" name="point-1">
             <a:extLst xmlns:a="http://schemas.openxmlformats.org/drawingml/2006/main">
               <a:ext uri="{FF2B5EF4-FFF2-40B4-BE49-F238E27FC236}">
-                <a16:creationId xmlns:a16="http://schemas.microsoft.com/office/drawing/2014/main" id="{311FB4AB-4889-4420-B426-852B178E96B0}"/>
+                <a16:creationId xmlns:a16="http://schemas.microsoft.com/office/drawing/2014/main" id="{490185D8-5C86-4AE3-BA6F-CE09A98C5C82}"/>
               </a:ext>
             </a:extLst>
           </p:cNvPr>
@@ -4687,7 +6938,7 @@
           <p:cNvPr id="9" name="point-band-2">
             <a:extLst xmlns:a="http://schemas.openxmlformats.org/drawingml/2006/main">
               <a:ext uri="{FF2B5EF4-FFF2-40B4-BE49-F238E27FC236}">
-                <a16:creationId xmlns:a16="http://schemas.microsoft.com/office/drawing/2014/main" id="{0B6263F4-7BF3-4B54-8701-6BE498973D63}"/>
+                <a16:creationId xmlns:a16="http://schemas.microsoft.com/office/drawing/2014/main" id="{61137267-6183-4E13-87D6-B8D41E158906}"/>
               </a:ext>
             </a:extLst>
           </p:cNvPr>
@@ -4720,7 +6971,7 @@
           <p:cNvPr id="10" name="point-2">
             <a:extLst xmlns:a="http://schemas.openxmlformats.org/drawingml/2006/main">
               <a:ext uri="{FF2B5EF4-FFF2-40B4-BE49-F238E27FC236}">
-                <a16:creationId xmlns:a16="http://schemas.microsoft.com/office/drawing/2014/main" id="{78E231F4-49AE-4A23-9938-1D7C1C9881DB}"/>
+                <a16:creationId xmlns:a16="http://schemas.microsoft.com/office/drawing/2014/main" id="{C5DFB57F-D67C-4B55-9D88-C344BE643D3B}"/>
               </a:ext>
             </a:extLst>
           </p:cNvPr>
@@ -4778,7 +7029,7 @@
           <p:cNvPr id="11" name="point-band-3">
             <a:extLst xmlns:a="http://schemas.openxmlformats.org/drawingml/2006/main">
               <a:ext uri="{FF2B5EF4-FFF2-40B4-BE49-F238E27FC236}">
-                <a16:creationId xmlns:a16="http://schemas.microsoft.com/office/drawing/2014/main" id="{0ACD4592-F2C2-45ED-8813-57517C2F8BFB}"/>
+                <a16:creationId xmlns:a16="http://schemas.microsoft.com/office/drawing/2014/main" id="{FFE5D77B-705E-4D58-956B-107B77AD6190}"/>
               </a:ext>
             </a:extLst>
           </p:cNvPr>
@@ -4811,7 +7062,7 @@
           <p:cNvPr id="12" name="point-3">
             <a:extLst xmlns:a="http://schemas.openxmlformats.org/drawingml/2006/main">
               <a:ext uri="{FF2B5EF4-FFF2-40B4-BE49-F238E27FC236}">
-                <a16:creationId xmlns:a16="http://schemas.microsoft.com/office/drawing/2014/main" id="{2BD09672-E922-4217-B993-48CE756CF90D}"/>
+                <a16:creationId xmlns:a16="http://schemas.microsoft.com/office/drawing/2014/main" id="{06DD4434-82EE-4FC8-8285-13B1496D217E}"/>
               </a:ext>
             </a:extLst>
           </p:cNvPr>
@@ -4869,7 +7120,7 @@
           <p:cNvPr id="13" name="point-band-4">
             <a:extLst xmlns:a="http://schemas.openxmlformats.org/drawingml/2006/main">
               <a:ext uri="{FF2B5EF4-FFF2-40B4-BE49-F238E27FC236}">
-                <a16:creationId xmlns:a16="http://schemas.microsoft.com/office/drawing/2014/main" id="{EFACA554-DD4C-4480-8358-6CC271E2F64C}"/>
+                <a16:creationId xmlns:a16="http://schemas.microsoft.com/office/drawing/2014/main" id="{19BE1A9A-1E73-455E-8579-12E12C116BB1}"/>
               </a:ext>
             </a:extLst>
           </p:cNvPr>
@@ -4902,7 +7153,7 @@
           <p:cNvPr id="14" name="point-4">
             <a:extLst xmlns:a="http://schemas.openxmlformats.org/drawingml/2006/main">
               <a:ext uri="{FF2B5EF4-FFF2-40B4-BE49-F238E27FC236}">
-                <a16:creationId xmlns:a16="http://schemas.microsoft.com/office/drawing/2014/main" id="{FDC8D2E6-9D0C-46BE-9BB3-797664F73C27}"/>
+                <a16:creationId xmlns:a16="http://schemas.microsoft.com/office/drawing/2014/main" id="{4B12715C-CB8C-4BBA-A116-C60997DBFE31}"/>
               </a:ext>
             </a:extLst>
           </p:cNvPr>
@@ -4958,7 +7209,7 @@
     </p:spTree>
     <p:extLst>
       <p:ext uri="{BB962C8B-B14F-4D97-AF65-F5344CB8AC3E}">
-        <p14:creationId xmlns:p14="http://schemas.microsoft.com/office/powerpoint/2010/main" val="144920395"/>
+        <p14:creationId xmlns:p14="http://schemas.microsoft.com/office/powerpoint/2010/main" val="1438164816"/>
       </p:ext>
     </p:extLst>
   </p:cSld>
@@ -4989,7 +7240,7 @@
           <p:cNvPr id="9" name="accent-line">
             <a:extLst xmlns:a="http://schemas.openxmlformats.org/drawingml/2006/main">
               <a:ext uri="{FF2B5EF4-FFF2-40B4-BE49-F238E27FC236}">
-                <a16:creationId xmlns:a16="http://schemas.microsoft.com/office/drawing/2014/main" id="{2FBF33EB-935D-4858-A736-6106FA89F920}"/>
+                <a16:creationId xmlns:a16="http://schemas.microsoft.com/office/drawing/2014/main" id="{95709710-0031-439D-ABF6-865580C4134B}"/>
               </a:ext>
             </a:extLst>
           </p:cNvPr>
@@ -5022,7 +7273,7 @@
           <p:cNvPr id="2" name="chapter-label">
             <a:extLst xmlns:a="http://schemas.openxmlformats.org/drawingml/2006/main">
               <a:ext uri="{FF2B5EF4-FFF2-40B4-BE49-F238E27FC236}">
-                <a16:creationId xmlns:a16="http://schemas.microsoft.com/office/drawing/2014/main" id="{4E6E0031-36F3-45C6-A563-B48FA8A0B73A}"/>
+                <a16:creationId xmlns:a16="http://schemas.microsoft.com/office/drawing/2014/main" id="{0AB801AB-E82A-402A-9437-E7A5B2953AD4}"/>
               </a:ext>
             </a:extLst>
           </p:cNvPr>
@@ -5080,7 +7331,7 @@
           <p:cNvPr id="3" name="slide-number">
             <a:extLst xmlns:a="http://schemas.openxmlformats.org/drawingml/2006/main">
               <a:ext uri="{FF2B5EF4-FFF2-40B4-BE49-F238E27FC236}">
-                <a16:creationId xmlns:a16="http://schemas.microsoft.com/office/drawing/2014/main" id="{BDD37041-99E0-44DB-B483-0081CA4221F2}"/>
+                <a16:creationId xmlns:a16="http://schemas.microsoft.com/office/drawing/2014/main" id="{2090B149-15A5-4BCB-9F4C-582F9EAD6842}"/>
               </a:ext>
             </a:extLst>
           </p:cNvPr>
@@ -5138,7 +7389,7 @@
           <p:cNvPr id="4" name="chapter-footer">
             <a:extLst xmlns:a="http://schemas.openxmlformats.org/drawingml/2006/main">
               <a:ext uri="{FF2B5EF4-FFF2-40B4-BE49-F238E27FC236}">
-                <a16:creationId xmlns:a16="http://schemas.microsoft.com/office/drawing/2014/main" id="{42AF2BB2-67A2-4288-A53F-CD2D047BA1B2}"/>
+                <a16:creationId xmlns:a16="http://schemas.microsoft.com/office/drawing/2014/main" id="{6DB4EC63-7B8C-4C4A-8FF2-79EFE2CCB1E9}"/>
               </a:ext>
             </a:extLst>
           </p:cNvPr>
@@ -5196,7 +7447,7 @@
           <p:cNvPr id="5" name="section-title">
             <a:extLst xmlns:a="http://schemas.openxmlformats.org/drawingml/2006/main">
               <a:ext uri="{FF2B5EF4-FFF2-40B4-BE49-F238E27FC236}">
-                <a16:creationId xmlns:a16="http://schemas.microsoft.com/office/drawing/2014/main" id="{C507D7FD-45C1-49C2-B2CB-1D1D98443454}"/>
+                <a16:creationId xmlns:a16="http://schemas.microsoft.com/office/drawing/2014/main" id="{0081DD6F-5CC2-4E69-8B27-B1E00D176E1A}"/>
               </a:ext>
             </a:extLst>
           </p:cNvPr>
@@ -5254,7 +7505,7 @@
           <p:cNvPr id="6" name="section-explanation">
             <a:extLst xmlns:a="http://schemas.openxmlformats.org/drawingml/2006/main">
               <a:ext uri="{FF2B5EF4-FFF2-40B4-BE49-F238E27FC236}">
-                <a16:creationId xmlns:a16="http://schemas.microsoft.com/office/drawing/2014/main" id="{8BD786E7-B2A1-4DBA-A3E0-0DF1B8DDE3FC}"/>
+                <a16:creationId xmlns:a16="http://schemas.microsoft.com/office/drawing/2014/main" id="{BD7EDA5B-9DB7-4664-8E7A-18DEF45BDA34}"/>
               </a:ext>
             </a:extLst>
           </p:cNvPr>
@@ -5312,7 +7563,7 @@
           <p:cNvPr id="7" name="column-rule">
             <a:extLst xmlns:a="http://schemas.openxmlformats.org/drawingml/2006/main">
               <a:ext uri="{FF2B5EF4-FFF2-40B4-BE49-F238E27FC236}">
-                <a16:creationId xmlns:a16="http://schemas.microsoft.com/office/drawing/2014/main" id="{1A09B00C-AE42-4B06-B8D2-148B3F32BC03}"/>
+                <a16:creationId xmlns:a16="http://schemas.microsoft.com/office/drawing/2014/main" id="{F8D4E211-78B3-47F7-9589-DDF6F810221F}"/>
               </a:ext>
             </a:extLst>
           </p:cNvPr>
@@ -5345,7 +7596,7 @@
           <p:cNvPr id="8" name="section-points">
             <a:extLst xmlns:a="http://schemas.openxmlformats.org/drawingml/2006/main">
               <a:ext uri="{FF2B5EF4-FFF2-40B4-BE49-F238E27FC236}">
-                <a16:creationId xmlns:a16="http://schemas.microsoft.com/office/drawing/2014/main" id="{D6059E8E-E2EB-43B6-9F4C-B7E6154725A1}"/>
+                <a16:creationId xmlns:a16="http://schemas.microsoft.com/office/drawing/2014/main" id="{9E0EBB4D-4424-4F17-B3F4-945E090C6A8A}"/>
               </a:ext>
             </a:extLst>
           </p:cNvPr>
@@ -5485,7 +7736,7 @@
     </p:spTree>
     <p:extLst>
       <p:ext uri="{BB962C8B-B14F-4D97-AF65-F5344CB8AC3E}">
-        <p14:creationId xmlns:p14="http://schemas.microsoft.com/office/powerpoint/2010/main" val="1686083772"/>
+        <p14:creationId xmlns:p14="http://schemas.microsoft.com/office/powerpoint/2010/main" val="1410491321"/>
       </p:ext>
     </p:extLst>
   </p:cSld>
@@ -5516,7 +7767,7 @@
           <p:cNvPr id="15" name="accent-line">
             <a:extLst xmlns:a="http://schemas.openxmlformats.org/drawingml/2006/main">
               <a:ext uri="{FF2B5EF4-FFF2-40B4-BE49-F238E27FC236}">
-                <a16:creationId xmlns:a16="http://schemas.microsoft.com/office/drawing/2014/main" id="{F96D6B1F-32A4-41A4-AB2F-C2ECA5DCF79B}"/>
+                <a16:creationId xmlns:a16="http://schemas.microsoft.com/office/drawing/2014/main" id="{ACE62CB7-9F9F-4434-911A-25DBC3561353}"/>
               </a:ext>
             </a:extLst>
           </p:cNvPr>
@@ -5549,7 +7800,7 @@
           <p:cNvPr id="2" name="chapter-label">
             <a:extLst xmlns:a="http://schemas.openxmlformats.org/drawingml/2006/main">
               <a:ext uri="{FF2B5EF4-FFF2-40B4-BE49-F238E27FC236}">
-                <a16:creationId xmlns:a16="http://schemas.microsoft.com/office/drawing/2014/main" id="{C0AF2549-5B3B-4EF5-A921-0C09B46C50D3}"/>
+                <a16:creationId xmlns:a16="http://schemas.microsoft.com/office/drawing/2014/main" id="{554FFD3F-972F-4C8E-B371-2EED9FBFA0D2}"/>
               </a:ext>
             </a:extLst>
           </p:cNvPr>
@@ -5607,7 +7858,7 @@
           <p:cNvPr id="3" name="slide-number">
             <a:extLst xmlns:a="http://schemas.openxmlformats.org/drawingml/2006/main">
               <a:ext uri="{FF2B5EF4-FFF2-40B4-BE49-F238E27FC236}">
-                <a16:creationId xmlns:a16="http://schemas.microsoft.com/office/drawing/2014/main" id="{DCE13576-BF07-487A-B4CC-5D3B716097B1}"/>
+                <a16:creationId xmlns:a16="http://schemas.microsoft.com/office/drawing/2014/main" id="{C100D6C0-6D62-4FCA-8131-F8DB234E468D}"/>
               </a:ext>
             </a:extLst>
           </p:cNvPr>
@@ -5665,7 +7916,7 @@
           <p:cNvPr id="4" name="chapter-footer">
             <a:extLst xmlns:a="http://schemas.openxmlformats.org/drawingml/2006/main">
               <a:ext uri="{FF2B5EF4-FFF2-40B4-BE49-F238E27FC236}">
-                <a16:creationId xmlns:a16="http://schemas.microsoft.com/office/drawing/2014/main" id="{15D77398-B5F8-4BC3-8121-1F73EB5DB311}"/>
+                <a16:creationId xmlns:a16="http://schemas.microsoft.com/office/drawing/2014/main" id="{B85D59F2-4A07-4E6F-BDEB-9EA3DBB0FD38}"/>
               </a:ext>
             </a:extLst>
           </p:cNvPr>
@@ -5723,7 +7974,7 @@
           <p:cNvPr id="5" name="section-title">
             <a:extLst xmlns:a="http://schemas.openxmlformats.org/drawingml/2006/main">
               <a:ext uri="{FF2B5EF4-FFF2-40B4-BE49-F238E27FC236}">
-                <a16:creationId xmlns:a16="http://schemas.microsoft.com/office/drawing/2014/main" id="{002636B4-3AB5-49A6-BB90-FDA097772649}"/>
+                <a16:creationId xmlns:a16="http://schemas.microsoft.com/office/drawing/2014/main" id="{3A77747F-3603-4A87-8181-3637A55A2345}"/>
               </a:ext>
             </a:extLst>
           </p:cNvPr>
@@ -5781,7 +8032,7 @@
           <p:cNvPr id="6" name="section-explanation">
             <a:extLst xmlns:a="http://schemas.openxmlformats.org/drawingml/2006/main">
               <a:ext uri="{FF2B5EF4-FFF2-40B4-BE49-F238E27FC236}">
-                <a16:creationId xmlns:a16="http://schemas.microsoft.com/office/drawing/2014/main" id="{CAFC6D92-4B3E-43A7-B1F0-F07FEA2F60D5}"/>
+                <a16:creationId xmlns:a16="http://schemas.microsoft.com/office/drawing/2014/main" id="{41FD160D-E68B-4921-BB35-E0F0FD2E1895}"/>
               </a:ext>
             </a:extLst>
           </p:cNvPr>
@@ -5839,7 +8090,7 @@
           <p:cNvPr id="7" name="point-band-1">
             <a:extLst xmlns:a="http://schemas.openxmlformats.org/drawingml/2006/main">
               <a:ext uri="{FF2B5EF4-FFF2-40B4-BE49-F238E27FC236}">
-                <a16:creationId xmlns:a16="http://schemas.microsoft.com/office/drawing/2014/main" id="{7D8D5220-EC59-4BEA-A978-C1B9351A2C59}"/>
+                <a16:creationId xmlns:a16="http://schemas.microsoft.com/office/drawing/2014/main" id="{44536D5E-C746-40CD-BB8C-72F2EB68CD67}"/>
               </a:ext>
             </a:extLst>
           </p:cNvPr>
@@ -5872,7 +8123,7 @@
           <p:cNvPr id="8" name="point-1">
             <a:extLst xmlns:a="http://schemas.openxmlformats.org/drawingml/2006/main">
               <a:ext uri="{FF2B5EF4-FFF2-40B4-BE49-F238E27FC236}">
-                <a16:creationId xmlns:a16="http://schemas.microsoft.com/office/drawing/2014/main" id="{DB542F66-5FBC-495F-A85C-9F47CEC67F09}"/>
+                <a16:creationId xmlns:a16="http://schemas.microsoft.com/office/drawing/2014/main" id="{ACF7B27E-0186-45D7-85DD-9561C5F7951F}"/>
               </a:ext>
             </a:extLst>
           </p:cNvPr>
@@ -5930,7 +8181,7 @@
           <p:cNvPr id="9" name="point-band-2">
             <a:extLst xmlns:a="http://schemas.openxmlformats.org/drawingml/2006/main">
               <a:ext uri="{FF2B5EF4-FFF2-40B4-BE49-F238E27FC236}">
-                <a16:creationId xmlns:a16="http://schemas.microsoft.com/office/drawing/2014/main" id="{C9108646-2035-4273-A92D-B531D54CB9A7}"/>
+                <a16:creationId xmlns:a16="http://schemas.microsoft.com/office/drawing/2014/main" id="{6925D2C0-1D25-4D03-A126-4E1353BD9C50}"/>
               </a:ext>
             </a:extLst>
           </p:cNvPr>
@@ -5963,7 +8214,7 @@
           <p:cNvPr id="10" name="point-2">
             <a:extLst xmlns:a="http://schemas.openxmlformats.org/drawingml/2006/main">
               <a:ext uri="{FF2B5EF4-FFF2-40B4-BE49-F238E27FC236}">
-                <a16:creationId xmlns:a16="http://schemas.microsoft.com/office/drawing/2014/main" id="{3EF012A1-6FE8-4F6A-B4C3-699CFF9B97B3}"/>
+                <a16:creationId xmlns:a16="http://schemas.microsoft.com/office/drawing/2014/main" id="{4FAEE7C6-593A-47CB-B02F-E6368933EEF2}"/>
               </a:ext>
             </a:extLst>
           </p:cNvPr>
@@ -6021,7 +8272,7 @@
           <p:cNvPr id="11" name="point-band-3">
             <a:extLst xmlns:a="http://schemas.openxmlformats.org/drawingml/2006/main">
               <a:ext uri="{FF2B5EF4-FFF2-40B4-BE49-F238E27FC236}">
-                <a16:creationId xmlns:a16="http://schemas.microsoft.com/office/drawing/2014/main" id="{9DF5F07E-6484-41CC-836A-F19EACDA7A2D}"/>
+                <a16:creationId xmlns:a16="http://schemas.microsoft.com/office/drawing/2014/main" id="{E03AA2BA-C2A3-4AC3-9CE4-8EDC032723FA}"/>
               </a:ext>
             </a:extLst>
           </p:cNvPr>
@@ -6054,7 +8305,7 @@
           <p:cNvPr id="12" name="point-3">
             <a:extLst xmlns:a="http://schemas.openxmlformats.org/drawingml/2006/main">
               <a:ext uri="{FF2B5EF4-FFF2-40B4-BE49-F238E27FC236}">
-                <a16:creationId xmlns:a16="http://schemas.microsoft.com/office/drawing/2014/main" id="{D98FAA88-D96F-4D98-BE13-847F986305D7}"/>
+                <a16:creationId xmlns:a16="http://schemas.microsoft.com/office/drawing/2014/main" id="{AA3D834A-991F-4FD5-AC79-95282C7799AF}"/>
               </a:ext>
             </a:extLst>
           </p:cNvPr>
@@ -6112,7 +8363,7 @@
           <p:cNvPr id="13" name="point-band-4">
             <a:extLst xmlns:a="http://schemas.openxmlformats.org/drawingml/2006/main">
               <a:ext uri="{FF2B5EF4-FFF2-40B4-BE49-F238E27FC236}">
-                <a16:creationId xmlns:a16="http://schemas.microsoft.com/office/drawing/2014/main" id="{2D340BD7-F223-410C-A56D-33C9CE6C58B4}"/>
+                <a16:creationId xmlns:a16="http://schemas.microsoft.com/office/drawing/2014/main" id="{C9A782F4-3B66-4617-AEC8-2A8A96428B18}"/>
               </a:ext>
             </a:extLst>
           </p:cNvPr>
@@ -6145,7 +8396,7 @@
           <p:cNvPr id="14" name="point-4">
             <a:extLst xmlns:a="http://schemas.openxmlformats.org/drawingml/2006/main">
               <a:ext uri="{FF2B5EF4-FFF2-40B4-BE49-F238E27FC236}">
-                <a16:creationId xmlns:a16="http://schemas.microsoft.com/office/drawing/2014/main" id="{65173B81-E193-4CED-B8D2-1B4DA583B1DC}"/>
+                <a16:creationId xmlns:a16="http://schemas.microsoft.com/office/drawing/2014/main" id="{33226E8A-5D7A-42FA-8DBC-B4DCED34539F}"/>
               </a:ext>
             </a:extLst>
           </p:cNvPr>
@@ -6201,7 +8452,7 @@
     </p:spTree>
     <p:extLst>
       <p:ext uri="{BB962C8B-B14F-4D97-AF65-F5344CB8AC3E}">
-        <p14:creationId xmlns:p14="http://schemas.microsoft.com/office/powerpoint/2010/main" val="209952704"/>
+        <p14:creationId xmlns:p14="http://schemas.microsoft.com/office/powerpoint/2010/main" val="716984661"/>
       </p:ext>
     </p:extLst>
   </p:cSld>
@@ -6232,7 +8483,7 @@
           <p:cNvPr id="9" name="accent-line">
             <a:extLst xmlns:a="http://schemas.openxmlformats.org/drawingml/2006/main">
               <a:ext uri="{FF2B5EF4-FFF2-40B4-BE49-F238E27FC236}">
-                <a16:creationId xmlns:a16="http://schemas.microsoft.com/office/drawing/2014/main" id="{7B5D9218-1576-4916-AE82-9590E02348DA}"/>
+                <a16:creationId xmlns:a16="http://schemas.microsoft.com/office/drawing/2014/main" id="{BE46B73D-0799-4549-86A7-FBC85428B5E4}"/>
               </a:ext>
             </a:extLst>
           </p:cNvPr>
@@ -6265,7 +8516,7 @@
           <p:cNvPr id="2" name="chapter-label">
             <a:extLst xmlns:a="http://schemas.openxmlformats.org/drawingml/2006/main">
               <a:ext uri="{FF2B5EF4-FFF2-40B4-BE49-F238E27FC236}">
-                <a16:creationId xmlns:a16="http://schemas.microsoft.com/office/drawing/2014/main" id="{31D74C90-962D-4D5A-BD89-32F221526CD3}"/>
+                <a16:creationId xmlns:a16="http://schemas.microsoft.com/office/drawing/2014/main" id="{109185AE-3FC3-40C9-BC5C-C86A3B5C114A}"/>
               </a:ext>
             </a:extLst>
           </p:cNvPr>
@@ -6323,7 +8574,7 @@
           <p:cNvPr id="3" name="slide-number">
             <a:extLst xmlns:a="http://schemas.openxmlformats.org/drawingml/2006/main">
               <a:ext uri="{FF2B5EF4-FFF2-40B4-BE49-F238E27FC236}">
-                <a16:creationId xmlns:a16="http://schemas.microsoft.com/office/drawing/2014/main" id="{C56D04AE-E484-47DA-AE2E-3F020F3627AE}"/>
+                <a16:creationId xmlns:a16="http://schemas.microsoft.com/office/drawing/2014/main" id="{C333876D-D444-42AE-ACE0-F162E8C25CCB}"/>
               </a:ext>
             </a:extLst>
           </p:cNvPr>
@@ -6381,7 +8632,7 @@
           <p:cNvPr id="4" name="chapter-footer">
             <a:extLst xmlns:a="http://schemas.openxmlformats.org/drawingml/2006/main">
               <a:ext uri="{FF2B5EF4-FFF2-40B4-BE49-F238E27FC236}">
-                <a16:creationId xmlns:a16="http://schemas.microsoft.com/office/drawing/2014/main" id="{F26AE1CA-A7D3-463E-97A5-9592B3AEAEB0}"/>
+                <a16:creationId xmlns:a16="http://schemas.microsoft.com/office/drawing/2014/main" id="{7B728264-A150-405E-9243-AF3C81FC7C25}"/>
               </a:ext>
             </a:extLst>
           </p:cNvPr>
@@ -6439,7 +8690,7 @@
           <p:cNvPr id="5" name="section-title">
             <a:extLst xmlns:a="http://schemas.openxmlformats.org/drawingml/2006/main">
               <a:ext uri="{FF2B5EF4-FFF2-40B4-BE49-F238E27FC236}">
-                <a16:creationId xmlns:a16="http://schemas.microsoft.com/office/drawing/2014/main" id="{ACE53DBD-736C-403C-B134-07B964999AC6}"/>
+                <a16:creationId xmlns:a16="http://schemas.microsoft.com/office/drawing/2014/main" id="{F1BB6B34-7925-4755-949A-82EDE4A4E972}"/>
               </a:ext>
             </a:extLst>
           </p:cNvPr>
@@ -6497,7 +8748,7 @@
           <p:cNvPr id="6" name="section-explanation">
             <a:extLst xmlns:a="http://schemas.openxmlformats.org/drawingml/2006/main">
               <a:ext uri="{FF2B5EF4-FFF2-40B4-BE49-F238E27FC236}">
-                <a16:creationId xmlns:a16="http://schemas.microsoft.com/office/drawing/2014/main" id="{8314449D-4948-4FF6-924E-ADE87EE3B4E0}"/>
+                <a16:creationId xmlns:a16="http://schemas.microsoft.com/office/drawing/2014/main" id="{5D0DDAFB-3100-4C55-887C-F44449738970}"/>
               </a:ext>
             </a:extLst>
           </p:cNvPr>
@@ -6555,7 +8806,7 @@
           <p:cNvPr id="7" name="column-rule">
             <a:extLst xmlns:a="http://schemas.openxmlformats.org/drawingml/2006/main">
               <a:ext uri="{FF2B5EF4-FFF2-40B4-BE49-F238E27FC236}">
-                <a16:creationId xmlns:a16="http://schemas.microsoft.com/office/drawing/2014/main" id="{85683CE0-BE62-45C5-8F4F-2E255CBF2F2A}"/>
+                <a16:creationId xmlns:a16="http://schemas.microsoft.com/office/drawing/2014/main" id="{EF639E18-1AD1-43F8-8711-E525B957E53A}"/>
               </a:ext>
             </a:extLst>
           </p:cNvPr>
@@ -6588,7 +8839,7 @@
           <p:cNvPr id="8" name="section-points">
             <a:extLst xmlns:a="http://schemas.openxmlformats.org/drawingml/2006/main">
               <a:ext uri="{FF2B5EF4-FFF2-40B4-BE49-F238E27FC236}">
-                <a16:creationId xmlns:a16="http://schemas.microsoft.com/office/drawing/2014/main" id="{004F8656-92A9-40A3-8502-A7371228F7F0}"/>
+                <a16:creationId xmlns:a16="http://schemas.microsoft.com/office/drawing/2014/main" id="{BB685E1F-68D4-45BB-87CF-567C7B34FF65}"/>
               </a:ext>
             </a:extLst>
           </p:cNvPr>
@@ -6728,7 +8979,7 @@
     </p:spTree>
     <p:extLst>
       <p:ext uri="{BB962C8B-B14F-4D97-AF65-F5344CB8AC3E}">
-        <p14:creationId xmlns:p14="http://schemas.microsoft.com/office/powerpoint/2010/main" val="550002064"/>
+        <p14:creationId xmlns:p14="http://schemas.microsoft.com/office/powerpoint/2010/main" val="1204789106"/>
       </p:ext>
     </p:extLst>
   </p:cSld>
@@ -6759,7 +9010,7 @@
           <p:cNvPr id="15" name="accent-line">
             <a:extLst xmlns:a="http://schemas.openxmlformats.org/drawingml/2006/main">
               <a:ext uri="{FF2B5EF4-FFF2-40B4-BE49-F238E27FC236}">
-                <a16:creationId xmlns:a16="http://schemas.microsoft.com/office/drawing/2014/main" id="{6A2BC545-FD80-4187-8862-41750BD3C5D6}"/>
+                <a16:creationId xmlns:a16="http://schemas.microsoft.com/office/drawing/2014/main" id="{8BBBE735-6022-4056-B777-0EC56069C78B}"/>
               </a:ext>
             </a:extLst>
           </p:cNvPr>
@@ -6792,7 +9043,7 @@
           <p:cNvPr id="2" name="chapter-label">
             <a:extLst xmlns:a="http://schemas.openxmlformats.org/drawingml/2006/main">
               <a:ext uri="{FF2B5EF4-FFF2-40B4-BE49-F238E27FC236}">
-                <a16:creationId xmlns:a16="http://schemas.microsoft.com/office/drawing/2014/main" id="{0FBAA890-0770-457B-B190-5D96C2245276}"/>
+                <a16:creationId xmlns:a16="http://schemas.microsoft.com/office/drawing/2014/main" id="{76369F42-FB84-4902-BD26-359FA3BCF34E}"/>
               </a:ext>
             </a:extLst>
           </p:cNvPr>
@@ -6850,7 +9101,7 @@
           <p:cNvPr id="3" name="slide-number">
             <a:extLst xmlns:a="http://schemas.openxmlformats.org/drawingml/2006/main">
               <a:ext uri="{FF2B5EF4-FFF2-40B4-BE49-F238E27FC236}">
-                <a16:creationId xmlns:a16="http://schemas.microsoft.com/office/drawing/2014/main" id="{197EB1D7-3E1F-458F-BBE6-2D648CB1D2BA}"/>
+                <a16:creationId xmlns:a16="http://schemas.microsoft.com/office/drawing/2014/main" id="{DA5CD865-61DB-41FF-8685-A00CEBFDB556}"/>
               </a:ext>
             </a:extLst>
           </p:cNvPr>
@@ -6908,7 +9159,7 @@
           <p:cNvPr id="4" name="chapter-footer">
             <a:extLst xmlns:a="http://schemas.openxmlformats.org/drawingml/2006/main">
               <a:ext uri="{FF2B5EF4-FFF2-40B4-BE49-F238E27FC236}">
-                <a16:creationId xmlns:a16="http://schemas.microsoft.com/office/drawing/2014/main" id="{7DFF157E-AF25-44CB-AEF4-92DDDDA2E0C8}"/>
+                <a16:creationId xmlns:a16="http://schemas.microsoft.com/office/drawing/2014/main" id="{BB10B0F5-6511-4CE7-85A3-6BE42ED2AC15}"/>
               </a:ext>
             </a:extLst>
           </p:cNvPr>
@@ -6966,7 +9217,7 @@
           <p:cNvPr id="5" name="section-title">
             <a:extLst xmlns:a="http://schemas.openxmlformats.org/drawingml/2006/main">
               <a:ext uri="{FF2B5EF4-FFF2-40B4-BE49-F238E27FC236}">
-                <a16:creationId xmlns:a16="http://schemas.microsoft.com/office/drawing/2014/main" id="{F5169697-6703-4BAE-9E29-07AEA0E89F88}"/>
+                <a16:creationId xmlns:a16="http://schemas.microsoft.com/office/drawing/2014/main" id="{5E3A35B6-E781-4067-A29C-CB5282130331}"/>
               </a:ext>
             </a:extLst>
           </p:cNvPr>
@@ -7024,7 +9275,7 @@
           <p:cNvPr id="6" name="section-explanation">
             <a:extLst xmlns:a="http://schemas.openxmlformats.org/drawingml/2006/main">
               <a:ext uri="{FF2B5EF4-FFF2-40B4-BE49-F238E27FC236}">
-                <a16:creationId xmlns:a16="http://schemas.microsoft.com/office/drawing/2014/main" id="{D92C873A-4D31-410C-9B1C-BEE70C1177FC}"/>
+                <a16:creationId xmlns:a16="http://schemas.microsoft.com/office/drawing/2014/main" id="{392BE3D4-AC82-4014-86AC-DB27C3AEBBF0}"/>
               </a:ext>
             </a:extLst>
           </p:cNvPr>
@@ -7082,7 +9333,7 @@
           <p:cNvPr id="7" name="point-band-1">
             <a:extLst xmlns:a="http://schemas.openxmlformats.org/drawingml/2006/main">
               <a:ext uri="{FF2B5EF4-FFF2-40B4-BE49-F238E27FC236}">
-                <a16:creationId xmlns:a16="http://schemas.microsoft.com/office/drawing/2014/main" id="{25BF0714-70A9-438C-99F4-AB778C7E02EB}"/>
+                <a16:creationId xmlns:a16="http://schemas.microsoft.com/office/drawing/2014/main" id="{AD1BE0BE-29F9-4160-A0BB-20275D1EC67B}"/>
               </a:ext>
             </a:extLst>
           </p:cNvPr>
@@ -7115,7 +9366,7 @@
           <p:cNvPr id="8" name="point-1">
             <a:extLst xmlns:a="http://schemas.openxmlformats.org/drawingml/2006/main">
               <a:ext uri="{FF2B5EF4-FFF2-40B4-BE49-F238E27FC236}">
-                <a16:creationId xmlns:a16="http://schemas.microsoft.com/office/drawing/2014/main" id="{6951178A-6982-408A-9FC2-CF6A058A52AA}"/>
+                <a16:creationId xmlns:a16="http://schemas.microsoft.com/office/drawing/2014/main" id="{D338B55C-C89E-4072-8FA5-342B25E7903A}"/>
               </a:ext>
             </a:extLst>
           </p:cNvPr>
@@ -7173,7 +9424,7 @@
           <p:cNvPr id="9" name="point-band-2">
             <a:extLst xmlns:a="http://schemas.openxmlformats.org/drawingml/2006/main">
               <a:ext uri="{FF2B5EF4-FFF2-40B4-BE49-F238E27FC236}">
-                <a16:creationId xmlns:a16="http://schemas.microsoft.com/office/drawing/2014/main" id="{CCF0E0BB-F33E-4B72-88AC-37868EC18050}"/>
+                <a16:creationId xmlns:a16="http://schemas.microsoft.com/office/drawing/2014/main" id="{D88F9F57-4810-4AC5-9354-5D15FBB7285D}"/>
               </a:ext>
             </a:extLst>
           </p:cNvPr>
@@ -7206,7 +9457,7 @@
           <p:cNvPr id="10" name="point-2">
             <a:extLst xmlns:a="http://schemas.openxmlformats.org/drawingml/2006/main">
               <a:ext uri="{FF2B5EF4-FFF2-40B4-BE49-F238E27FC236}">
-                <a16:creationId xmlns:a16="http://schemas.microsoft.com/office/drawing/2014/main" id="{4910531F-2453-4A31-9E18-54B6B3953496}"/>
+                <a16:creationId xmlns:a16="http://schemas.microsoft.com/office/drawing/2014/main" id="{7ACE2D7B-DDA0-4D66-913B-ED33197462F3}"/>
               </a:ext>
             </a:extLst>
           </p:cNvPr>
@@ -7264,7 +9515,7 @@
           <p:cNvPr id="11" name="point-band-3">
             <a:extLst xmlns:a="http://schemas.openxmlformats.org/drawingml/2006/main">
               <a:ext uri="{FF2B5EF4-FFF2-40B4-BE49-F238E27FC236}">
-                <a16:creationId xmlns:a16="http://schemas.microsoft.com/office/drawing/2014/main" id="{30A9A14D-FC8F-4A58-B5E8-A1E7AD92AEC4}"/>
+                <a16:creationId xmlns:a16="http://schemas.microsoft.com/office/drawing/2014/main" id="{A53909B3-48B1-4557-93A4-69F5ACDDAAA4}"/>
               </a:ext>
             </a:extLst>
           </p:cNvPr>
@@ -7297,7 +9548,7 @@
           <p:cNvPr id="12" name="point-3">
             <a:extLst xmlns:a="http://schemas.openxmlformats.org/drawingml/2006/main">
               <a:ext uri="{FF2B5EF4-FFF2-40B4-BE49-F238E27FC236}">
-                <a16:creationId xmlns:a16="http://schemas.microsoft.com/office/drawing/2014/main" id="{F1E5F77D-7F72-496D-B62E-C85370F585BC}"/>
+                <a16:creationId xmlns:a16="http://schemas.microsoft.com/office/drawing/2014/main" id="{71DEFBF8-3748-4B15-ABF5-0400D2AF2665}"/>
               </a:ext>
             </a:extLst>
           </p:cNvPr>
@@ -7355,7 +9606,7 @@
           <p:cNvPr id="13" name="point-band-4">
             <a:extLst xmlns:a="http://schemas.openxmlformats.org/drawingml/2006/main">
               <a:ext uri="{FF2B5EF4-FFF2-40B4-BE49-F238E27FC236}">
-                <a16:creationId xmlns:a16="http://schemas.microsoft.com/office/drawing/2014/main" id="{5262CFD3-6ADD-43CB-9A89-22DD6D2E268F}"/>
+                <a16:creationId xmlns:a16="http://schemas.microsoft.com/office/drawing/2014/main" id="{0EE0420D-68D1-455A-98F9-6A6958B6007C}"/>
               </a:ext>
             </a:extLst>
           </p:cNvPr>
@@ -7388,7 +9639,7 @@
           <p:cNvPr id="14" name="point-4">
             <a:extLst xmlns:a="http://schemas.openxmlformats.org/drawingml/2006/main">
               <a:ext uri="{FF2B5EF4-FFF2-40B4-BE49-F238E27FC236}">
-                <a16:creationId xmlns:a16="http://schemas.microsoft.com/office/drawing/2014/main" id="{C9BC88A2-A61E-40F5-9D42-601478AB7435}"/>
+                <a16:creationId xmlns:a16="http://schemas.microsoft.com/office/drawing/2014/main" id="{FB916064-F656-485A-8CE5-DADFE8855287}"/>
               </a:ext>
             </a:extLst>
           </p:cNvPr>
@@ -7444,7 +9695,7 @@
     </p:spTree>
     <p:extLst>
       <p:ext uri="{BB962C8B-B14F-4D97-AF65-F5344CB8AC3E}">
-        <p14:creationId xmlns:p14="http://schemas.microsoft.com/office/powerpoint/2010/main" val="47255645"/>
+        <p14:creationId xmlns:p14="http://schemas.microsoft.com/office/powerpoint/2010/main" val="1244098409"/>
       </p:ext>
     </p:extLst>
   </p:cSld>
@@ -7472,10 +9723,10 @@
       </p:grpSpPr>
       <p:sp>
         <p:nvSpPr>
-          <p:cNvPr id="18" name="accent-line">
-            <a:extLst xmlns:a="http://schemas.openxmlformats.org/drawingml/2006/main">
-              <a:ext uri="{FF2B5EF4-FFF2-40B4-BE49-F238E27FC236}">
-                <a16:creationId xmlns:a16="http://schemas.microsoft.com/office/drawing/2014/main" id="{9835BA4D-8FD1-4BEC-BF83-83D4B8438632}"/>
+          <p:cNvPr id="9" name="accent-line">
+            <a:extLst xmlns:a="http://schemas.openxmlformats.org/drawingml/2006/main">
+              <a:ext uri="{FF2B5EF4-FFF2-40B4-BE49-F238E27FC236}">
+                <a16:creationId xmlns:a16="http://schemas.microsoft.com/office/drawing/2014/main" id="{AE0994C5-6CDE-4BC8-962F-FD6F74BB6039}"/>
               </a:ext>
             </a:extLst>
           </p:cNvPr>
@@ -7508,7 +9759,7 @@
           <p:cNvPr id="2" name="chapter-label">
             <a:extLst xmlns:a="http://schemas.openxmlformats.org/drawingml/2006/main">
               <a:ext uri="{FF2B5EF4-FFF2-40B4-BE49-F238E27FC236}">
-                <a16:creationId xmlns:a16="http://schemas.microsoft.com/office/drawing/2014/main" id="{E7469CA5-857E-434C-BCCE-5B85D3690372}"/>
+                <a16:creationId xmlns:a16="http://schemas.microsoft.com/office/drawing/2014/main" id="{E4070D6D-7AF6-4E93-86AA-6D4799520771}"/>
               </a:ext>
             </a:extLst>
           </p:cNvPr>
@@ -7556,7 +9807,7 @@
                 <a:ea typeface="Helvetica Neue"/>
                 <a:cs typeface="Helvetica Neue"/>
               </a:rPr>
-              <a:t>EXAM CHECK  /  07</a:t>
+              <a:t>CORE IDEA 07  /  07</a:t>
             </a:r>
           </a:p>
         </p:txBody>
@@ -7566,7 +9817,7 @@
           <p:cNvPr id="3" name="slide-number">
             <a:extLst xmlns:a="http://schemas.openxmlformats.org/drawingml/2006/main">
               <a:ext uri="{FF2B5EF4-FFF2-40B4-BE49-F238E27FC236}">
-                <a16:creationId xmlns:a16="http://schemas.microsoft.com/office/drawing/2014/main" id="{AD8AA2B9-4F24-4683-B2CA-277D0C2D8B98}"/>
+                <a16:creationId xmlns:a16="http://schemas.microsoft.com/office/drawing/2014/main" id="{C5A87D93-3AA0-403E-8866-91D545468ED6}"/>
               </a:ext>
             </a:extLst>
           </p:cNvPr>
@@ -7624,7 +9875,7 @@
           <p:cNvPr id="4" name="chapter-footer">
             <a:extLst xmlns:a="http://schemas.openxmlformats.org/drawingml/2006/main">
               <a:ext uri="{FF2B5EF4-FFF2-40B4-BE49-F238E27FC236}">
-                <a16:creationId xmlns:a16="http://schemas.microsoft.com/office/drawing/2014/main" id="{5CB282DB-96D5-4486-A668-5E6CCDFB9A53}"/>
+                <a16:creationId xmlns:a16="http://schemas.microsoft.com/office/drawing/2014/main" id="{3271F400-6415-4F9C-A753-A706F71BCEC8}"/>
               </a:ext>
             </a:extLst>
           </p:cNvPr>
@@ -7679,138 +9930,22 @@
       </p:sp>
       <p:sp>
         <p:nvSpPr>
-          <p:cNvPr id="5" name="exam-title">
-            <a:extLst xmlns:a="http://schemas.openxmlformats.org/drawingml/2006/main">
-              <a:ext uri="{FF2B5EF4-FFF2-40B4-BE49-F238E27FC236}">
-                <a16:creationId xmlns:a16="http://schemas.microsoft.com/office/drawing/2014/main" id="{99E44864-0493-4FD6-944D-77D5DD29CF0A}"/>
-              </a:ext>
-            </a:extLst>
-          </p:cNvPr>
-          <p:cNvSpPr>
-            <a:spLocks xmlns:a="http://schemas.openxmlformats.org/drawingml/2006/main" noGrp="1"/>
-          </p:cNvSpPr>
-          <p:nvPr/>
-        </p:nvSpPr>
-        <p:spPr>
-          <a:xfrm xmlns:a="http://schemas.openxmlformats.org/drawingml/2006/main">
-            <a:off x="390525" y="981075"/>
-            <a:ext cx="10668000" cy="781050"/>
-          </a:xfrm>
-          <a:prstGeom xmlns:a="http://schemas.openxmlformats.org/drawingml/2006/main" prst="rect">
-            <a:avLst/>
-          </a:prstGeom>
-          <a:noFill xmlns:a="http://schemas.openxmlformats.org/drawingml/2006/main"/>
-          <a:ln xmlns:a="http://schemas.openxmlformats.org/drawingml/2006/main" w="0">
-            <a:noFill/>
-            <a:prstDash val="solid"/>
-          </a:ln>
-        </p:spPr>
-        <p:txBody>
-          <a:bodyPr xmlns:a="http://schemas.openxmlformats.org/drawingml/2006/main" anchor="t">
-            <a:noAutofit/>
-          </a:bodyPr>
-          <a:lstStyle xmlns:a="http://schemas.openxmlformats.org/drawingml/2006/main"/>
-          <a:p xmlns:a="http://schemas.openxmlformats.org/drawingml/2006/main">
-            <a:pPr algn="l">
-              <a:defRPr sz="3150" b="1">
-                <a:solidFill>
-                  <a:srgbClr val="111111"/>
-                </a:solidFill>
-                <a:latin typeface="Helvetica Neue"/>
-                <a:ea typeface="Helvetica Neue"/>
-                <a:cs typeface="Helvetica Neue"/>
-              </a:defRPr>
-            </a:pPr>
-            <a:r>
-              <a:rPr sz="3150" b="1">
-                <a:solidFill>
-                  <a:srgbClr val="111111"/>
-                </a:solidFill>
-                <a:latin typeface="Helvetica Neue"/>
-                <a:ea typeface="Helvetica Neue"/>
-                <a:cs typeface="Helvetica Neue"/>
-              </a:rPr>
-              <a:t>Can you answer these without notes?</a:t>
-            </a:r>
-          </a:p>
-        </p:txBody>
-      </p:sp>
-      <p:sp>
-        <p:nvSpPr>
-          <p:cNvPr id="6" name="exam-number-1">
-            <a:extLst xmlns:a="http://schemas.openxmlformats.org/drawingml/2006/main">
-              <a:ext uri="{FF2B5EF4-FFF2-40B4-BE49-F238E27FC236}">
-                <a16:creationId xmlns:a16="http://schemas.microsoft.com/office/drawing/2014/main" id="{2D8C564B-68F1-4F14-9E7A-AF1250270020}"/>
-              </a:ext>
-            </a:extLst>
-          </p:cNvPr>
-          <p:cNvSpPr>
-            <a:spLocks xmlns:a="http://schemas.openxmlformats.org/drawingml/2006/main" noGrp="1"/>
-          </p:cNvSpPr>
-          <p:nvPr/>
-        </p:nvSpPr>
-        <p:spPr>
-          <a:xfrm xmlns:a="http://schemas.openxmlformats.org/drawingml/2006/main">
-            <a:off x="390525" y="2238375"/>
-            <a:ext cx="590550" cy="400050"/>
-          </a:xfrm>
-          <a:prstGeom xmlns:a="http://schemas.openxmlformats.org/drawingml/2006/main" prst="rect">
-            <a:avLst/>
-          </a:prstGeom>
-          <a:noFill xmlns:a="http://schemas.openxmlformats.org/drawingml/2006/main"/>
-          <a:ln xmlns:a="http://schemas.openxmlformats.org/drawingml/2006/main" w="0">
-            <a:noFill/>
-            <a:prstDash val="solid"/>
-          </a:ln>
-        </p:spPr>
-        <p:txBody>
-          <a:bodyPr xmlns:a="http://schemas.openxmlformats.org/drawingml/2006/main" anchor="t">
-            <a:noAutofit/>
-          </a:bodyPr>
-          <a:lstStyle xmlns:a="http://schemas.openxmlformats.org/drawingml/2006/main"/>
-          <a:p xmlns:a="http://schemas.openxmlformats.org/drawingml/2006/main">
-            <a:pPr algn="l">
-              <a:defRPr sz="1725" b="1">
-                <a:solidFill>
-                  <a:srgbClr val="73C8FF"/>
-                </a:solidFill>
-                <a:latin typeface="Helvetica Neue"/>
-                <a:ea typeface="Helvetica Neue"/>
-                <a:cs typeface="Helvetica Neue"/>
-              </a:defRPr>
-            </a:pPr>
-            <a:r>
-              <a:rPr sz="1725" b="1">
-                <a:solidFill>
-                  <a:srgbClr val="73C8FF"/>
-                </a:solidFill>
-                <a:latin typeface="Helvetica Neue"/>
-                <a:ea typeface="Helvetica Neue"/>
-                <a:cs typeface="Helvetica Neue"/>
-              </a:rPr>
-              <a:t>01</a:t>
-            </a:r>
-          </a:p>
-        </p:txBody>
-      </p:sp>
-      <p:sp>
-        <p:nvSpPr>
-          <p:cNvPr id="7" name="exam-question-1">
-            <a:extLst xmlns:a="http://schemas.openxmlformats.org/drawingml/2006/main">
-              <a:ext uri="{FF2B5EF4-FFF2-40B4-BE49-F238E27FC236}">
-                <a16:creationId xmlns:a16="http://schemas.microsoft.com/office/drawing/2014/main" id="{524FF18F-6CD5-4240-A268-28D0174E03DC}"/>
-              </a:ext>
-            </a:extLst>
-          </p:cNvPr>
-          <p:cNvSpPr>
-            <a:spLocks xmlns:a="http://schemas.openxmlformats.org/drawingml/2006/main" noGrp="1"/>
-          </p:cNvSpPr>
-          <p:nvPr/>
-        </p:nvSpPr>
-        <p:spPr>
-          <a:xfrm xmlns:a="http://schemas.openxmlformats.org/drawingml/2006/main">
-            <a:off x="1076325" y="2238375"/>
-            <a:ext cx="4762500" cy="895350"/>
+          <p:cNvPr id="5" name="section-title">
+            <a:extLst xmlns:a="http://schemas.openxmlformats.org/drawingml/2006/main">
+              <a:ext uri="{FF2B5EF4-FFF2-40B4-BE49-F238E27FC236}">
+                <a16:creationId xmlns:a16="http://schemas.microsoft.com/office/drawing/2014/main" id="{D1607DB6-4A23-4F1C-9F93-91723B999D52}"/>
+              </a:ext>
+            </a:extLst>
+          </p:cNvPr>
+          <p:cNvSpPr>
+            <a:spLocks xmlns:a="http://schemas.openxmlformats.org/drawingml/2006/main" noGrp="1"/>
+          </p:cNvSpPr>
+          <p:nvPr/>
+        </p:nvSpPr>
+        <p:spPr>
+          <a:xfrm xmlns:a="http://schemas.openxmlformats.org/drawingml/2006/main">
+            <a:off x="390525" y="971550"/>
+            <a:ext cx="11144250" cy="971550"/>
           </a:xfrm>
           <a:prstGeom xmlns:a="http://schemas.openxmlformats.org/drawingml/2006/main" prst="rect">
             <a:avLst/>
@@ -7828,105 +9963,47 @@
           <a:lstStyle xmlns:a="http://schemas.openxmlformats.org/drawingml/2006/main"/>
           <a:p xmlns:a="http://schemas.openxmlformats.org/drawingml/2006/main">
             <a:pPr algn="l">
-              <a:defRPr sz="1575" b="1">
-                <a:solidFill>
-                  <a:srgbClr val="111111"/>
-                </a:solidFill>
-                <a:latin typeface="Helvetica Neue"/>
-                <a:ea typeface="Helvetica Neue"/>
-                <a:cs typeface="Helvetica Neue"/>
-              </a:defRPr>
-            </a:pPr>
-            <a:r>
-              <a:rPr sz="1575" b="1">
-                <a:solidFill>
-                  <a:srgbClr val="111111"/>
-                </a:solidFill>
-                <a:latin typeface="Helvetica Neue"/>
-                <a:ea typeface="Helvetica Neue"/>
-                <a:cs typeface="Helvetica Neue"/>
-              </a:rPr>
-              <a:t>Why does an LLM need an application-level memory system?</a:t>
-            </a:r>
-          </a:p>
-        </p:txBody>
-      </p:sp>
-      <p:sp>
-        <p:nvSpPr>
-          <p:cNvPr id="8" name="exam-number-2">
-            <a:extLst xmlns:a="http://schemas.openxmlformats.org/drawingml/2006/main">
-              <a:ext uri="{FF2B5EF4-FFF2-40B4-BE49-F238E27FC236}">
-                <a16:creationId xmlns:a16="http://schemas.microsoft.com/office/drawing/2014/main" id="{16A14230-7F72-444C-AD33-AE70F47D9BFA}"/>
-              </a:ext>
-            </a:extLst>
-          </p:cNvPr>
-          <p:cNvSpPr>
-            <a:spLocks xmlns:a="http://schemas.openxmlformats.org/drawingml/2006/main" noGrp="1"/>
-          </p:cNvSpPr>
-          <p:nvPr/>
-        </p:nvSpPr>
-        <p:spPr>
-          <a:xfrm xmlns:a="http://schemas.openxmlformats.org/drawingml/2006/main">
-            <a:off x="6191250" y="2238375"/>
-            <a:ext cx="590550" cy="400050"/>
-          </a:xfrm>
-          <a:prstGeom xmlns:a="http://schemas.openxmlformats.org/drawingml/2006/main" prst="rect">
-            <a:avLst/>
-          </a:prstGeom>
-          <a:noFill xmlns:a="http://schemas.openxmlformats.org/drawingml/2006/main"/>
-          <a:ln xmlns:a="http://schemas.openxmlformats.org/drawingml/2006/main" w="0">
-            <a:noFill/>
-            <a:prstDash val="solid"/>
-          </a:ln>
-        </p:spPr>
-        <p:txBody>
-          <a:bodyPr xmlns:a="http://schemas.openxmlformats.org/drawingml/2006/main" anchor="t">
-            <a:noAutofit/>
-          </a:bodyPr>
-          <a:lstStyle xmlns:a="http://schemas.openxmlformats.org/drawingml/2006/main"/>
-          <a:p xmlns:a="http://schemas.openxmlformats.org/drawingml/2006/main">
-            <a:pPr algn="l">
-              <a:defRPr sz="1725" b="1">
-                <a:solidFill>
-                  <a:srgbClr val="73C8FF"/>
-                </a:solidFill>
-                <a:latin typeface="Helvetica Neue"/>
-                <a:ea typeface="Helvetica Neue"/>
-                <a:cs typeface="Helvetica Neue"/>
-              </a:defRPr>
-            </a:pPr>
-            <a:r>
-              <a:rPr sz="1725" b="1">
-                <a:solidFill>
-                  <a:srgbClr val="73C8FF"/>
-                </a:solidFill>
-                <a:latin typeface="Helvetica Neue"/>
-                <a:ea typeface="Helvetica Neue"/>
-                <a:cs typeface="Helvetica Neue"/>
-              </a:rPr>
-              <a:t>02</a:t>
-            </a:r>
-          </a:p>
-        </p:txBody>
-      </p:sp>
-      <p:sp>
-        <p:nvSpPr>
-          <p:cNvPr id="9" name="exam-question-2">
-            <a:extLst xmlns:a="http://schemas.openxmlformats.org/drawingml/2006/main">
-              <a:ext uri="{FF2B5EF4-FFF2-40B4-BE49-F238E27FC236}">
-                <a16:creationId xmlns:a16="http://schemas.microsoft.com/office/drawing/2014/main" id="{23DEBED5-12A7-4D27-860B-BFDAF7983AF1}"/>
-              </a:ext>
-            </a:extLst>
-          </p:cNvPr>
-          <p:cNvSpPr>
-            <a:spLocks xmlns:a="http://schemas.openxmlformats.org/drawingml/2006/main" noGrp="1"/>
-          </p:cNvSpPr>
-          <p:nvPr/>
-        </p:nvSpPr>
-        <p:spPr>
-          <a:xfrm xmlns:a="http://schemas.openxmlformats.org/drawingml/2006/main">
-            <a:off x="6877050" y="2238375"/>
-            <a:ext cx="4762500" cy="895350"/>
+              <a:defRPr sz="3000" b="1">
+                <a:solidFill>
+                  <a:srgbClr val="111111"/>
+                </a:solidFill>
+                <a:latin typeface="Helvetica Neue"/>
+                <a:ea typeface="Helvetica Neue"/>
+                <a:cs typeface="Helvetica Neue"/>
+              </a:defRPr>
+            </a:pPr>
+            <a:r>
+              <a:rPr sz="3000" b="1">
+                <a:solidFill>
+                  <a:srgbClr val="111111"/>
+                </a:solidFill>
+                <a:latin typeface="Helvetica Neue"/>
+                <a:ea typeface="Helvetica Neue"/>
+                <a:cs typeface="Helvetica Neue"/>
+              </a:rPr>
+              <a:t>Execution state and model context serve different purposes</a:t>
+            </a:r>
+          </a:p>
+        </p:txBody>
+      </p:sp>
+      <p:sp>
+        <p:nvSpPr>
+          <p:cNvPr id="6" name="section-explanation">
+            <a:extLst xmlns:a="http://schemas.openxmlformats.org/drawingml/2006/main">
+              <a:ext uri="{FF2B5EF4-FFF2-40B4-BE49-F238E27FC236}">
+                <a16:creationId xmlns:a16="http://schemas.microsoft.com/office/drawing/2014/main" id="{34215384-F578-4488-A9E6-10CB5149DEA9}"/>
+              </a:ext>
+            </a:extLst>
+          </p:cNvPr>
+          <p:cNvSpPr>
+            <a:spLocks xmlns:a="http://schemas.openxmlformats.org/drawingml/2006/main" noGrp="1"/>
+          </p:cNvSpPr>
+          <p:nvPr/>
+        </p:nvSpPr>
+        <p:spPr>
+          <a:xfrm xmlns:a="http://schemas.openxmlformats.org/drawingml/2006/main">
+            <a:off x="390525" y="2381250"/>
+            <a:ext cx="4524375" cy="2905125"/>
           </a:xfrm>
           <a:prstGeom xmlns:a="http://schemas.openxmlformats.org/drawingml/2006/main" prst="rect">
             <a:avLst/>
@@ -7944,105 +10021,80 @@
           <a:lstStyle xmlns:a="http://schemas.openxmlformats.org/drawingml/2006/main"/>
           <a:p xmlns:a="http://schemas.openxmlformats.org/drawingml/2006/main">
             <a:pPr algn="l">
-              <a:defRPr sz="1575" b="1">
-                <a:solidFill>
-                  <a:srgbClr val="111111"/>
-                </a:solidFill>
-                <a:latin typeface="Helvetica Neue"/>
-                <a:ea typeface="Helvetica Neue"/>
-                <a:cs typeface="Helvetica Neue"/>
-              </a:defRPr>
-            </a:pPr>
-            <a:r>
-              <a:rPr sz="1575" b="1">
-                <a:solidFill>
-                  <a:srgbClr val="111111"/>
-                </a:solidFill>
-                <a:latin typeface="Helvetica Neue"/>
-                <a:ea typeface="Helvetica Neue"/>
-                <a:cs typeface="Helvetica Neue"/>
-              </a:rPr>
-              <a:t>Compare episodic, semantic, and procedural memory.</a:t>
-            </a:r>
-          </a:p>
-        </p:txBody>
-      </p:sp>
-      <p:sp>
-        <p:nvSpPr>
-          <p:cNvPr id="10" name="exam-number-3">
-            <a:extLst xmlns:a="http://schemas.openxmlformats.org/drawingml/2006/main">
-              <a:ext uri="{FF2B5EF4-FFF2-40B4-BE49-F238E27FC236}">
-                <a16:creationId xmlns:a16="http://schemas.microsoft.com/office/drawing/2014/main" id="{E02471E9-60F5-4275-9BAA-52FA3EC89636}"/>
-              </a:ext>
-            </a:extLst>
-          </p:cNvPr>
-          <p:cNvSpPr>
-            <a:spLocks xmlns:a="http://schemas.openxmlformats.org/drawingml/2006/main" noGrp="1"/>
-          </p:cNvSpPr>
-          <p:nvPr/>
-        </p:nvSpPr>
-        <p:spPr>
-          <a:xfrm xmlns:a="http://schemas.openxmlformats.org/drawingml/2006/main">
-            <a:off x="390525" y="3495675"/>
-            <a:ext cx="590550" cy="400050"/>
-          </a:xfrm>
-          <a:prstGeom xmlns:a="http://schemas.openxmlformats.org/drawingml/2006/main" prst="rect">
-            <a:avLst/>
-          </a:prstGeom>
-          <a:noFill xmlns:a="http://schemas.openxmlformats.org/drawingml/2006/main"/>
-          <a:ln xmlns:a="http://schemas.openxmlformats.org/drawingml/2006/main" w="0">
-            <a:noFill/>
-            <a:prstDash val="solid"/>
-          </a:ln>
-        </p:spPr>
-        <p:txBody>
-          <a:bodyPr xmlns:a="http://schemas.openxmlformats.org/drawingml/2006/main" anchor="t">
-            <a:noAutofit/>
-          </a:bodyPr>
-          <a:lstStyle xmlns:a="http://schemas.openxmlformats.org/drawingml/2006/main"/>
-          <a:p xmlns:a="http://schemas.openxmlformats.org/drawingml/2006/main">
-            <a:pPr algn="l">
-              <a:defRPr sz="1725" b="1">
-                <a:solidFill>
-                  <a:srgbClr val="73C8FF"/>
-                </a:solidFill>
-                <a:latin typeface="Helvetica Neue"/>
-                <a:ea typeface="Helvetica Neue"/>
-                <a:cs typeface="Helvetica Neue"/>
-              </a:defRPr>
-            </a:pPr>
-            <a:r>
-              <a:rPr sz="1725" b="1">
-                <a:solidFill>
-                  <a:srgbClr val="73C8FF"/>
-                </a:solidFill>
-                <a:latin typeface="Helvetica Neue"/>
-                <a:ea typeface="Helvetica Neue"/>
-                <a:cs typeface="Helvetica Neue"/>
-              </a:rPr>
-              <a:t>03</a:t>
-            </a:r>
-          </a:p>
-        </p:txBody>
-      </p:sp>
-      <p:sp>
-        <p:nvSpPr>
-          <p:cNvPr id="11" name="exam-question-3">
-            <a:extLst xmlns:a="http://schemas.openxmlformats.org/drawingml/2006/main">
-              <a:ext uri="{FF2B5EF4-FFF2-40B4-BE49-F238E27FC236}">
-                <a16:creationId xmlns:a16="http://schemas.microsoft.com/office/drawing/2014/main" id="{9810553D-492A-40E0-B102-E8363CE3F220}"/>
-              </a:ext>
-            </a:extLst>
-          </p:cNvPr>
-          <p:cNvSpPr>
-            <a:spLocks xmlns:a="http://schemas.openxmlformats.org/drawingml/2006/main" noGrp="1"/>
-          </p:cNvSpPr>
-          <p:nvPr/>
-        </p:nvSpPr>
-        <p:spPr>
-          <a:xfrm xmlns:a="http://schemas.openxmlformats.org/drawingml/2006/main">
-            <a:off x="1076325" y="3495675"/>
-            <a:ext cx="4762500" cy="895350"/>
+              <a:defRPr sz="1875" b="0">
+                <a:solidFill>
+                  <a:srgbClr val="5B5B57"/>
+                </a:solidFill>
+                <a:latin typeface="Helvetica Neue"/>
+                <a:ea typeface="Helvetica Neue"/>
+                <a:cs typeface="Helvetica Neue"/>
+              </a:defRPr>
+            </a:pPr>
+            <a:r>
+              <a:rPr sz="1875" b="0">
+                <a:solidFill>
+                  <a:srgbClr val="5B5B57"/>
+                </a:solidFill>
+                <a:latin typeface="Helvetica Neue"/>
+                <a:ea typeface="Helvetica Neue"/>
+                <a:cs typeface="Helvetica Neue"/>
+              </a:rPr>
+              <a:t>A checkpoint stores workflow state for resumption. A context policy chooses what the next model call can see. Test these mechanisms separately. OpenAI's harness experiment motivates recording context settings as part of the evaluated system.</a:t>
+            </a:r>
+          </a:p>
+        </p:txBody>
+      </p:sp>
+      <p:sp>
+        <p:nvSpPr>
+          <p:cNvPr id="7" name="column-rule">
+            <a:extLst xmlns:a="http://schemas.openxmlformats.org/drawingml/2006/main">
+              <a:ext uri="{FF2B5EF4-FFF2-40B4-BE49-F238E27FC236}">
+                <a16:creationId xmlns:a16="http://schemas.microsoft.com/office/drawing/2014/main" id="{990D77B1-DADB-4C47-9B32-7BB93E253A51}"/>
+              </a:ext>
+            </a:extLst>
+          </p:cNvPr>
+          <p:cNvSpPr>
+            <a:spLocks xmlns:a="http://schemas.openxmlformats.org/drawingml/2006/main" noGrp="1"/>
+          </p:cNvSpPr>
+          <p:nvPr/>
+        </p:nvSpPr>
+        <p:spPr>
+          <a:xfrm xmlns:a="http://schemas.openxmlformats.org/drawingml/2006/main">
+            <a:off x="5334000" y="2343150"/>
+            <a:ext cx="47625" cy="3257550"/>
+          </a:xfrm>
+          <a:prstGeom xmlns:a="http://schemas.openxmlformats.org/drawingml/2006/main" prst="rect">
+            <a:avLst/>
+          </a:prstGeom>
+          <a:solidFill xmlns:a="http://schemas.openxmlformats.org/drawingml/2006/main">
+            <a:srgbClr val="73C8FF"/>
+          </a:solidFill>
+          <a:ln xmlns:a="http://schemas.openxmlformats.org/drawingml/2006/main" w="0">
+            <a:solidFill>
+              <a:srgbClr val="73C8FF"/>
+            </a:solidFill>
+            <a:prstDash val="solid"/>
+          </a:ln>
+        </p:spPr>
+      </p:sp>
+      <p:sp>
+        <p:nvSpPr>
+          <p:cNvPr id="8" name="section-points">
+            <a:extLst xmlns:a="http://schemas.openxmlformats.org/drawingml/2006/main">
+              <a:ext uri="{FF2B5EF4-FFF2-40B4-BE49-F238E27FC236}">
+                <a16:creationId xmlns:a16="http://schemas.microsoft.com/office/drawing/2014/main" id="{33A961C2-AA9A-4844-BB66-9B71E2C32E95}"/>
+              </a:ext>
+            </a:extLst>
+          </p:cNvPr>
+          <p:cNvSpPr>
+            <a:spLocks xmlns:a="http://schemas.openxmlformats.org/drawingml/2006/main" noGrp="1"/>
+          </p:cNvSpPr>
+          <p:nvPr/>
+        </p:nvSpPr>
+        <p:spPr>
+          <a:xfrm xmlns:a="http://schemas.openxmlformats.org/drawingml/2006/main">
+            <a:off x="5857875" y="2343150"/>
+            <a:ext cx="5572125" cy="3429000"/>
           </a:xfrm>
           <a:prstGeom xmlns:a="http://schemas.openxmlformats.org/drawingml/2006/main" prst="rect">
             <a:avLst/>
@@ -8060,67 +10112,37 @@
           <a:lstStyle xmlns:a="http://schemas.openxmlformats.org/drawingml/2006/main"/>
           <a:p xmlns:a="http://schemas.openxmlformats.org/drawingml/2006/main">
             <a:pPr algn="l">
-              <a:defRPr sz="1575" b="1">
-                <a:solidFill>
-                  <a:srgbClr val="111111"/>
-                </a:solidFill>
-                <a:latin typeface="Helvetica Neue"/>
-                <a:ea typeface="Helvetica Neue"/>
-                <a:cs typeface="Helvetica Neue"/>
-              </a:defRPr>
-            </a:pPr>
-            <a:r>
-              <a:rPr sz="1575" b="1">
-                <a:solidFill>
-                  <a:srgbClr val="111111"/>
-                </a:solidFill>
-                <a:latin typeface="Helvetica Neue"/>
-                <a:ea typeface="Helvetica Neue"/>
-                <a:cs typeface="Helvetica Neue"/>
-              </a:rPr>
-              <a:t>What are four ways to manage a full context window?</a:t>
-            </a:r>
-          </a:p>
-        </p:txBody>
-      </p:sp>
-      <p:sp>
-        <p:nvSpPr>
-          <p:cNvPr id="12" name="exam-number-4">
-            <a:extLst xmlns:a="http://schemas.openxmlformats.org/drawingml/2006/main">
-              <a:ext uri="{FF2B5EF4-FFF2-40B4-BE49-F238E27FC236}">
-                <a16:creationId xmlns:a16="http://schemas.microsoft.com/office/drawing/2014/main" id="{150BD4F6-0AA2-4F80-ACA6-1F6CF18F9F5D}"/>
-              </a:ext>
-            </a:extLst>
-          </p:cNvPr>
-          <p:cNvSpPr>
-            <a:spLocks xmlns:a="http://schemas.openxmlformats.org/drawingml/2006/main" noGrp="1"/>
-          </p:cNvSpPr>
-          <p:nvPr/>
-        </p:nvSpPr>
-        <p:spPr>
-          <a:xfrm xmlns:a="http://schemas.openxmlformats.org/drawingml/2006/main">
-            <a:off x="6191250" y="3495675"/>
-            <a:ext cx="590550" cy="400050"/>
-          </a:xfrm>
-          <a:prstGeom xmlns:a="http://schemas.openxmlformats.org/drawingml/2006/main" prst="rect">
-            <a:avLst/>
-          </a:prstGeom>
-          <a:noFill xmlns:a="http://schemas.openxmlformats.org/drawingml/2006/main"/>
-          <a:ln xmlns:a="http://schemas.openxmlformats.org/drawingml/2006/main" w="0">
-            <a:noFill/>
-            <a:prstDash val="solid"/>
-          </a:ln>
-        </p:spPr>
-        <p:txBody>
-          <a:bodyPr xmlns:a="http://schemas.openxmlformats.org/drawingml/2006/main" anchor="t">
-            <a:noAutofit/>
-          </a:bodyPr>
-          <a:lstStyle xmlns:a="http://schemas.openxmlformats.org/drawingml/2006/main"/>
+              <a:defRPr sz="1725" b="1">
+                <a:solidFill>
+                  <a:srgbClr val="111111"/>
+                </a:solidFill>
+                <a:latin typeface="Helvetica Neue"/>
+                <a:ea typeface="Helvetica Neue"/>
+                <a:cs typeface="Helvetica Neue"/>
+              </a:defRPr>
+            </a:pPr>
+            <a:r>
+              <a:rPr sz="1725" b="1">
+                <a:solidFill>
+                  <a:srgbClr val="111111"/>
+                </a:solidFill>
+                <a:latin typeface="Helvetica Neue"/>
+                <a:ea typeface="Helvetica Neue"/>
+                <a:cs typeface="Helvetica Neue"/>
+              </a:rPr>
+              <a:t>01  Reopen a checkpoint before resuming approval.</a:t>
+            </a:r>
+          </a:p>
+          <a:p xmlns:a="http://schemas.openxmlformats.org/drawingml/2006/main">
+            <a:r>
+              <a:t/>
+            </a:r>
+          </a:p>
           <a:p xmlns:a="http://schemas.openxmlformats.org/drawingml/2006/main">
             <a:pPr algn="l">
               <a:defRPr sz="1725" b="1">
                 <a:solidFill>
-                  <a:srgbClr val="73C8FF"/>
+                  <a:srgbClr val="111111"/>
                 </a:solidFill>
                 <a:latin typeface="Helvetica Neue"/>
                 <a:ea typeface="Helvetica Neue"/>
@@ -8130,113 +10152,25 @@
             <a:r>
               <a:rPr sz="1725" b="1">
                 <a:solidFill>
-                  <a:srgbClr val="73C8FF"/>
-                </a:solidFill>
-                <a:latin typeface="Helvetica Neue"/>
-                <a:ea typeface="Helvetica Neue"/>
-                <a:cs typeface="Helvetica Neue"/>
-              </a:rPr>
-              <a:t>04</a:t>
-            </a:r>
-          </a:p>
-        </p:txBody>
-      </p:sp>
-      <p:sp>
-        <p:nvSpPr>
-          <p:cNvPr id="13" name="exam-question-4">
-            <a:extLst xmlns:a="http://schemas.openxmlformats.org/drawingml/2006/main">
-              <a:ext uri="{FF2B5EF4-FFF2-40B4-BE49-F238E27FC236}">
-                <a16:creationId xmlns:a16="http://schemas.microsoft.com/office/drawing/2014/main" id="{F21F07B2-1489-4058-BC9A-3E13EE2E39C2}"/>
-              </a:ext>
-            </a:extLst>
-          </p:cNvPr>
-          <p:cNvSpPr>
-            <a:spLocks xmlns:a="http://schemas.openxmlformats.org/drawingml/2006/main" noGrp="1"/>
-          </p:cNvSpPr>
-          <p:nvPr/>
-        </p:nvSpPr>
-        <p:spPr>
-          <a:xfrm xmlns:a="http://schemas.openxmlformats.org/drawingml/2006/main">
-            <a:off x="6877050" y="3495675"/>
-            <a:ext cx="4762500" cy="895350"/>
-          </a:xfrm>
-          <a:prstGeom xmlns:a="http://schemas.openxmlformats.org/drawingml/2006/main" prst="rect">
-            <a:avLst/>
-          </a:prstGeom>
-          <a:noFill xmlns:a="http://schemas.openxmlformats.org/drawingml/2006/main"/>
-          <a:ln xmlns:a="http://schemas.openxmlformats.org/drawingml/2006/main" w="0">
-            <a:noFill/>
-            <a:prstDash val="solid"/>
-          </a:ln>
-        </p:spPr>
-        <p:txBody>
-          <a:bodyPr xmlns:a="http://schemas.openxmlformats.org/drawingml/2006/main" anchor="t">
-            <a:normAutofit fontScale="100000"/>
-          </a:bodyPr>
-          <a:lstStyle xmlns:a="http://schemas.openxmlformats.org/drawingml/2006/main"/>
-          <a:p xmlns:a="http://schemas.openxmlformats.org/drawingml/2006/main">
-            <a:pPr algn="l">
-              <a:defRPr sz="1575" b="1">
-                <a:solidFill>
-                  <a:srgbClr val="111111"/>
-                </a:solidFill>
-                <a:latin typeface="Helvetica Neue"/>
-                <a:ea typeface="Helvetica Neue"/>
-                <a:cs typeface="Helvetica Neue"/>
-              </a:defRPr>
-            </a:pPr>
-            <a:r>
-              <a:rPr sz="1575" b="1">
-                <a:solidFill>
-                  <a:srgbClr val="111111"/>
-                </a:solidFill>
-                <a:latin typeface="Helvetica Neue"/>
-                <a:ea typeface="Helvetica Neue"/>
-                <a:cs typeface="Helvetica Neue"/>
-              </a:rPr>
-              <a:t>When should an agent write a long-term memory?</a:t>
-            </a:r>
-          </a:p>
-        </p:txBody>
-      </p:sp>
-      <p:sp>
-        <p:nvSpPr>
-          <p:cNvPr id="14" name="exam-number-5">
-            <a:extLst xmlns:a="http://schemas.openxmlformats.org/drawingml/2006/main">
-              <a:ext uri="{FF2B5EF4-FFF2-40B4-BE49-F238E27FC236}">
-                <a16:creationId xmlns:a16="http://schemas.microsoft.com/office/drawing/2014/main" id="{88FAD86E-E185-4767-85DC-9007B3D553E5}"/>
-              </a:ext>
-            </a:extLst>
-          </p:cNvPr>
-          <p:cNvSpPr>
-            <a:spLocks xmlns:a="http://schemas.openxmlformats.org/drawingml/2006/main" noGrp="1"/>
-          </p:cNvSpPr>
-          <p:nvPr/>
-        </p:nvSpPr>
-        <p:spPr>
-          <a:xfrm xmlns:a="http://schemas.openxmlformats.org/drawingml/2006/main">
-            <a:off x="390525" y="4752975"/>
-            <a:ext cx="590550" cy="400050"/>
-          </a:xfrm>
-          <a:prstGeom xmlns:a="http://schemas.openxmlformats.org/drawingml/2006/main" prst="rect">
-            <a:avLst/>
-          </a:prstGeom>
-          <a:noFill xmlns:a="http://schemas.openxmlformats.org/drawingml/2006/main"/>
-          <a:ln xmlns:a="http://schemas.openxmlformats.org/drawingml/2006/main" w="0">
-            <a:noFill/>
-            <a:prstDash val="solid"/>
-          </a:ln>
-        </p:spPr>
-        <p:txBody>
-          <a:bodyPr xmlns:a="http://schemas.openxmlformats.org/drawingml/2006/main" anchor="t">
-            <a:noAutofit/>
-          </a:bodyPr>
-          <a:lstStyle xmlns:a="http://schemas.openxmlformats.org/drawingml/2006/main"/>
+                  <a:srgbClr val="111111"/>
+                </a:solidFill>
+                <a:latin typeface="Helvetica Neue"/>
+                <a:ea typeface="Helvetica Neue"/>
+                <a:cs typeface="Helvetica Neue"/>
+              </a:rPr>
+              <a:t>02  Keep side effects after the approval boundary.</a:t>
+            </a:r>
+          </a:p>
+          <a:p xmlns:a="http://schemas.openxmlformats.org/drawingml/2006/main">
+            <a:r>
+              <a:t/>
+            </a:r>
+          </a:p>
           <a:p xmlns:a="http://schemas.openxmlformats.org/drawingml/2006/main">
             <a:pPr algn="l">
               <a:defRPr sz="1725" b="1">
                 <a:solidFill>
-                  <a:srgbClr val="73C8FF"/>
+                  <a:srgbClr val="111111"/>
                 </a:solidFill>
                 <a:latin typeface="Helvetica Neue"/>
                 <a:ea typeface="Helvetica Neue"/>
@@ -8246,187 +10180,13 @@
             <a:r>
               <a:rPr sz="1725" b="1">
                 <a:solidFill>
-                  <a:srgbClr val="73C8FF"/>
-                </a:solidFill>
-                <a:latin typeface="Helvetica Neue"/>
-                <a:ea typeface="Helvetica Neue"/>
-                <a:cs typeface="Helvetica Neue"/>
-              </a:rPr>
-              <a:t>05</a:t>
-            </a:r>
-          </a:p>
-        </p:txBody>
-      </p:sp>
-      <p:sp>
-        <p:nvSpPr>
-          <p:cNvPr id="15" name="exam-question-5">
-            <a:extLst xmlns:a="http://schemas.openxmlformats.org/drawingml/2006/main">
-              <a:ext uri="{FF2B5EF4-FFF2-40B4-BE49-F238E27FC236}">
-                <a16:creationId xmlns:a16="http://schemas.microsoft.com/office/drawing/2014/main" id="{1BF0BF7E-90D9-405D-89D6-B74AD2340A58}"/>
-              </a:ext>
-            </a:extLst>
-          </p:cNvPr>
-          <p:cNvSpPr>
-            <a:spLocks xmlns:a="http://schemas.openxmlformats.org/drawingml/2006/main" noGrp="1"/>
-          </p:cNvSpPr>
-          <p:nvPr/>
-        </p:nvSpPr>
-        <p:spPr>
-          <a:xfrm xmlns:a="http://schemas.openxmlformats.org/drawingml/2006/main">
-            <a:off x="1076325" y="4752975"/>
-            <a:ext cx="4762500" cy="895350"/>
-          </a:xfrm>
-          <a:prstGeom xmlns:a="http://schemas.openxmlformats.org/drawingml/2006/main" prst="rect">
-            <a:avLst/>
-          </a:prstGeom>
-          <a:noFill xmlns:a="http://schemas.openxmlformats.org/drawingml/2006/main"/>
-          <a:ln xmlns:a="http://schemas.openxmlformats.org/drawingml/2006/main" w="0">
-            <a:noFill/>
-            <a:prstDash val="solid"/>
-          </a:ln>
-        </p:spPr>
-        <p:txBody>
-          <a:bodyPr xmlns:a="http://schemas.openxmlformats.org/drawingml/2006/main" anchor="t">
-            <a:normAutofit fontScale="100000"/>
-          </a:bodyPr>
-          <a:lstStyle xmlns:a="http://schemas.openxmlformats.org/drawingml/2006/main"/>
-          <a:p xmlns:a="http://schemas.openxmlformats.org/drawingml/2006/main">
-            <a:pPr algn="l">
-              <a:defRPr sz="1575" b="1">
-                <a:solidFill>
-                  <a:srgbClr val="111111"/>
-                </a:solidFill>
-                <a:latin typeface="Helvetica Neue"/>
-                <a:ea typeface="Helvetica Neue"/>
-                <a:cs typeface="Helvetica Neue"/>
-              </a:defRPr>
-            </a:pPr>
-            <a:r>
-              <a:rPr sz="1575" b="1">
-                <a:solidFill>
-                  <a:srgbClr val="111111"/>
-                </a:solidFill>
-                <a:latin typeface="Helvetica Neue"/>
-                <a:ea typeface="Helvetica Neue"/>
-                <a:cs typeface="Helvetica Neue"/>
-              </a:rPr>
-              <a:t>Why does a million-token context not eliminate memory architecture?</a:t>
-            </a:r>
-          </a:p>
-        </p:txBody>
-      </p:sp>
-      <p:sp>
-        <p:nvSpPr>
-          <p:cNvPr id="16" name="exam-number-6">
-            <a:extLst xmlns:a="http://schemas.openxmlformats.org/drawingml/2006/main">
-              <a:ext uri="{FF2B5EF4-FFF2-40B4-BE49-F238E27FC236}">
-                <a16:creationId xmlns:a16="http://schemas.microsoft.com/office/drawing/2014/main" id="{A2BCFCF5-C7E7-47FB-9D85-3D21ECBFE75A}"/>
-              </a:ext>
-            </a:extLst>
-          </p:cNvPr>
-          <p:cNvSpPr>
-            <a:spLocks xmlns:a="http://schemas.openxmlformats.org/drawingml/2006/main" noGrp="1"/>
-          </p:cNvSpPr>
-          <p:nvPr/>
-        </p:nvSpPr>
-        <p:spPr>
-          <a:xfrm xmlns:a="http://schemas.openxmlformats.org/drawingml/2006/main">
-            <a:off x="6191250" y="4752975"/>
-            <a:ext cx="590550" cy="400050"/>
-          </a:xfrm>
-          <a:prstGeom xmlns:a="http://schemas.openxmlformats.org/drawingml/2006/main" prst="rect">
-            <a:avLst/>
-          </a:prstGeom>
-          <a:noFill xmlns:a="http://schemas.openxmlformats.org/drawingml/2006/main"/>
-          <a:ln xmlns:a="http://schemas.openxmlformats.org/drawingml/2006/main" w="0">
-            <a:noFill/>
-            <a:prstDash val="solid"/>
-          </a:ln>
-        </p:spPr>
-        <p:txBody>
-          <a:bodyPr xmlns:a="http://schemas.openxmlformats.org/drawingml/2006/main" anchor="t">
-            <a:noAutofit/>
-          </a:bodyPr>
-          <a:lstStyle xmlns:a="http://schemas.openxmlformats.org/drawingml/2006/main"/>
-          <a:p xmlns:a="http://schemas.openxmlformats.org/drawingml/2006/main">
-            <a:pPr algn="l">
-              <a:defRPr sz="1725" b="1">
-                <a:solidFill>
-                  <a:srgbClr val="73C8FF"/>
-                </a:solidFill>
-                <a:latin typeface="Helvetica Neue"/>
-                <a:ea typeface="Helvetica Neue"/>
-                <a:cs typeface="Helvetica Neue"/>
-              </a:defRPr>
-            </a:pPr>
-            <a:r>
-              <a:rPr sz="1725" b="1">
-                <a:solidFill>
-                  <a:srgbClr val="73C8FF"/>
-                </a:solidFill>
-                <a:latin typeface="Helvetica Neue"/>
-                <a:ea typeface="Helvetica Neue"/>
-                <a:cs typeface="Helvetica Neue"/>
-              </a:rPr>
-              <a:t>06</a:t>
-            </a:r>
-          </a:p>
-        </p:txBody>
-      </p:sp>
-      <p:sp>
-        <p:nvSpPr>
-          <p:cNvPr id="17" name="exam-question-6">
-            <a:extLst xmlns:a="http://schemas.openxmlformats.org/drawingml/2006/main">
-              <a:ext uri="{FF2B5EF4-FFF2-40B4-BE49-F238E27FC236}">
-                <a16:creationId xmlns:a16="http://schemas.microsoft.com/office/drawing/2014/main" id="{447F07E0-BB84-486C-A80D-0E1538E4D6B6}"/>
-              </a:ext>
-            </a:extLst>
-          </p:cNvPr>
-          <p:cNvSpPr>
-            <a:spLocks xmlns:a="http://schemas.openxmlformats.org/drawingml/2006/main" noGrp="1"/>
-          </p:cNvSpPr>
-          <p:nvPr/>
-        </p:nvSpPr>
-        <p:spPr>
-          <a:xfrm xmlns:a="http://schemas.openxmlformats.org/drawingml/2006/main">
-            <a:off x="6877050" y="4752975"/>
-            <a:ext cx="4762500" cy="895350"/>
-          </a:xfrm>
-          <a:prstGeom xmlns:a="http://schemas.openxmlformats.org/drawingml/2006/main" prst="rect">
-            <a:avLst/>
-          </a:prstGeom>
-          <a:noFill xmlns:a="http://schemas.openxmlformats.org/drawingml/2006/main"/>
-          <a:ln xmlns:a="http://schemas.openxmlformats.org/drawingml/2006/main" w="0">
-            <a:noFill/>
-            <a:prstDash val="solid"/>
-          </a:ln>
-        </p:spPr>
-        <p:txBody>
-          <a:bodyPr xmlns:a="http://schemas.openxmlformats.org/drawingml/2006/main" anchor="t">
-            <a:normAutofit fontScale="100000"/>
-          </a:bodyPr>
-          <a:lstStyle xmlns:a="http://schemas.openxmlformats.org/drawingml/2006/main"/>
-          <a:p xmlns:a="http://schemas.openxmlformats.org/drawingml/2006/main">
-            <a:pPr algn="l">
-              <a:defRPr sz="1575" b="1">
-                <a:solidFill>
-                  <a:srgbClr val="111111"/>
-                </a:solidFill>
-                <a:latin typeface="Helvetica Neue"/>
-                <a:ea typeface="Helvetica Neue"/>
-                <a:cs typeface="Helvetica Neue"/>
-              </a:defRPr>
-            </a:pPr>
-            <a:r>
-              <a:rPr sz="1575" b="1">
-                <a:solidFill>
-                  <a:srgbClr val="111111"/>
-                </a:solidFill>
-                <a:latin typeface="Helvetica Neue"/>
-                <a:ea typeface="Helvetica Neue"/>
-                <a:cs typeface="Helvetica Neue"/>
-              </a:rPr>
-              <a:t>How should memory be evaluated and governed?</a:t>
+                  <a:srgbClr val="111111"/>
+                </a:solidFill>
+                <a:latin typeface="Helvetica Neue"/>
+                <a:ea typeface="Helvetica Neue"/>
+                <a:cs typeface="Helvetica Neue"/>
+              </a:rPr>
+              <a:t>03  Compare context policies without changing the task set.</a:t>
             </a:r>
           </a:p>
         </p:txBody>
@@ -8434,7 +10194,7 @@
     </p:spTree>
     <p:extLst>
       <p:ext uri="{BB962C8B-B14F-4D97-AF65-F5344CB8AC3E}">
-        <p14:creationId xmlns:p14="http://schemas.microsoft.com/office/powerpoint/2010/main" val="935101482"/>
+        <p14:creationId xmlns:p14="http://schemas.microsoft.com/office/powerpoint/2010/main" val="2092767248"/>
       </p:ext>
     </p:extLst>
   </p:cSld>
@@ -8442,9 +10202,9 @@
 </file>
 
 <file path=ppt/theme/theme1.xml><?xml version="1.0" encoding="utf-8"?>
-<a:theme xmlns:a="http://schemas.openxmlformats.org/drawingml/2006/main" name="ChatGPT">
+<a:theme xmlns:a="http://schemas.openxmlformats.org/drawingml/2006/main" name="Course">
   <a:themeElements>
-    <a:clrScheme name="ChatGPT">
+    <a:clrScheme name="Course">
       <a:dk1>
         <a:srgbClr val="000000"/>
       </a:dk1>
@@ -8494,7 +10254,7 @@
         <a:cs typeface="Calibri"/>
       </a:minorFont>
     </a:fontScheme>
-    <a:fmtScheme name="ChatGPT">
+    <a:fmtScheme name="Course">
       <a:fillStyleLst>
         <a:solidFill>
           <a:schemeClr val="phClr"/>
